--- a/Slides/Module 03 Unit Testing.pptx
+++ b/Slides/Module 03 Unit Testing.pptx
@@ -322,7 +322,7 @@
           <a:p>
             <a:fld id="{7C7E5181-6CF5-45F7-A87A-E0E0B1FD7549}" type="datetimeFigureOut">
               <a:rPr lang="en-US" smtClean="0"/>
-              <a:t>8/11/2026</a:t>
+              <a:t>8/17/2026</a:t>
             </a:fld>
             <a:endParaRPr lang="en-US"/>
           </a:p>
@@ -4893,7 +4893,7 @@
           <a:p>
             <a:fld id="{5D2A64DE-480B-420F-9649-4F8E696E08E0}" type="datetime1">
               <a:rPr lang="en-US" smtClean="0"/>
-              <a:t>8/11/2026</a:t>
+              <a:t>8/17/2026</a:t>
             </a:fld>
             <a:endParaRPr lang="en-US"/>
           </a:p>
@@ -5217,7 +5217,7 @@
           <a:p>
             <a:fld id="{EA476A42-A091-4468-A075-64A31BE59948}" type="datetime1">
               <a:rPr lang="en-US" smtClean="0"/>
-              <a:t>8/11/2026</a:t>
+              <a:t>8/17/2026</a:t>
             </a:fld>
             <a:endParaRPr lang="en-US"/>
           </a:p>
@@ -5415,7 +5415,7 @@
           <a:p>
             <a:fld id="{0D3616D0-8311-4107-9726-6B805E7D05BA}" type="datetime1">
               <a:rPr lang="en-US" smtClean="0"/>
-              <a:t>8/11/2026</a:t>
+              <a:t>8/17/2026</a:t>
             </a:fld>
             <a:endParaRPr lang="en-US"/>
           </a:p>
@@ -5623,7 +5623,7 @@
           <a:p>
             <a:fld id="{3BC2557A-5C88-417A-A763-5AC779462A5F}" type="datetime1">
               <a:rPr lang="en-US" smtClean="0"/>
-              <a:t>8/11/2026</a:t>
+              <a:t>8/17/2026</a:t>
             </a:fld>
             <a:endParaRPr lang="en-US"/>
           </a:p>
@@ -6045,7 +6045,7 @@
           <a:p>
             <a:fld id="{07C7BFD4-467E-4EDE-93EA-052F5B39A4E5}" type="datetime1">
               <a:rPr lang="en-US" smtClean="0"/>
-              <a:t>8/11/2026</a:t>
+              <a:t>8/17/2026</a:t>
             </a:fld>
             <a:endParaRPr lang="en-US"/>
           </a:p>
@@ -6295,7 +6295,7 @@
           <a:p>
             <a:fld id="{07C7BFD4-467E-4EDE-93EA-052F5B39A4E5}" type="datetime1">
               <a:rPr lang="en-US" smtClean="0"/>
-              <a:t>8/11/2026</a:t>
+              <a:t>8/17/2026</a:t>
             </a:fld>
             <a:endParaRPr lang="en-US"/>
           </a:p>
@@ -6477,7 +6477,7 @@
           <a:p>
             <a:fld id="{109E55A0-C911-4F03-82FC-7E5926047D46}" type="datetime1">
               <a:rPr lang="en-US" smtClean="0"/>
-              <a:t>8/11/2026</a:t>
+              <a:t>8/17/2026</a:t>
             </a:fld>
             <a:endParaRPr lang="en-US"/>
           </a:p>
@@ -6790,7 +6790,7 @@
           <a:p>
             <a:fld id="{A533CBE2-D5BE-47AC-ADC2-9CDFC1D0CF90}" type="datetime1">
               <a:rPr lang="en-US" smtClean="0"/>
-              <a:t>8/11/2026</a:t>
+              <a:t>8/17/2026</a:t>
             </a:fld>
             <a:endParaRPr lang="en-US"/>
           </a:p>
@@ -7091,7 +7091,7 @@
           <a:p>
             <a:fld id="{39B7EDB1-CE74-4951-85A2-0B01C2128E28}" type="datetime1">
               <a:rPr lang="en-US" smtClean="0"/>
-              <a:t>8/11/2026</a:t>
+              <a:t>8/17/2026</a:t>
             </a:fld>
             <a:endParaRPr lang="en-US"/>
           </a:p>
@@ -7539,7 +7539,7 @@
           <a:p>
             <a:fld id="{2BC7EB92-A5C2-4807-A9DC-9EDE6CBFB241}" type="datetime1">
               <a:rPr lang="en-US" smtClean="0"/>
-              <a:t>8/11/2026</a:t>
+              <a:t>8/17/2026</a:t>
             </a:fld>
             <a:endParaRPr lang="en-US"/>
           </a:p>
@@ -7652,7 +7652,7 @@
           <a:p>
             <a:fld id="{2B7B7EE0-7771-4CD5-9B2B-3550753A54A1}" type="datetime1">
               <a:rPr lang="en-US" smtClean="0"/>
-              <a:t>8/11/2026</a:t>
+              <a:t>8/17/2026</a:t>
             </a:fld>
             <a:endParaRPr lang="en-US"/>
           </a:p>
@@ -7963,7 +7963,7 @@
           <a:p>
             <a:fld id="{F8B318B3-0E87-4416-A9B8-D891968C2727}" type="datetime1">
               <a:rPr lang="en-US" smtClean="0"/>
-              <a:t>8/11/2026</a:t>
+              <a:t>8/17/2026</a:t>
             </a:fld>
             <a:endParaRPr lang="en-US"/>
           </a:p>
@@ -8204,7 +8204,7 @@
           <a:p>
             <a:fld id="{54D997E8-DDEE-43F1-8D9B-F8A1E11DE488}" type="datetime1">
               <a:rPr lang="en-US" smtClean="0"/>
-              <a:t>8/11/2026</a:t>
+              <a:t>8/17/2026</a:t>
             </a:fld>
             <a:endParaRPr lang="en-US"/>
           </a:p>
@@ -14297,11 +14297,13 @@
         </p:nvSpPr>
         <p:spPr/>
         <p:txBody>
-          <a:bodyPr/>
+          <a:bodyPr>
+            <a:normAutofit/>
+          </a:bodyPr>
           <a:lstStyle/>
           <a:p>
             <a:r>
-              <a:rPr lang="en-US" dirty="0"/>
+              <a:rPr lang="en-US" sz="3600" dirty="0"/>
               <a:t>Property-based tests can specify a range of inputs</a:t>
             </a:r>
           </a:p>
@@ -15983,7 +15985,12 @@
             <p:ph idx="1"/>
           </p:nvPr>
         </p:nvSpPr>
-        <p:spPr/>
+        <p:spPr>
+          <a:xfrm>
+            <a:off x="838200" y="1500160"/>
+            <a:ext cx="9242502" cy="4351338"/>
+          </a:xfrm>
+        </p:spPr>
         <p:txBody>
           <a:bodyPr/>
           <a:lstStyle/>
@@ -16074,7 +16081,7 @@
           <a:p>
             <a:r>
               <a:rPr lang="en-US" dirty="0"/>
-              <a:t>3.1 Have we tested enough of the code?</a:t>
+              <a:t>3.2 Have we tested enough of the code?</a:t>
             </a:r>
           </a:p>
         </p:txBody>
@@ -16095,7 +16102,12 @@
             <p:ph idx="1"/>
           </p:nvPr>
         </p:nvSpPr>
-        <p:spPr/>
+        <p:spPr>
+          <a:xfrm>
+            <a:off x="838200" y="1500160"/>
+            <a:ext cx="9197898" cy="4351338"/>
+          </a:xfrm>
+        </p:spPr>
         <p:txBody>
           <a:bodyPr/>
           <a:lstStyle/>
@@ -17600,7 +17612,7 @@
           <a:lstStyle/>
           <a:p>
             <a:r>
-              <a:rPr lang="en-US"/>
+              <a:rPr lang="en-US" dirty="0"/>
               <a:t>Learning Goals for this Lesson</a:t>
             </a:r>
           </a:p>
@@ -22747,7 +22759,7 @@
           <a:p>
             <a:r>
               <a:rPr lang="en-US" dirty="0"/>
-              <a:t>Code Coverage: Review</a:t>
+              <a:t>Review of Section 3.2</a:t>
             </a:r>
           </a:p>
         </p:txBody>
@@ -22938,7 +22950,12 @@
             <p:ph idx="1"/>
           </p:nvPr>
         </p:nvSpPr>
-        <p:spPr/>
+        <p:spPr>
+          <a:xfrm>
+            <a:off x="838199" y="1500160"/>
+            <a:ext cx="9175595" cy="4351338"/>
+          </a:xfrm>
+        </p:spPr>
         <p:txBody>
           <a:bodyPr/>
           <a:lstStyle/>
@@ -23397,8 +23414,15 @@
           <a:p>
             <a:r>
               <a:rPr lang="en-US" b="1" dirty="0"/>
-              <a:t>Integration Tests</a:t>
-            </a:r>
+              <a:t>Integration Tests: </a:t>
+            </a:r>
+            <a:r>
+              <a:rPr lang="en-US" dirty="0"/>
+              <a:t>testing more than a single unit</a:t>
+            </a:r>
+          </a:p>
+          <a:p>
+            <a:pPr lvl="1"/>
             <a:r>
               <a:rPr lang="en-US" dirty="0"/>
               <a:t> test how parts of a program work together: that’s where we ensure </a:t>
@@ -23643,7 +23667,7 @@
           </a:ln>
           <a:extLst>
             <a:ext uri="{C572A759-6A51-4108-AA02-DFA0A04FC94B}">
-              <ma14:wrappingTextBoxFlag xmlns:ma14="http://schemas.microsoft.com/office/mac/drawingml/2011/main" xmlns:a14="http://schemas.microsoft.com/office/drawing/2010/main" xmlns:m="http://schemas.openxmlformats.org/officeDocument/2006/math" xmlns="" val="1"/>
+              <ma14:wrappingTextBoxFlag xmlns="" xmlns:m="http://schemas.openxmlformats.org/officeDocument/2006/math" xmlns:a14="http://schemas.microsoft.com/office/drawing/2010/main" xmlns:ma14="http://schemas.microsoft.com/office/mac/drawingml/2011/main" val="1"/>
             </a:ext>
           </a:extLst>
         </p:spPr>
@@ -23981,7 +24005,7 @@
           </a:ln>
           <a:extLst>
             <a:ext uri="{C572A759-6A51-4108-AA02-DFA0A04FC94B}">
-              <ma14:wrappingTextBoxFlag xmlns:ma14="http://schemas.microsoft.com/office/mac/drawingml/2011/main" xmlns:a14="http://schemas.microsoft.com/office/drawing/2010/main" xmlns:m="http://schemas.openxmlformats.org/officeDocument/2006/math" xmlns="" val="1"/>
+              <ma14:wrappingTextBoxFlag xmlns="" xmlns:m="http://schemas.openxmlformats.org/officeDocument/2006/math" xmlns:a14="http://schemas.microsoft.com/office/drawing/2010/main" xmlns:ma14="http://schemas.microsoft.com/office/mac/drawingml/2011/main" val="1"/>
             </a:ext>
           </a:extLst>
         </p:spPr>
@@ -24406,7 +24430,7 @@
           </a:ln>
           <a:extLst>
             <a:ext uri="{C572A759-6A51-4108-AA02-DFA0A04FC94B}">
-              <ma14:wrappingTextBoxFlag xmlns:ma14="http://schemas.microsoft.com/office/mac/drawingml/2011/main" xmlns:a14="http://schemas.microsoft.com/office/drawing/2010/main" xmlns:m="http://schemas.openxmlformats.org/officeDocument/2006/math" xmlns="" val="1"/>
+              <ma14:wrappingTextBoxFlag xmlns="" xmlns:m="http://schemas.openxmlformats.org/officeDocument/2006/math" xmlns:a14="http://schemas.microsoft.com/office/drawing/2010/main" xmlns:ma14="http://schemas.microsoft.com/office/mac/drawingml/2011/main" val="1"/>
             </a:ext>
           </a:extLst>
         </p:spPr>
@@ -24443,7 +24467,7 @@
           </a:ln>
           <a:extLst>
             <a:ext uri="{C572A759-6A51-4108-AA02-DFA0A04FC94B}">
-              <ma14:wrappingTextBoxFlag xmlns:ma14="http://schemas.microsoft.com/office/mac/drawingml/2011/main" xmlns:a14="http://schemas.microsoft.com/office/drawing/2010/main" xmlns:m="http://schemas.openxmlformats.org/officeDocument/2006/math" xmlns="" val="1"/>
+              <ma14:wrappingTextBoxFlag xmlns="" xmlns:m="http://schemas.openxmlformats.org/officeDocument/2006/math" xmlns:a14="http://schemas.microsoft.com/office/drawing/2010/main" xmlns:ma14="http://schemas.microsoft.com/office/mac/drawingml/2011/main" val="1"/>
             </a:ext>
           </a:extLst>
         </p:spPr>
@@ -24506,7 +24530,7 @@
             </a:ln>
             <a:extLst>
               <a:ext uri="{C572A759-6A51-4108-AA02-DFA0A04FC94B}">
-                <ma14:wrappingTextBoxFlag xmlns:ma14="http://schemas.microsoft.com/office/mac/drawingml/2011/main" xmlns:a14="http://schemas.microsoft.com/office/drawing/2010/main" xmlns:m="http://schemas.openxmlformats.org/officeDocument/2006/math" xmlns="" val="1"/>
+                <ma14:wrappingTextBoxFlag xmlns="" xmlns:m="http://schemas.openxmlformats.org/officeDocument/2006/math" xmlns:a14="http://schemas.microsoft.com/office/drawing/2010/main" xmlns:ma14="http://schemas.microsoft.com/office/mac/drawingml/2011/main" val="1"/>
               </a:ext>
             </a:extLst>
           </p:spPr>
@@ -29015,7 +29039,7 @@
           </a:ln>
           <a:extLst>
             <a:ext uri="{C572A759-6A51-4108-AA02-DFA0A04FC94B}">
-              <ma14:wrappingTextBoxFlag xmlns:ma14="http://schemas.microsoft.com/office/mac/drawingml/2011/main" xmlns:a14="http://schemas.microsoft.com/office/drawing/2010/main" xmlns:m="http://schemas.openxmlformats.org/officeDocument/2006/math" xmlns="" val="1"/>
+              <ma14:wrappingTextBoxFlag xmlns="" xmlns:m="http://schemas.openxmlformats.org/officeDocument/2006/math" xmlns:a14="http://schemas.microsoft.com/office/drawing/2010/main" xmlns:ma14="http://schemas.microsoft.com/office/mac/drawingml/2011/main" val="1"/>
             </a:ext>
           </a:extLst>
         </p:spPr>
@@ -29380,7 +29404,7 @@
           </a:ln>
           <a:extLst>
             <a:ext uri="{C572A759-6A51-4108-AA02-DFA0A04FC94B}">
-              <ma14:wrappingTextBoxFlag xmlns:ma14="http://schemas.microsoft.com/office/mac/drawingml/2011/main" xmlns:a14="http://schemas.microsoft.com/office/drawing/2010/main" xmlns:m="http://schemas.openxmlformats.org/officeDocument/2006/math" xmlns="" val="1"/>
+              <ma14:wrappingTextBoxFlag xmlns="" xmlns:m="http://schemas.openxmlformats.org/officeDocument/2006/math" xmlns:a14="http://schemas.microsoft.com/office/drawing/2010/main" xmlns:ma14="http://schemas.microsoft.com/office/mac/drawingml/2011/main" val="1"/>
             </a:ext>
           </a:extLst>
         </p:spPr>
@@ -29451,7 +29475,7 @@
             </a:r>
             <a:r>
               <a:rPr lang="en-US" dirty="0"/>
-              <a:t> the specification?</a:t>
+              <a:t> the specification (Beyonce rule)</a:t>
             </a:r>
             <a:endParaRPr dirty="0"/>
           </a:p>
@@ -29470,7 +29494,7 @@
         <p:spPr>
           <a:xfrm>
             <a:off x="838199" y="1500160"/>
-            <a:ext cx="8574741" cy="4351338"/>
+            <a:ext cx="9643947" cy="4351338"/>
           </a:xfrm>
           <a:prstGeom prst="rect">
             <a:avLst/>
@@ -29617,7 +29641,7 @@
           </a:ln>
           <a:extLst>
             <a:ext uri="{C572A759-6A51-4108-AA02-DFA0A04FC94B}">
-              <ma14:wrappingTextBoxFlag xmlns:ma14="http://schemas.microsoft.com/office/mac/drawingml/2011/main" xmlns:a14="http://schemas.microsoft.com/office/drawing/2010/main" xmlns:m="http://schemas.openxmlformats.org/officeDocument/2006/math" xmlns="" val="1"/>
+              <ma14:wrappingTextBoxFlag xmlns="" xmlns:m="http://schemas.openxmlformats.org/officeDocument/2006/math" xmlns:a14="http://schemas.microsoft.com/office/drawing/2010/main" xmlns:ma14="http://schemas.microsoft.com/office/mac/drawingml/2011/main" val="1"/>
             </a:ext>
           </a:extLst>
         </p:spPr>
@@ -30085,7 +30109,7 @@
           </a:ln>
           <a:extLst>
             <a:ext uri="{C572A759-6A51-4108-AA02-DFA0A04FC94B}">
-              <ma14:wrappingTextBoxFlag xmlns:ma14="http://schemas.microsoft.com/office/mac/drawingml/2011/main" xmlns:a14="http://schemas.microsoft.com/office/drawing/2010/main" xmlns:m="http://schemas.openxmlformats.org/officeDocument/2006/math" xmlns="" val="1"/>
+              <ma14:wrappingTextBoxFlag xmlns="" xmlns:m="http://schemas.openxmlformats.org/officeDocument/2006/math" xmlns:a14="http://schemas.microsoft.com/office/drawing/2010/main" xmlns:ma14="http://schemas.microsoft.com/office/mac/drawingml/2011/main" val="1"/>
             </a:ext>
           </a:extLst>
         </p:spPr>
@@ -30577,7 +30601,7 @@
           </a:ln>
           <a:extLst>
             <a:ext uri="{C572A759-6A51-4108-AA02-DFA0A04FC94B}">
-              <ma14:wrappingTextBoxFlag xmlns="" xmlns:m="http://schemas.openxmlformats.org/officeDocument/2006/math" xmlns:a14="http://schemas.microsoft.com/office/drawing/2010/main" xmlns:ma14="http://schemas.microsoft.com/office/mac/drawingml/2011/main" val="1"/>
+              <ma14:wrappingTextBoxFlag xmlns:ma14="http://schemas.microsoft.com/office/mac/drawingml/2011/main" xmlns:a14="http://schemas.microsoft.com/office/drawing/2010/main" xmlns:m="http://schemas.openxmlformats.org/officeDocument/2006/math" xmlns="" val="1"/>
             </a:ext>
           </a:extLst>
         </p:spPr>
@@ -31233,9 +31257,16 @@
             <p:ph idx="1"/>
           </p:nvPr>
         </p:nvSpPr>
-        <p:spPr/>
+        <p:spPr>
+          <a:xfrm>
+            <a:off x="838199" y="1500160"/>
+            <a:ext cx="8383859" cy="4351338"/>
+          </a:xfrm>
+        </p:spPr>
         <p:txBody>
-          <a:bodyPr/>
+          <a:bodyPr>
+            <a:normAutofit lnSpcReduction="10000"/>
+          </a:bodyPr>
           <a:lstStyle/>
           <a:p>
             <a:r>
@@ -31269,6 +31300,18 @@
           </a:p>
           <a:p>
             <a:endParaRPr lang="en-US" dirty="0"/>
+          </a:p>
+          <a:p>
+            <a:pPr marL="0" indent="0">
+              <a:buNone/>
+            </a:pPr>
+            <a:r>
+              <a:rPr lang="en-US" i="1" dirty="0"/>
+              <a:t>Nevertheless, we start writing tests in TDD</a:t>
+            </a:r>
+          </a:p>
+          <a:p>
+            <a:endParaRPr lang="en-US" i="1" dirty="0"/>
           </a:p>
         </p:txBody>
       </p:sp>

--- a/Slides/Module 03 Unit Testing.pptx
+++ b/Slides/Module 03 Unit Testing.pptx
@@ -5,15 +5,15 @@
     <p:sldMasterId id="2147483648" r:id="rId1"/>
   </p:sldMasterIdLst>
   <p:notesMasterIdLst>
-    <p:notesMasterId r:id="rId44"/>
+    <p:notesMasterId r:id="rId45"/>
   </p:notesMasterIdLst>
   <p:sldIdLst>
     <p:sldId id="719" r:id="rId2"/>
     <p:sldId id="702" r:id="rId3"/>
-    <p:sldId id="699" r:id="rId4"/>
-    <p:sldId id="696" r:id="rId5"/>
-    <p:sldId id="697" r:id="rId6"/>
-    <p:sldId id="738" r:id="rId7"/>
+    <p:sldId id="738" r:id="rId4"/>
+    <p:sldId id="699" r:id="rId5"/>
+    <p:sldId id="696" r:id="rId6"/>
+    <p:sldId id="697" r:id="rId7"/>
     <p:sldId id="731" r:id="rId8"/>
     <p:sldId id="720" r:id="rId9"/>
     <p:sldId id="700" r:id="rId10"/>
@@ -23,58 +23,59 @@
     <p:sldId id="705" r:id="rId14"/>
     <p:sldId id="723" r:id="rId15"/>
     <p:sldId id="729" r:id="rId16"/>
-    <p:sldId id="676" r:id="rId17"/>
-    <p:sldId id="732" r:id="rId18"/>
-    <p:sldId id="584" r:id="rId19"/>
-    <p:sldId id="585" r:id="rId20"/>
-    <p:sldId id="586" r:id="rId21"/>
-    <p:sldId id="587" r:id="rId22"/>
-    <p:sldId id="652" r:id="rId23"/>
-    <p:sldId id="690" r:id="rId24"/>
-    <p:sldId id="661" r:id="rId25"/>
-    <p:sldId id="663" r:id="rId26"/>
-    <p:sldId id="589" r:id="rId27"/>
-    <p:sldId id="733" r:id="rId28"/>
-    <p:sldId id="691" r:id="rId29"/>
-    <p:sldId id="588" r:id="rId30"/>
-    <p:sldId id="737" r:id="rId31"/>
-    <p:sldId id="658" r:id="rId32"/>
-    <p:sldId id="726" r:id="rId33"/>
-    <p:sldId id="640" r:id="rId34"/>
-    <p:sldId id="641" r:id="rId35"/>
-    <p:sldId id="643" r:id="rId36"/>
-    <p:sldId id="644" r:id="rId37"/>
-    <p:sldId id="645" r:id="rId38"/>
-    <p:sldId id="646" r:id="rId39"/>
-    <p:sldId id="289" r:id="rId40"/>
-    <p:sldId id="660" r:id="rId41"/>
-    <p:sldId id="291" r:id="rId42"/>
-    <p:sldId id="692" r:id="rId43"/>
+    <p:sldId id="741" r:id="rId17"/>
+    <p:sldId id="676" r:id="rId18"/>
+    <p:sldId id="732" r:id="rId19"/>
+    <p:sldId id="584" r:id="rId20"/>
+    <p:sldId id="585" r:id="rId21"/>
+    <p:sldId id="586" r:id="rId22"/>
+    <p:sldId id="587" r:id="rId23"/>
+    <p:sldId id="652" r:id="rId24"/>
+    <p:sldId id="690" r:id="rId25"/>
+    <p:sldId id="661" r:id="rId26"/>
+    <p:sldId id="663" r:id="rId27"/>
+    <p:sldId id="589" r:id="rId28"/>
+    <p:sldId id="733" r:id="rId29"/>
+    <p:sldId id="691" r:id="rId30"/>
+    <p:sldId id="588" r:id="rId31"/>
+    <p:sldId id="737" r:id="rId32"/>
+    <p:sldId id="658" r:id="rId33"/>
+    <p:sldId id="726" r:id="rId34"/>
+    <p:sldId id="640" r:id="rId35"/>
+    <p:sldId id="641" r:id="rId36"/>
+    <p:sldId id="643" r:id="rId37"/>
+    <p:sldId id="644" r:id="rId38"/>
+    <p:sldId id="645" r:id="rId39"/>
+    <p:sldId id="646" r:id="rId40"/>
+    <p:sldId id="289" r:id="rId41"/>
+    <p:sldId id="660" r:id="rId42"/>
+    <p:sldId id="291" r:id="rId43"/>
+    <p:sldId id="692" r:id="rId44"/>
   </p:sldIdLst>
   <p:sldSz cx="12192000" cy="6858000"/>
   <p:notesSz cx="6858000" cy="9144000"/>
   <p:embeddedFontLst>
     <p:embeddedFont>
       <p:font typeface="Algerian" panose="04020705040A02060702" pitchFamily="82" charset="0"/>
-      <p:regular r:id="rId45"/>
+      <p:regular r:id="rId46"/>
     </p:embeddedFont>
     <p:embeddedFont>
       <p:font typeface="Consolas" panose="020B0609020204030204" pitchFamily="49" charset="0"/>
-      <p:regular r:id="rId46"/>
-      <p:bold r:id="rId47"/>
-      <p:italic r:id="rId48"/>
-      <p:boldItalic r:id="rId49"/>
+      <p:regular r:id="rId47"/>
+      <p:bold r:id="rId48"/>
+      <p:italic r:id="rId49"/>
+      <p:boldItalic r:id="rId50"/>
     </p:embeddedFont>
     <p:embeddedFont>
       <p:font typeface="Ink Free" panose="03080402000500000000" pitchFamily="66" charset="0"/>
-      <p:regular r:id="rId50"/>
+      <p:regular r:id="rId51"/>
     </p:embeddedFont>
     <p:embeddedFont>
       <p:font typeface="Verdana" panose="020B0604030504040204" pitchFamily="34" charset="0"/>
-      <p:regular r:id="rId51"/>
-      <p:bold r:id="rId52"/>
-      <p:italic r:id="rId53"/>
-      <p:boldItalic r:id="rId54"/>
+      <p:regular r:id="rId52"/>
+      <p:bold r:id="rId53"/>
+      <p:italic r:id="rId54"/>
+      <p:boldItalic r:id="rId55"/>
     </p:embeddedFont>
   </p:embeddedFontLst>
   <p:defaultTextStyle>
@@ -179,10 +180,10 @@
           <p14:sldIdLst>
             <p14:sldId id="719"/>
             <p14:sldId id="702"/>
+            <p14:sldId id="738"/>
             <p14:sldId id="699"/>
             <p14:sldId id="696"/>
             <p14:sldId id="697"/>
-            <p14:sldId id="738"/>
             <p14:sldId id="731"/>
             <p14:sldId id="720"/>
             <p14:sldId id="700"/>
@@ -192,6 +193,7 @@
             <p14:sldId id="705"/>
             <p14:sldId id="723"/>
             <p14:sldId id="729"/>
+            <p14:sldId id="741"/>
             <p14:sldId id="676"/>
           </p14:sldIdLst>
         </p14:section>
@@ -322,7 +324,7 @@
           <a:p>
             <a:fld id="{7C7E5181-6CF5-45F7-A87A-E0E0B1FD7549}" type="datetimeFigureOut">
               <a:rPr lang="en-US" smtClean="0"/>
-              <a:t>8/17/2026</a:t>
+              <a:t>8/18/2026</a:t>
             </a:fld>
             <a:endParaRPr lang="en-US"/>
           </a:p>
@@ -1004,7 +1006,7 @@
           <a:p>
             <a:fld id="{07937F07-1250-4CCE-B198-1B2887014F41}" type="slidenum">
               <a:rPr lang="en-US" smtClean="0"/>
-              <a:t>16</a:t>
+              <a:t>17</a:t>
             </a:fld>
             <a:endParaRPr lang="en-US"/>
           </a:p>
@@ -1113,7 +1115,7 @@
           <a:p>
             <a:fld id="{07937F07-1250-4CCE-B198-1B2887014F41}" type="slidenum">
               <a:rPr lang="en-US" smtClean="0"/>
-              <a:t>18</a:t>
+              <a:t>19</a:t>
             </a:fld>
             <a:endParaRPr lang="en-US"/>
           </a:p>
@@ -1197,7 +1199,7 @@
           <a:p>
             <a:fld id="{07937F07-1250-4CCE-B198-1B2887014F41}" type="slidenum">
               <a:rPr lang="en-US" smtClean="0"/>
-              <a:t>19</a:t>
+              <a:t>20</a:t>
             </a:fld>
             <a:endParaRPr lang="en-US"/>
           </a:p>
@@ -1281,7 +1283,7 @@
           <a:p>
             <a:fld id="{07937F07-1250-4CCE-B198-1B2887014F41}" type="slidenum">
               <a:rPr lang="en-US" smtClean="0"/>
-              <a:t>20</a:t>
+              <a:t>21</a:t>
             </a:fld>
             <a:endParaRPr lang="en-US"/>
           </a:p>
@@ -1377,7 +1379,7 @@
           <a:p>
             <a:fld id="{07937F07-1250-4CCE-B198-1B2887014F41}" type="slidenum">
               <a:rPr lang="en-US" smtClean="0"/>
-              <a:t>22</a:t>
+              <a:t>23</a:t>
             </a:fld>
             <a:endParaRPr lang="en-US"/>
           </a:p>
@@ -1496,7 +1498,7 @@
           <a:p>
             <a:fld id="{07937F07-1250-4CCE-B198-1B2887014F41}" type="slidenum">
               <a:rPr lang="en-US" smtClean="0"/>
-              <a:t>23</a:t>
+              <a:t>24</a:t>
             </a:fld>
             <a:endParaRPr lang="en-US"/>
           </a:p>
@@ -1644,7 +1646,7 @@
           <a:p>
             <a:fld id="{07937F07-1250-4CCE-B198-1B2887014F41}" type="slidenum">
               <a:rPr lang="en-US" smtClean="0"/>
-              <a:t>24</a:t>
+              <a:t>25</a:t>
             </a:fld>
             <a:endParaRPr lang="en-US"/>
           </a:p>
@@ -1752,7 +1754,7 @@
           <a:p>
             <a:fld id="{07937F07-1250-4CCE-B198-1B2887014F41}" type="slidenum">
               <a:rPr lang="en-US" smtClean="0"/>
-              <a:t>25</a:t>
+              <a:t>26</a:t>
             </a:fld>
             <a:endParaRPr lang="en-US"/>
           </a:p>
@@ -1839,7 +1841,7 @@
           <a:p>
             <a:fld id="{07937F07-1250-4CCE-B198-1B2887014F41}" type="slidenum">
               <a:rPr lang="en-US" smtClean="0"/>
-              <a:t>26</a:t>
+              <a:t>27</a:t>
             </a:fld>
             <a:endParaRPr lang="en-US"/>
           </a:p>
@@ -2154,7 +2156,7 @@
           <a:p>
             <a:fld id="{07937F07-1250-4CCE-B198-1B2887014F41}" type="slidenum">
               <a:rPr lang="en-US" smtClean="0"/>
-              <a:t>28</a:t>
+              <a:t>29</a:t>
             </a:fld>
             <a:endParaRPr lang="en-US"/>
           </a:p>
@@ -2265,7 +2267,7 @@
           <a:p>
             <a:fld id="{07937F07-1250-4CCE-B198-1B2887014F41}" type="slidenum">
               <a:rPr lang="en-US" smtClean="0"/>
-              <a:t>29</a:t>
+              <a:t>30</a:t>
             </a:fld>
             <a:endParaRPr lang="en-US"/>
           </a:p>
@@ -3134,7 +3136,7 @@
           <a:p>
             <a:fld id="{07937F07-1250-4CCE-B198-1B2887014F41}" type="slidenum">
               <a:rPr lang="en-US" smtClean="0"/>
-              <a:t>3</a:t>
+              <a:t>4</a:t>
             </a:fld>
             <a:endParaRPr lang="en-US"/>
           </a:p>
@@ -3540,7 +3542,7 @@
                 <a:tabLst/>
                 <a:defRPr/>
               </a:pPr>
-              <a:t>42</a:t>
+              <a:t>43</a:t>
             </a:fld>
             <a:endParaRPr kumimoji="0" lang="en-US" sz="1200" b="0" i="0" u="none" strike="noStrike" kern="1200" cap="none" spc="0" normalizeH="0" baseline="0" noProof="0">
               <a:ln>
@@ -4893,7 +4895,7 @@
           <a:p>
             <a:fld id="{5D2A64DE-480B-420F-9649-4F8E696E08E0}" type="datetime1">
               <a:rPr lang="en-US" smtClean="0"/>
-              <a:t>8/17/2026</a:t>
+              <a:t>8/18/2026</a:t>
             </a:fld>
             <a:endParaRPr lang="en-US"/>
           </a:p>
@@ -5217,7 +5219,7 @@
           <a:p>
             <a:fld id="{EA476A42-A091-4468-A075-64A31BE59948}" type="datetime1">
               <a:rPr lang="en-US" smtClean="0"/>
-              <a:t>8/17/2026</a:t>
+              <a:t>8/18/2026</a:t>
             </a:fld>
             <a:endParaRPr lang="en-US"/>
           </a:p>
@@ -5415,7 +5417,7 @@
           <a:p>
             <a:fld id="{0D3616D0-8311-4107-9726-6B805E7D05BA}" type="datetime1">
               <a:rPr lang="en-US" smtClean="0"/>
-              <a:t>8/17/2026</a:t>
+              <a:t>8/18/2026</a:t>
             </a:fld>
             <a:endParaRPr lang="en-US"/>
           </a:p>
@@ -5623,7 +5625,7 @@
           <a:p>
             <a:fld id="{3BC2557A-5C88-417A-A763-5AC779462A5F}" type="datetime1">
               <a:rPr lang="en-US" smtClean="0"/>
-              <a:t>8/17/2026</a:t>
+              <a:t>8/18/2026</a:t>
             </a:fld>
             <a:endParaRPr lang="en-US"/>
           </a:p>
@@ -6045,7 +6047,7 @@
           <a:p>
             <a:fld id="{07C7BFD4-467E-4EDE-93EA-052F5B39A4E5}" type="datetime1">
               <a:rPr lang="en-US" smtClean="0"/>
-              <a:t>8/17/2026</a:t>
+              <a:t>8/18/2026</a:t>
             </a:fld>
             <a:endParaRPr lang="en-US"/>
           </a:p>
@@ -6295,7 +6297,7 @@
           <a:p>
             <a:fld id="{07C7BFD4-467E-4EDE-93EA-052F5B39A4E5}" type="datetime1">
               <a:rPr lang="en-US" smtClean="0"/>
-              <a:t>8/17/2026</a:t>
+              <a:t>8/18/2026</a:t>
             </a:fld>
             <a:endParaRPr lang="en-US"/>
           </a:p>
@@ -6477,7 +6479,7 @@
           <a:p>
             <a:fld id="{109E55A0-C911-4F03-82FC-7E5926047D46}" type="datetime1">
               <a:rPr lang="en-US" smtClean="0"/>
-              <a:t>8/17/2026</a:t>
+              <a:t>8/18/2026</a:t>
             </a:fld>
             <a:endParaRPr lang="en-US"/>
           </a:p>
@@ -6790,7 +6792,7 @@
           <a:p>
             <a:fld id="{A533CBE2-D5BE-47AC-ADC2-9CDFC1D0CF90}" type="datetime1">
               <a:rPr lang="en-US" smtClean="0"/>
-              <a:t>8/17/2026</a:t>
+              <a:t>8/18/2026</a:t>
             </a:fld>
             <a:endParaRPr lang="en-US"/>
           </a:p>
@@ -7091,7 +7093,7 @@
           <a:p>
             <a:fld id="{39B7EDB1-CE74-4951-85A2-0B01C2128E28}" type="datetime1">
               <a:rPr lang="en-US" smtClean="0"/>
-              <a:t>8/17/2026</a:t>
+              <a:t>8/18/2026</a:t>
             </a:fld>
             <a:endParaRPr lang="en-US"/>
           </a:p>
@@ -7539,7 +7541,7 @@
           <a:p>
             <a:fld id="{2BC7EB92-A5C2-4807-A9DC-9EDE6CBFB241}" type="datetime1">
               <a:rPr lang="en-US" smtClean="0"/>
-              <a:t>8/17/2026</a:t>
+              <a:t>8/18/2026</a:t>
             </a:fld>
             <a:endParaRPr lang="en-US"/>
           </a:p>
@@ -7652,7 +7654,7 @@
           <a:p>
             <a:fld id="{2B7B7EE0-7771-4CD5-9B2B-3550753A54A1}" type="datetime1">
               <a:rPr lang="en-US" smtClean="0"/>
-              <a:t>8/17/2026</a:t>
+              <a:t>8/18/2026</a:t>
             </a:fld>
             <a:endParaRPr lang="en-US"/>
           </a:p>
@@ -7963,7 +7965,7 @@
           <a:p>
             <a:fld id="{F8B318B3-0E87-4416-A9B8-D891968C2727}" type="datetime1">
               <a:rPr lang="en-US" smtClean="0"/>
-              <a:t>8/17/2026</a:t>
+              <a:t>8/18/2026</a:t>
             </a:fld>
             <a:endParaRPr lang="en-US"/>
           </a:p>
@@ -8204,7 +8206,7 @@
           <a:p>
             <a:fld id="{54D997E8-DDEE-43F1-8D9B-F8A1E11DE488}" type="datetime1">
               <a:rPr lang="en-US" smtClean="0"/>
-              <a:t>8/17/2026</a:t>
+              <a:t>8/18/2026</a:t>
             </a:fld>
             <a:endParaRPr lang="en-US"/>
           </a:p>
@@ -15775,6 +15777,90 @@
   <p:cSld>
     <p:spTree>
       <p:nvGrpSpPr>
+        <p:cNvPr id="1" name=""/>
+        <p:cNvGrpSpPr/>
+        <p:nvPr/>
+      </p:nvGrpSpPr>
+      <p:grpSpPr>
+        <a:xfrm>
+          <a:off x="0" y="0"/>
+          <a:ext cx="0" cy="0"/>
+          <a:chOff x="0" y="0"/>
+          <a:chExt cx="0" cy="0"/>
+        </a:xfrm>
+      </p:grpSpPr>
+      <p:sp>
+        <p:nvSpPr>
+          <p:cNvPr id="2" name="Title 1">
+            <a:extLst>
+              <a:ext uri="{FF2B5EF4-FFF2-40B4-BE49-F238E27FC236}">
+                <a16:creationId xmlns:a16="http://schemas.microsoft.com/office/drawing/2014/main" id="{34AF0F7C-58CC-2B40-78B5-099AA5496639}"/>
+              </a:ext>
+            </a:extLst>
+          </p:cNvPr>
+          <p:cNvSpPr>
+            <a:spLocks noGrp="1"/>
+          </p:cNvSpPr>
+          <p:nvPr>
+            <p:ph type="title"/>
+          </p:nvPr>
+        </p:nvSpPr>
+        <p:spPr/>
+        <p:txBody>
+          <a:bodyPr/>
+          <a:lstStyle/>
+          <a:p>
+            <a:endParaRPr lang="en-US"/>
+          </a:p>
+        </p:txBody>
+      </p:sp>
+      <p:sp>
+        <p:nvSpPr>
+          <p:cNvPr id="3" name="Slide Number Placeholder 2">
+            <a:extLst>
+              <a:ext uri="{FF2B5EF4-FFF2-40B4-BE49-F238E27FC236}">
+                <a16:creationId xmlns:a16="http://schemas.microsoft.com/office/drawing/2014/main" id="{64FA60E0-0FF8-360D-FB88-0D0BC5A52220}"/>
+              </a:ext>
+            </a:extLst>
+          </p:cNvPr>
+          <p:cNvSpPr>
+            <a:spLocks noGrp="1"/>
+          </p:cNvSpPr>
+          <p:nvPr>
+            <p:ph type="sldNum" sz="quarter" idx="12"/>
+          </p:nvPr>
+        </p:nvSpPr>
+        <p:spPr/>
+        <p:txBody>
+          <a:bodyPr/>
+          <a:lstStyle/>
+          <a:p>
+            <a:fld id="{20F37917-FD3A-4669-9018-DA04BCDD3D75}" type="slidenum">
+              <a:rPr lang="en-US" smtClean="0"/>
+              <a:t>16</a:t>
+            </a:fld>
+            <a:endParaRPr lang="en-US"/>
+          </a:p>
+        </p:txBody>
+      </p:sp>
+    </p:spTree>
+    <p:extLst>
+      <p:ext uri="{BB962C8B-B14F-4D97-AF65-F5344CB8AC3E}">
+        <p14:creationId xmlns:p14="http://schemas.microsoft.com/office/powerpoint/2010/main" val="341489238"/>
+      </p:ext>
+    </p:extLst>
+  </p:cSld>
+  <p:clrMapOvr>
+    <a:masterClrMapping/>
+  </p:clrMapOvr>
+</p:sld>
+</file>
+
+<file path=ppt/slides/slide17.xml><?xml version="1.0" encoding="utf-8"?>
+<p:sld xmlns:a="http://schemas.openxmlformats.org/drawingml/2006/main" xmlns:r="http://schemas.openxmlformats.org/officeDocument/2006/relationships" xmlns:p="http://schemas.openxmlformats.org/presentationml/2006/main">
+  <p:cSld>
+    <p:spTree>
+      <p:nvGrpSpPr>
         <p:cNvPr id="1" name="">
           <a:extLst>
             <a:ext uri="{FF2B5EF4-FFF2-40B4-BE49-F238E27FC236}">
@@ -15845,7 +15931,7 @@
             <a:fld id="{20F37917-FD3A-4669-9018-DA04BCDD3D75}" type="slidenum">
               <a:rPr lang="en-US" smtClean="0"/>
               <a:pPr/>
-              <a:t>16</a:t>
+              <a:t>17</a:t>
             </a:fld>
             <a:endParaRPr lang="en-US"/>
           </a:p>
@@ -16035,7 +16121,7 @@
 </p:sld>
 </file>
 
-<file path=ppt/slides/slide17.xml><?xml version="1.0" encoding="utf-8"?>
+<file path=ppt/slides/slide18.xml><?xml version="1.0" encoding="utf-8"?>
 <p:sld xmlns:a="http://schemas.openxmlformats.org/drawingml/2006/main" xmlns:r="http://schemas.openxmlformats.org/officeDocument/2006/relationships" xmlns:p="http://schemas.openxmlformats.org/presentationml/2006/main">
   <p:cSld>
     <p:spTree>
@@ -16148,7 +16234,7 @@
           <a:p>
             <a:fld id="{20F37917-FD3A-4669-9018-DA04BCDD3D75}" type="slidenum">
               <a:rPr lang="en-US" smtClean="0"/>
-              <a:t>17</a:t>
+              <a:t>18</a:t>
             </a:fld>
             <a:endParaRPr lang="en-US"/>
           </a:p>
@@ -16167,7 +16253,7 @@
 </p:sld>
 </file>
 
-<file path=ppt/slides/slide18.xml><?xml version="1.0" encoding="utf-8"?>
+<file path=ppt/slides/slide19.xml><?xml version="1.0" encoding="utf-8"?>
 <p:sld xmlns:a="http://schemas.openxmlformats.org/drawingml/2006/main" xmlns:r="http://schemas.openxmlformats.org/officeDocument/2006/relationships" xmlns:p="http://schemas.openxmlformats.org/presentationml/2006/main">
   <p:cSld>
     <p:spTree>
@@ -16252,7 +16338,7 @@
             <a:fld id="{20F37917-FD3A-4669-9018-DA04BCDD3D75}" type="slidenum">
               <a:rPr lang="en-US" smtClean="0"/>
               <a:pPr/>
-              <a:t>18</a:t>
+              <a:t>19</a:t>
             </a:fld>
             <a:endParaRPr lang="en-US"/>
           </a:p>
@@ -16320,1239 +16406,6 @@
     <p:extLst>
       <p:ext uri="{BB962C8B-B14F-4D97-AF65-F5344CB8AC3E}">
         <p14:creationId xmlns:p14="http://schemas.microsoft.com/office/powerpoint/2010/main" val="1563341513"/>
-      </p:ext>
-    </p:extLst>
-  </p:cSld>
-  <p:clrMapOvr>
-    <a:masterClrMapping/>
-  </p:clrMapOvr>
-</p:sld>
-</file>
-
-<file path=ppt/slides/slide19.xml><?xml version="1.0" encoding="utf-8"?>
-<p:sld xmlns:a="http://schemas.openxmlformats.org/drawingml/2006/main" xmlns:r="http://schemas.openxmlformats.org/officeDocument/2006/relationships" xmlns:p="http://schemas.openxmlformats.org/presentationml/2006/main">
-  <p:cSld>
-    <p:spTree>
-      <p:nvGrpSpPr>
-        <p:cNvPr id="1" name="">
-          <a:extLst>
-            <a:ext uri="{FF2B5EF4-FFF2-40B4-BE49-F238E27FC236}">
-              <a16:creationId xmlns:a16="http://schemas.microsoft.com/office/drawing/2014/main" id="{10C68DFF-D7BB-13BF-CA3C-2866BE9B07A1}"/>
-            </a:ext>
-          </a:extLst>
-        </p:cNvPr>
-        <p:cNvGrpSpPr/>
-        <p:nvPr/>
-      </p:nvGrpSpPr>
-      <p:grpSpPr>
-        <a:xfrm>
-          <a:off x="0" y="0"/>
-          <a:ext cx="0" cy="0"/>
-          <a:chOff x="0" y="0"/>
-          <a:chExt cx="0" cy="0"/>
-        </a:xfrm>
-      </p:grpSpPr>
-      <p:sp>
-        <p:nvSpPr>
-          <p:cNvPr id="2" name="Title 1">
-            <a:extLst>
-              <a:ext uri="{FF2B5EF4-FFF2-40B4-BE49-F238E27FC236}">
-                <a16:creationId xmlns:a16="http://schemas.microsoft.com/office/drawing/2014/main" id="{ECBF8E00-1CE9-8EE5-3CBB-E4301F131DD0}"/>
-              </a:ext>
-            </a:extLst>
-          </p:cNvPr>
-          <p:cNvSpPr>
-            <a:spLocks noGrp="1"/>
-          </p:cNvSpPr>
-          <p:nvPr>
-            <p:ph type="title"/>
-          </p:nvPr>
-        </p:nvSpPr>
-        <p:spPr>
-          <a:xfrm>
-            <a:off x="838200" y="18255"/>
-            <a:ext cx="10515600" cy="1325563"/>
-          </a:xfrm>
-        </p:spPr>
-        <p:txBody>
-          <a:bodyPr/>
-          <a:lstStyle/>
-          <a:p>
-            <a:r>
-              <a:rPr lang="en-US" dirty="0"/>
-              <a:t>Code Coverage: Line or Statement Coverage</a:t>
-            </a:r>
-          </a:p>
-        </p:txBody>
-      </p:sp>
-      <p:sp>
-        <p:nvSpPr>
-          <p:cNvPr id="4" name="Slide Number Placeholder 3">
-            <a:extLst>
-              <a:ext uri="{FF2B5EF4-FFF2-40B4-BE49-F238E27FC236}">
-                <a16:creationId xmlns:a16="http://schemas.microsoft.com/office/drawing/2014/main" id="{197B8237-DA67-CC8A-F2A8-DEF0DA641FAA}"/>
-              </a:ext>
-            </a:extLst>
-          </p:cNvPr>
-          <p:cNvSpPr>
-            <a:spLocks noGrp="1"/>
-          </p:cNvSpPr>
-          <p:nvPr>
-            <p:ph type="sldNum" sz="quarter" idx="12"/>
-          </p:nvPr>
-        </p:nvSpPr>
-        <p:spPr>
-          <a:xfrm>
-            <a:off x="8610600" y="6356350"/>
-            <a:ext cx="2743200" cy="365125"/>
-          </a:xfrm>
-        </p:spPr>
-        <p:txBody>
-          <a:bodyPr/>
-          <a:lstStyle/>
-          <a:p>
-            <a:fld id="{20F37917-FD3A-4669-9018-DA04BCDD3D75}" type="slidenum">
-              <a:rPr lang="en-US" smtClean="0"/>
-              <a:pPr/>
-              <a:t>19</a:t>
-            </a:fld>
-            <a:endParaRPr lang="en-US"/>
-          </a:p>
-        </p:txBody>
-      </p:sp>
-      <p:sp>
-        <p:nvSpPr>
-          <p:cNvPr id="10" name="Content Placeholder 9">
-            <a:extLst>
-              <a:ext uri="{FF2B5EF4-FFF2-40B4-BE49-F238E27FC236}">
-                <a16:creationId xmlns:a16="http://schemas.microsoft.com/office/drawing/2014/main" id="{EF657526-5CD9-6D31-F247-63D6442BDF12}"/>
-              </a:ext>
-            </a:extLst>
-          </p:cNvPr>
-          <p:cNvSpPr>
-            <a:spLocks noGrp="1"/>
-          </p:cNvSpPr>
-          <p:nvPr>
-            <p:ph idx="1"/>
-          </p:nvPr>
-        </p:nvSpPr>
-        <p:spPr>
-          <a:xfrm>
-            <a:off x="838200" y="1500159"/>
-            <a:ext cx="4882662" cy="5221316"/>
-          </a:xfrm>
-        </p:spPr>
-        <p:txBody>
-          <a:bodyPr>
-            <a:normAutofit/>
-          </a:bodyPr>
-          <a:lstStyle/>
-          <a:p>
-            <a:r>
-              <a:rPr lang="en-US" i="1" dirty="0"/>
-              <a:t>Line </a:t>
-            </a:r>
-            <a:r>
-              <a:rPr lang="en-US" dirty="0"/>
-              <a:t>and </a:t>
-            </a:r>
-            <a:r>
-              <a:rPr lang="en-US" i="1" dirty="0"/>
-              <a:t>Statement </a:t>
-            </a:r>
-            <a:r>
-              <a:rPr lang="en-US" dirty="0"/>
-              <a:t>coverage are a coarse measurement.</a:t>
-            </a:r>
-          </a:p>
-          <a:p>
-            <a:r>
-              <a:rPr lang="en-US" dirty="0"/>
-              <a:t>Testing x = 0 exercises lines 2 and 3</a:t>
-            </a:r>
-          </a:p>
-          <a:p>
-            <a:r>
-              <a:rPr lang="en-US" dirty="0"/>
-              <a:t>Testing x = 10 exercises lines 2, 5, 6, and 7.</a:t>
-            </a:r>
-          </a:p>
-          <a:p>
-            <a:pPr marL="0" indent="0">
-              <a:buNone/>
-            </a:pPr>
-            <a:endParaRPr lang="en-US" dirty="0"/>
-          </a:p>
-        </p:txBody>
-      </p:sp>
-      <p:sp>
-        <p:nvSpPr>
-          <p:cNvPr id="3" name="TextBox 2">
-            <a:extLst>
-              <a:ext uri="{FF2B5EF4-FFF2-40B4-BE49-F238E27FC236}">
-                <a16:creationId xmlns:a16="http://schemas.microsoft.com/office/drawing/2014/main" id="{DAED0082-17B9-FF5F-8F05-BB126115B63F}"/>
-              </a:ext>
-            </a:extLst>
-          </p:cNvPr>
-          <p:cNvSpPr txBox="1"/>
-          <p:nvPr/>
-        </p:nvSpPr>
-        <p:spPr>
-          <a:xfrm>
-            <a:off x="6283569" y="2501474"/>
-            <a:ext cx="5814645" cy="3051092"/>
-          </a:xfrm>
-          <a:prstGeom prst="rect">
-            <a:avLst/>
-          </a:prstGeom>
-          <a:noFill/>
-          <a:ln w="12700" cap="flat" cmpd="sng" algn="ctr">
-            <a:noFill/>
-            <a:prstDash val="solid"/>
-            <a:miter lim="800000"/>
-          </a:ln>
-          <a:effectLst/>
-        </p:spPr>
-        <p:style>
-          <a:lnRef idx="2">
-            <a:schemeClr val="accent1">
-              <a:shade val="50000"/>
-            </a:schemeClr>
-          </a:lnRef>
-          <a:fillRef idx="1">
-            <a:schemeClr val="accent1"/>
-          </a:fillRef>
-          <a:effectRef idx="0">
-            <a:schemeClr val="accent1"/>
-          </a:effectRef>
-          <a:fontRef idx="minor">
-            <a:schemeClr val="lt1"/>
-          </a:fontRef>
-        </p:style>
-        <p:txBody>
-          <a:bodyPr wrap="square">
-            <a:spAutoFit/>
-          </a:bodyPr>
-          <a:lstStyle/>
-          <a:p>
-            <a:pPr>
-              <a:lnSpc>
-                <a:spcPct val="110000"/>
-              </a:lnSpc>
-              <a:buNone/>
-            </a:pPr>
-            <a:r>
-              <a:rPr lang="en-US" sz="2200" b="0" dirty="0">
-                <a:solidFill>
-                  <a:schemeClr val="bg2">
-                    <a:lumMod val="90000"/>
-                  </a:schemeClr>
-                </a:solidFill>
-                <a:effectLst/>
-                <a:latin typeface="Consolas" panose="020B0609020204030204" pitchFamily="49" charset="0"/>
-                <a:cs typeface="Consolas" panose="020B0609020204030204" pitchFamily="49" charset="0"/>
-              </a:rPr>
-              <a:t>1| </a:t>
-            </a:r>
-            <a:r>
-              <a:rPr lang="en-US" sz="2200" dirty="0">
-                <a:solidFill>
-                  <a:srgbClr val="AF00DB"/>
-                </a:solidFill>
-                <a:latin typeface="Consolas" panose="020B0609020204030204" pitchFamily="49" charset="0"/>
-                <a:cs typeface="Consolas" panose="020B0609020204030204" pitchFamily="49" charset="0"/>
-              </a:rPr>
-              <a:t>export </a:t>
-            </a:r>
-            <a:r>
-              <a:rPr lang="en-US" sz="2200" dirty="0">
-                <a:solidFill>
-                  <a:srgbClr val="0000FF"/>
-                </a:solidFill>
-                <a:latin typeface="Consolas" panose="020B0609020204030204" pitchFamily="49" charset="0"/>
-                <a:cs typeface="Consolas" panose="020B0609020204030204" pitchFamily="49" charset="0"/>
-              </a:rPr>
-              <a:t>function </a:t>
-            </a:r>
-            <a:r>
-              <a:rPr lang="en-US" sz="2200" dirty="0">
-                <a:solidFill>
-                  <a:schemeClr val="accent4">
-                    <a:lumMod val="50000"/>
-                  </a:schemeClr>
-                </a:solidFill>
-                <a:latin typeface="Consolas" panose="020B0609020204030204" pitchFamily="49" charset="0"/>
-                <a:cs typeface="Consolas" panose="020B0609020204030204" pitchFamily="49" charset="0"/>
-              </a:rPr>
-              <a:t>f</a:t>
-            </a:r>
-            <a:r>
-              <a:rPr lang="en-US" sz="2200" dirty="0">
-                <a:solidFill>
-                  <a:srgbClr val="0000FF"/>
-                </a:solidFill>
-                <a:latin typeface="Consolas" panose="020B0609020204030204" pitchFamily="49" charset="0"/>
-                <a:cs typeface="Consolas" panose="020B0609020204030204" pitchFamily="49" charset="0"/>
-              </a:rPr>
-              <a:t>(x: </a:t>
-            </a:r>
-            <a:r>
-              <a:rPr lang="en-US" sz="2200" dirty="0">
-                <a:solidFill>
-                  <a:srgbClr val="0070C0"/>
-                </a:solidFill>
-                <a:latin typeface="Consolas" panose="020B0609020204030204" pitchFamily="49" charset="0"/>
-                <a:cs typeface="Consolas" panose="020B0609020204030204" pitchFamily="49" charset="0"/>
-              </a:rPr>
-              <a:t>number</a:t>
-            </a:r>
-            <a:r>
-              <a:rPr lang="en-US" sz="2200" dirty="0">
-                <a:solidFill>
-                  <a:schemeClr val="tx1"/>
-                </a:solidFill>
-                <a:latin typeface="Consolas" panose="020B0609020204030204" pitchFamily="49" charset="0"/>
-                <a:cs typeface="Consolas" panose="020B0609020204030204" pitchFamily="49" charset="0"/>
-              </a:rPr>
-              <a:t>) {</a:t>
-            </a:r>
-            <a:endParaRPr lang="en-US" sz="2200" b="0" dirty="0">
-              <a:solidFill>
-                <a:schemeClr val="tx1"/>
-              </a:solidFill>
-              <a:effectLst/>
-              <a:latin typeface="Consolas" panose="020B0609020204030204" pitchFamily="49" charset="0"/>
-              <a:cs typeface="Consolas" panose="020B0609020204030204" pitchFamily="49" charset="0"/>
-            </a:endParaRPr>
-          </a:p>
-          <a:p>
-            <a:pPr>
-              <a:lnSpc>
-                <a:spcPct val="110000"/>
-              </a:lnSpc>
-              <a:buNone/>
-            </a:pPr>
-            <a:r>
-              <a:rPr lang="en-US" sz="2200" dirty="0">
-                <a:solidFill>
-                  <a:schemeClr val="bg2">
-                    <a:lumMod val="90000"/>
-                  </a:schemeClr>
-                </a:solidFill>
-                <a:latin typeface="Consolas" panose="020B0609020204030204" pitchFamily="49" charset="0"/>
-                <a:cs typeface="Consolas" panose="020B0609020204030204" pitchFamily="49" charset="0"/>
-              </a:rPr>
-              <a:t>2</a:t>
-            </a:r>
-            <a:r>
-              <a:rPr lang="en-US" sz="2200" b="0" dirty="0">
-                <a:solidFill>
-                  <a:schemeClr val="bg2">
-                    <a:lumMod val="90000"/>
-                  </a:schemeClr>
-                </a:solidFill>
-                <a:effectLst/>
-                <a:latin typeface="Consolas" panose="020B0609020204030204" pitchFamily="49" charset="0"/>
-                <a:cs typeface="Consolas" panose="020B0609020204030204" pitchFamily="49" charset="0"/>
-              </a:rPr>
-              <a:t>|   </a:t>
-            </a:r>
-            <a:r>
-              <a:rPr lang="en-US" sz="2200" b="0" dirty="0">
-                <a:solidFill>
-                  <a:srgbClr val="AF00DB"/>
-                </a:solidFill>
-                <a:effectLst/>
-                <a:latin typeface="Consolas" panose="020B0609020204030204" pitchFamily="49" charset="0"/>
-                <a:cs typeface="Consolas" panose="020B0609020204030204" pitchFamily="49" charset="0"/>
-              </a:rPr>
-              <a:t>if</a:t>
-            </a:r>
-            <a:r>
-              <a:rPr lang="en-US" sz="2200" b="0" dirty="0">
-                <a:solidFill>
-                  <a:srgbClr val="3B3B3B"/>
-                </a:solidFill>
-                <a:effectLst/>
-                <a:latin typeface="Consolas" panose="020B0609020204030204" pitchFamily="49" charset="0"/>
-                <a:cs typeface="Consolas" panose="020B0609020204030204" pitchFamily="49" charset="0"/>
-              </a:rPr>
-              <a:t> (</a:t>
-            </a:r>
-            <a:r>
-              <a:rPr lang="en-US" sz="2200" b="0" dirty="0">
-                <a:solidFill>
-                  <a:srgbClr val="0070C1"/>
-                </a:solidFill>
-                <a:effectLst/>
-                <a:latin typeface="Consolas" panose="020B0609020204030204" pitchFamily="49" charset="0"/>
-                <a:cs typeface="Consolas" panose="020B0609020204030204" pitchFamily="49" charset="0"/>
-              </a:rPr>
-              <a:t>x</a:t>
-            </a:r>
-            <a:r>
-              <a:rPr lang="en-US" sz="2200" b="0" dirty="0">
-                <a:solidFill>
-                  <a:srgbClr val="3B3B3B"/>
-                </a:solidFill>
-                <a:effectLst/>
-                <a:latin typeface="Consolas" panose="020B0609020204030204" pitchFamily="49" charset="0"/>
-                <a:cs typeface="Consolas" panose="020B0609020204030204" pitchFamily="49" charset="0"/>
-              </a:rPr>
-              <a:t> </a:t>
-            </a:r>
-            <a:r>
-              <a:rPr lang="en-US" sz="2200" b="0" dirty="0">
-                <a:solidFill>
-                  <a:srgbClr val="000000"/>
-                </a:solidFill>
-                <a:effectLst/>
-                <a:latin typeface="Consolas" panose="020B0609020204030204" pitchFamily="49" charset="0"/>
-                <a:cs typeface="Consolas" panose="020B0609020204030204" pitchFamily="49" charset="0"/>
-              </a:rPr>
-              <a:t>===</a:t>
-            </a:r>
-            <a:r>
-              <a:rPr lang="en-US" sz="2200" b="0" dirty="0">
-                <a:solidFill>
-                  <a:srgbClr val="3B3B3B"/>
-                </a:solidFill>
-                <a:effectLst/>
-                <a:latin typeface="Consolas" panose="020B0609020204030204" pitchFamily="49" charset="0"/>
-                <a:cs typeface="Consolas" panose="020B0609020204030204" pitchFamily="49" charset="0"/>
-              </a:rPr>
-              <a:t> </a:t>
-            </a:r>
-            <a:r>
-              <a:rPr lang="en-US" sz="2200" b="0" dirty="0">
-                <a:solidFill>
-                  <a:srgbClr val="098658"/>
-                </a:solidFill>
-                <a:effectLst/>
-                <a:latin typeface="Consolas" panose="020B0609020204030204" pitchFamily="49" charset="0"/>
-                <a:cs typeface="Consolas" panose="020B0609020204030204" pitchFamily="49" charset="0"/>
-              </a:rPr>
-              <a:t>0</a:t>
-            </a:r>
-            <a:r>
-              <a:rPr lang="en-US" sz="2200" b="0" dirty="0">
-                <a:solidFill>
-                  <a:srgbClr val="3B3B3B"/>
-                </a:solidFill>
-                <a:effectLst/>
-                <a:latin typeface="Consolas" panose="020B0609020204030204" pitchFamily="49" charset="0"/>
-                <a:cs typeface="Consolas" panose="020B0609020204030204" pitchFamily="49" charset="0"/>
-              </a:rPr>
-              <a:t>) {</a:t>
-            </a:r>
-          </a:p>
-          <a:p>
-            <a:pPr>
-              <a:lnSpc>
-                <a:spcPct val="110000"/>
-              </a:lnSpc>
-              <a:buNone/>
-            </a:pPr>
-            <a:r>
-              <a:rPr lang="en-US" sz="2200" b="0" dirty="0">
-                <a:solidFill>
-                  <a:schemeClr val="bg2">
-                    <a:lumMod val="90000"/>
-                  </a:schemeClr>
-                </a:solidFill>
-                <a:effectLst/>
-                <a:latin typeface="Consolas" panose="020B0609020204030204" pitchFamily="49" charset="0"/>
-                <a:cs typeface="Consolas" panose="020B0609020204030204" pitchFamily="49" charset="0"/>
-              </a:rPr>
-              <a:t>3|</a:t>
-            </a:r>
-            <a:r>
-              <a:rPr lang="en-US" sz="2200" b="0" dirty="0">
-                <a:solidFill>
-                  <a:srgbClr val="AF00DB"/>
-                </a:solidFill>
-                <a:effectLst/>
-                <a:latin typeface="Consolas" panose="020B0609020204030204" pitchFamily="49" charset="0"/>
-                <a:cs typeface="Consolas" panose="020B0609020204030204" pitchFamily="49" charset="0"/>
-              </a:rPr>
-              <a:t>     return</a:t>
-            </a:r>
-            <a:r>
-              <a:rPr lang="en-US" sz="2200" b="0" dirty="0">
-                <a:solidFill>
-                  <a:srgbClr val="3B3B3B"/>
-                </a:solidFill>
-                <a:effectLst/>
-                <a:latin typeface="Consolas" panose="020B0609020204030204" pitchFamily="49" charset="0"/>
-                <a:cs typeface="Consolas" panose="020B0609020204030204" pitchFamily="49" charset="0"/>
-              </a:rPr>
-              <a:t> </a:t>
-            </a:r>
-            <a:r>
-              <a:rPr lang="en-US" sz="2200" b="0" dirty="0">
-                <a:solidFill>
-                  <a:srgbClr val="098658"/>
-                </a:solidFill>
-                <a:effectLst/>
-                <a:latin typeface="Consolas" panose="020B0609020204030204" pitchFamily="49" charset="0"/>
-                <a:cs typeface="Consolas" panose="020B0609020204030204" pitchFamily="49" charset="0"/>
-              </a:rPr>
-              <a:t>3</a:t>
-            </a:r>
-            <a:r>
-              <a:rPr lang="en-US" sz="2200" b="0" dirty="0">
-                <a:solidFill>
-                  <a:srgbClr val="3B3B3B"/>
-                </a:solidFill>
-                <a:effectLst/>
-                <a:latin typeface="Consolas" panose="020B0609020204030204" pitchFamily="49" charset="0"/>
-                <a:cs typeface="Consolas" panose="020B0609020204030204" pitchFamily="49" charset="0"/>
-              </a:rPr>
-              <a:t>;</a:t>
-            </a:r>
-          </a:p>
-          <a:p>
-            <a:pPr>
-              <a:lnSpc>
-                <a:spcPct val="110000"/>
-              </a:lnSpc>
-              <a:buNone/>
-            </a:pPr>
-            <a:r>
-              <a:rPr lang="en-US" sz="2200" b="0" dirty="0">
-                <a:solidFill>
-                  <a:schemeClr val="bg2">
-                    <a:lumMod val="90000"/>
-                  </a:schemeClr>
-                </a:solidFill>
-                <a:effectLst/>
-                <a:latin typeface="Consolas" panose="020B0609020204030204" pitchFamily="49" charset="0"/>
-                <a:cs typeface="Consolas" panose="020B0609020204030204" pitchFamily="49" charset="0"/>
-              </a:rPr>
-              <a:t>4|   </a:t>
-            </a:r>
-            <a:r>
-              <a:rPr lang="en-US" sz="2200" b="0" dirty="0">
-                <a:solidFill>
-                  <a:srgbClr val="3B3B3B"/>
-                </a:solidFill>
-                <a:effectLst/>
-                <a:latin typeface="Consolas" panose="020B0609020204030204" pitchFamily="49" charset="0"/>
-                <a:cs typeface="Consolas" panose="020B0609020204030204" pitchFamily="49" charset="0"/>
-              </a:rPr>
-              <a:t>}</a:t>
-            </a:r>
-          </a:p>
-          <a:p>
-            <a:pPr>
-              <a:lnSpc>
-                <a:spcPct val="110000"/>
-              </a:lnSpc>
-              <a:buNone/>
-            </a:pPr>
-            <a:r>
-              <a:rPr lang="en-US" sz="2200" b="0" dirty="0">
-                <a:solidFill>
-                  <a:schemeClr val="bg2">
-                    <a:lumMod val="90000"/>
-                  </a:schemeClr>
-                </a:solidFill>
-                <a:effectLst/>
-                <a:latin typeface="Consolas" panose="020B0609020204030204" pitchFamily="49" charset="0"/>
-                <a:cs typeface="Consolas" panose="020B0609020204030204" pitchFamily="49" charset="0"/>
-              </a:rPr>
-              <a:t>5|   </a:t>
-            </a:r>
-            <a:r>
-              <a:rPr lang="en-US" sz="2200" b="0" dirty="0">
-                <a:solidFill>
-                  <a:srgbClr val="0000FF"/>
-                </a:solidFill>
-                <a:effectLst/>
-                <a:latin typeface="Consolas" panose="020B0609020204030204" pitchFamily="49" charset="0"/>
-                <a:cs typeface="Consolas" panose="020B0609020204030204" pitchFamily="49" charset="0"/>
-              </a:rPr>
-              <a:t>const</a:t>
-            </a:r>
-            <a:r>
-              <a:rPr lang="en-US" sz="2200" b="0" dirty="0">
-                <a:solidFill>
-                  <a:srgbClr val="3B3B3B"/>
-                </a:solidFill>
-                <a:effectLst/>
-                <a:latin typeface="Consolas" panose="020B0609020204030204" pitchFamily="49" charset="0"/>
-                <a:cs typeface="Consolas" panose="020B0609020204030204" pitchFamily="49" charset="0"/>
-              </a:rPr>
-              <a:t> </a:t>
-            </a:r>
-            <a:r>
-              <a:rPr lang="en-US" sz="2200" b="0" dirty="0">
-                <a:solidFill>
-                  <a:srgbClr val="0070C1"/>
-                </a:solidFill>
-                <a:effectLst/>
-                <a:latin typeface="Consolas" panose="020B0609020204030204" pitchFamily="49" charset="0"/>
-                <a:cs typeface="Consolas" panose="020B0609020204030204" pitchFamily="49" charset="0"/>
-              </a:rPr>
-              <a:t>y</a:t>
-            </a:r>
-            <a:r>
-              <a:rPr lang="en-US" sz="2200" b="0" dirty="0">
-                <a:solidFill>
-                  <a:srgbClr val="3B3B3B"/>
-                </a:solidFill>
-                <a:effectLst/>
-                <a:latin typeface="Consolas" panose="020B0609020204030204" pitchFamily="49" charset="0"/>
-                <a:cs typeface="Consolas" panose="020B0609020204030204" pitchFamily="49" charset="0"/>
-              </a:rPr>
-              <a:t> </a:t>
-            </a:r>
-            <a:r>
-              <a:rPr lang="en-US" sz="2200" b="0" dirty="0">
-                <a:solidFill>
-                  <a:srgbClr val="000000"/>
-                </a:solidFill>
-                <a:effectLst/>
-                <a:latin typeface="Consolas" panose="020B0609020204030204" pitchFamily="49" charset="0"/>
-                <a:cs typeface="Consolas" panose="020B0609020204030204" pitchFamily="49" charset="0"/>
-              </a:rPr>
-              <a:t>=</a:t>
-            </a:r>
-            <a:r>
-              <a:rPr lang="en-US" sz="2200" b="0" dirty="0">
-                <a:solidFill>
-                  <a:srgbClr val="3B3B3B"/>
-                </a:solidFill>
-                <a:effectLst/>
-                <a:latin typeface="Consolas" panose="020B0609020204030204" pitchFamily="49" charset="0"/>
-                <a:cs typeface="Consolas" panose="020B0609020204030204" pitchFamily="49" charset="0"/>
-              </a:rPr>
-              <a:t> </a:t>
-            </a:r>
-            <a:r>
-              <a:rPr lang="en-US" sz="2200" b="0" dirty="0">
-                <a:solidFill>
-                  <a:srgbClr val="0070C1"/>
-                </a:solidFill>
-                <a:effectLst/>
-                <a:latin typeface="Consolas" panose="020B0609020204030204" pitchFamily="49" charset="0"/>
-                <a:cs typeface="Consolas" panose="020B0609020204030204" pitchFamily="49" charset="0"/>
-              </a:rPr>
-              <a:t>x</a:t>
-            </a:r>
-            <a:r>
-              <a:rPr lang="en-US" sz="2200" b="0" dirty="0">
-                <a:solidFill>
-                  <a:srgbClr val="3B3B3B"/>
-                </a:solidFill>
-                <a:effectLst/>
-                <a:latin typeface="Consolas" panose="020B0609020204030204" pitchFamily="49" charset="0"/>
-                <a:cs typeface="Consolas" panose="020B0609020204030204" pitchFamily="49" charset="0"/>
-              </a:rPr>
-              <a:t> </a:t>
-            </a:r>
-            <a:r>
-              <a:rPr lang="en-US" sz="2200" b="0" dirty="0">
-                <a:solidFill>
-                  <a:srgbClr val="000000"/>
-                </a:solidFill>
-                <a:effectLst/>
-                <a:latin typeface="Consolas" panose="020B0609020204030204" pitchFamily="49" charset="0"/>
-                <a:cs typeface="Consolas" panose="020B0609020204030204" pitchFamily="49" charset="0"/>
-              </a:rPr>
-              <a:t>&gt;</a:t>
-            </a:r>
-            <a:r>
-              <a:rPr lang="en-US" sz="2200" b="0" dirty="0">
-                <a:solidFill>
-                  <a:srgbClr val="3B3B3B"/>
-                </a:solidFill>
-                <a:effectLst/>
-                <a:latin typeface="Consolas" panose="020B0609020204030204" pitchFamily="49" charset="0"/>
-                <a:cs typeface="Consolas" panose="020B0609020204030204" pitchFamily="49" charset="0"/>
-              </a:rPr>
-              <a:t> </a:t>
-            </a:r>
-            <a:r>
-              <a:rPr lang="en-US" sz="2200" b="0" dirty="0">
-                <a:solidFill>
-                  <a:srgbClr val="098658"/>
-                </a:solidFill>
-                <a:effectLst/>
-                <a:latin typeface="Consolas" panose="020B0609020204030204" pitchFamily="49" charset="0"/>
-                <a:cs typeface="Consolas" panose="020B0609020204030204" pitchFamily="49" charset="0"/>
-              </a:rPr>
-              <a:t>4</a:t>
-            </a:r>
-            <a:r>
-              <a:rPr lang="en-US" sz="2200" b="0" dirty="0">
-                <a:solidFill>
-                  <a:srgbClr val="3B3B3B"/>
-                </a:solidFill>
-                <a:effectLst/>
-                <a:latin typeface="Consolas" panose="020B0609020204030204" pitchFamily="49" charset="0"/>
-                <a:cs typeface="Consolas" panose="020B0609020204030204" pitchFamily="49" charset="0"/>
-              </a:rPr>
-              <a:t> </a:t>
-            </a:r>
-            <a:r>
-              <a:rPr lang="en-US" sz="2200" b="0" dirty="0">
-                <a:solidFill>
-                  <a:srgbClr val="000000"/>
-                </a:solidFill>
-                <a:effectLst/>
-                <a:latin typeface="Consolas" panose="020B0609020204030204" pitchFamily="49" charset="0"/>
-                <a:cs typeface="Consolas" panose="020B0609020204030204" pitchFamily="49" charset="0"/>
-              </a:rPr>
-              <a:t>?</a:t>
-            </a:r>
-            <a:r>
-              <a:rPr lang="en-US" sz="2200" b="0" dirty="0">
-                <a:solidFill>
-                  <a:srgbClr val="3B3B3B"/>
-                </a:solidFill>
-                <a:effectLst/>
-                <a:latin typeface="Consolas" panose="020B0609020204030204" pitchFamily="49" charset="0"/>
-                <a:cs typeface="Consolas" panose="020B0609020204030204" pitchFamily="49" charset="0"/>
-              </a:rPr>
-              <a:t> </a:t>
-            </a:r>
-            <a:r>
-              <a:rPr lang="en-US" sz="2200" b="0" dirty="0">
-                <a:solidFill>
-                  <a:srgbClr val="098658"/>
-                </a:solidFill>
-                <a:effectLst/>
-                <a:latin typeface="Consolas" panose="020B0609020204030204" pitchFamily="49" charset="0"/>
-                <a:cs typeface="Consolas" panose="020B0609020204030204" pitchFamily="49" charset="0"/>
-              </a:rPr>
-              <a:t>2</a:t>
-            </a:r>
-            <a:r>
-              <a:rPr lang="en-US" sz="2200" b="0" dirty="0">
-                <a:solidFill>
-                  <a:srgbClr val="3B3B3B"/>
-                </a:solidFill>
-                <a:effectLst/>
-                <a:latin typeface="Consolas" panose="020B0609020204030204" pitchFamily="49" charset="0"/>
-                <a:cs typeface="Consolas" panose="020B0609020204030204" pitchFamily="49" charset="0"/>
-              </a:rPr>
-              <a:t> </a:t>
-            </a:r>
-            <a:r>
-              <a:rPr lang="en-US" sz="2200" b="0" dirty="0">
-                <a:solidFill>
-                  <a:srgbClr val="000000"/>
-                </a:solidFill>
-                <a:effectLst/>
-                <a:latin typeface="Consolas" panose="020B0609020204030204" pitchFamily="49" charset="0"/>
-                <a:cs typeface="Consolas" panose="020B0609020204030204" pitchFamily="49" charset="0"/>
-              </a:rPr>
-              <a:t>:</a:t>
-            </a:r>
-            <a:r>
-              <a:rPr lang="en-US" sz="2200" b="0" dirty="0">
-                <a:solidFill>
-                  <a:srgbClr val="3B3B3B"/>
-                </a:solidFill>
-                <a:effectLst/>
-                <a:latin typeface="Consolas" panose="020B0609020204030204" pitchFamily="49" charset="0"/>
-                <a:cs typeface="Consolas" panose="020B0609020204030204" pitchFamily="49" charset="0"/>
-              </a:rPr>
-              <a:t> </a:t>
-            </a:r>
-            <a:r>
-              <a:rPr lang="en-US" sz="2200" b="0" dirty="0">
-                <a:solidFill>
-                  <a:srgbClr val="098658"/>
-                </a:solidFill>
-                <a:effectLst/>
-                <a:latin typeface="Consolas" panose="020B0609020204030204" pitchFamily="49" charset="0"/>
-                <a:cs typeface="Consolas" panose="020B0609020204030204" pitchFamily="49" charset="0"/>
-              </a:rPr>
-              <a:t>3</a:t>
-            </a:r>
-            <a:r>
-              <a:rPr lang="en-US" sz="2200" b="0" dirty="0">
-                <a:solidFill>
-                  <a:srgbClr val="3B3B3B"/>
-                </a:solidFill>
-                <a:effectLst/>
-                <a:latin typeface="Consolas" panose="020B0609020204030204" pitchFamily="49" charset="0"/>
-                <a:cs typeface="Consolas" panose="020B0609020204030204" pitchFamily="49" charset="0"/>
-              </a:rPr>
-              <a:t>;</a:t>
-            </a:r>
-          </a:p>
-          <a:p>
-            <a:pPr>
-              <a:lnSpc>
-                <a:spcPct val="110000"/>
-              </a:lnSpc>
-              <a:buNone/>
-            </a:pPr>
-            <a:r>
-              <a:rPr lang="en-US" sz="2200" b="0" dirty="0">
-                <a:solidFill>
-                  <a:schemeClr val="bg2">
-                    <a:lumMod val="90000"/>
-                  </a:schemeClr>
-                </a:solidFill>
-                <a:effectLst/>
-                <a:latin typeface="Consolas" panose="020B0609020204030204" pitchFamily="49" charset="0"/>
-                <a:cs typeface="Consolas" panose="020B0609020204030204" pitchFamily="49" charset="0"/>
-              </a:rPr>
-              <a:t>6|   </a:t>
-            </a:r>
-            <a:r>
-              <a:rPr lang="en-US" sz="2200" b="0" dirty="0">
-                <a:solidFill>
-                  <a:srgbClr val="0000FF"/>
-                </a:solidFill>
-                <a:effectLst/>
-                <a:latin typeface="Consolas" panose="020B0609020204030204" pitchFamily="49" charset="0"/>
-                <a:cs typeface="Consolas" panose="020B0609020204030204" pitchFamily="49" charset="0"/>
-              </a:rPr>
-              <a:t>const</a:t>
-            </a:r>
-            <a:r>
-              <a:rPr lang="en-US" sz="2200" b="0" dirty="0">
-                <a:solidFill>
-                  <a:srgbClr val="3B3B3B"/>
-                </a:solidFill>
-                <a:effectLst/>
-                <a:latin typeface="Consolas" panose="020B0609020204030204" pitchFamily="49" charset="0"/>
-                <a:cs typeface="Consolas" panose="020B0609020204030204" pitchFamily="49" charset="0"/>
-              </a:rPr>
-              <a:t> </a:t>
-            </a:r>
-            <a:r>
-              <a:rPr lang="en-US" sz="2200" b="0" dirty="0">
-                <a:solidFill>
-                  <a:srgbClr val="0070C1"/>
-                </a:solidFill>
-                <a:effectLst/>
-                <a:latin typeface="Consolas" panose="020B0609020204030204" pitchFamily="49" charset="0"/>
-                <a:cs typeface="Consolas" panose="020B0609020204030204" pitchFamily="49" charset="0"/>
-              </a:rPr>
-              <a:t>z</a:t>
-            </a:r>
-            <a:r>
-              <a:rPr lang="en-US" sz="2200" b="0" dirty="0">
-                <a:solidFill>
-                  <a:srgbClr val="3B3B3B"/>
-                </a:solidFill>
-                <a:effectLst/>
-                <a:latin typeface="Consolas" panose="020B0609020204030204" pitchFamily="49" charset="0"/>
-                <a:cs typeface="Consolas" panose="020B0609020204030204" pitchFamily="49" charset="0"/>
-              </a:rPr>
-              <a:t> </a:t>
-            </a:r>
-            <a:r>
-              <a:rPr lang="en-US" sz="2200" b="0" dirty="0">
-                <a:solidFill>
-                  <a:srgbClr val="000000"/>
-                </a:solidFill>
-                <a:effectLst/>
-                <a:latin typeface="Consolas" panose="020B0609020204030204" pitchFamily="49" charset="0"/>
-                <a:cs typeface="Consolas" panose="020B0609020204030204" pitchFamily="49" charset="0"/>
-              </a:rPr>
-              <a:t>=</a:t>
-            </a:r>
-            <a:r>
-              <a:rPr lang="en-US" sz="2200" b="0" dirty="0">
-                <a:solidFill>
-                  <a:srgbClr val="3B3B3B"/>
-                </a:solidFill>
-                <a:effectLst/>
-                <a:latin typeface="Consolas" panose="020B0609020204030204" pitchFamily="49" charset="0"/>
-                <a:cs typeface="Consolas" panose="020B0609020204030204" pitchFamily="49" charset="0"/>
-              </a:rPr>
-              <a:t> </a:t>
-            </a:r>
-            <a:r>
-              <a:rPr lang="en-US" sz="2200" b="0" dirty="0">
-                <a:solidFill>
-                  <a:srgbClr val="0070C1"/>
-                </a:solidFill>
-                <a:effectLst/>
-                <a:latin typeface="Consolas" panose="020B0609020204030204" pitchFamily="49" charset="0"/>
-                <a:cs typeface="Consolas" panose="020B0609020204030204" pitchFamily="49" charset="0"/>
-              </a:rPr>
-              <a:t>x</a:t>
-            </a:r>
-            <a:r>
-              <a:rPr lang="en-US" sz="2200" b="0" dirty="0">
-                <a:solidFill>
-                  <a:srgbClr val="3B3B3B"/>
-                </a:solidFill>
-                <a:effectLst/>
-                <a:latin typeface="Consolas" panose="020B0609020204030204" pitchFamily="49" charset="0"/>
-                <a:cs typeface="Consolas" panose="020B0609020204030204" pitchFamily="49" charset="0"/>
-              </a:rPr>
-              <a:t> </a:t>
-            </a:r>
-            <a:r>
-              <a:rPr lang="en-US" sz="2200" b="0" dirty="0">
-                <a:solidFill>
-                  <a:srgbClr val="000000"/>
-                </a:solidFill>
-                <a:effectLst/>
-                <a:latin typeface="Consolas" panose="020B0609020204030204" pitchFamily="49" charset="0"/>
-                <a:cs typeface="Consolas" panose="020B0609020204030204" pitchFamily="49" charset="0"/>
-              </a:rPr>
-              <a:t>%</a:t>
-            </a:r>
-            <a:r>
-              <a:rPr lang="en-US" sz="2200" b="0" dirty="0">
-                <a:solidFill>
-                  <a:srgbClr val="3B3B3B"/>
-                </a:solidFill>
-                <a:effectLst/>
-                <a:latin typeface="Consolas" panose="020B0609020204030204" pitchFamily="49" charset="0"/>
-                <a:cs typeface="Consolas" panose="020B0609020204030204" pitchFamily="49" charset="0"/>
-              </a:rPr>
-              <a:t> </a:t>
-            </a:r>
-            <a:r>
-              <a:rPr lang="en-US" sz="2200" b="0" dirty="0">
-                <a:solidFill>
-                  <a:srgbClr val="098658"/>
-                </a:solidFill>
-                <a:effectLst/>
-                <a:latin typeface="Consolas" panose="020B0609020204030204" pitchFamily="49" charset="0"/>
-                <a:cs typeface="Consolas" panose="020B0609020204030204" pitchFamily="49" charset="0"/>
-              </a:rPr>
-              <a:t>2</a:t>
-            </a:r>
-            <a:r>
-              <a:rPr lang="en-US" sz="2200" b="0" dirty="0">
-                <a:solidFill>
-                  <a:srgbClr val="3B3B3B"/>
-                </a:solidFill>
-                <a:effectLst/>
-                <a:latin typeface="Consolas" panose="020B0609020204030204" pitchFamily="49" charset="0"/>
-                <a:cs typeface="Consolas" panose="020B0609020204030204" pitchFamily="49" charset="0"/>
-              </a:rPr>
-              <a:t> </a:t>
-            </a:r>
-            <a:r>
-              <a:rPr lang="en-US" sz="2200" b="0" dirty="0">
-                <a:solidFill>
-                  <a:srgbClr val="000000"/>
-                </a:solidFill>
-                <a:effectLst/>
-                <a:latin typeface="Consolas" panose="020B0609020204030204" pitchFamily="49" charset="0"/>
-                <a:cs typeface="Consolas" panose="020B0609020204030204" pitchFamily="49" charset="0"/>
-              </a:rPr>
-              <a:t>===</a:t>
-            </a:r>
-            <a:r>
-              <a:rPr lang="en-US" sz="2200" b="0" dirty="0">
-                <a:solidFill>
-                  <a:srgbClr val="3B3B3B"/>
-                </a:solidFill>
-                <a:effectLst/>
-                <a:latin typeface="Consolas" panose="020B0609020204030204" pitchFamily="49" charset="0"/>
-                <a:cs typeface="Consolas" panose="020B0609020204030204" pitchFamily="49" charset="0"/>
-              </a:rPr>
-              <a:t> </a:t>
-            </a:r>
-            <a:r>
-              <a:rPr lang="en-US" sz="2200" b="0" dirty="0">
-                <a:solidFill>
-                  <a:srgbClr val="098658"/>
-                </a:solidFill>
-                <a:effectLst/>
-                <a:latin typeface="Consolas" panose="020B0609020204030204" pitchFamily="49" charset="0"/>
-                <a:cs typeface="Consolas" panose="020B0609020204030204" pitchFamily="49" charset="0"/>
-              </a:rPr>
-              <a:t>0</a:t>
-            </a:r>
-            <a:r>
-              <a:rPr lang="en-US" sz="2200" b="0" dirty="0">
-                <a:solidFill>
-                  <a:srgbClr val="3B3B3B"/>
-                </a:solidFill>
-                <a:effectLst/>
-                <a:latin typeface="Consolas" panose="020B0609020204030204" pitchFamily="49" charset="0"/>
-                <a:cs typeface="Consolas" panose="020B0609020204030204" pitchFamily="49" charset="0"/>
-              </a:rPr>
-              <a:t> </a:t>
-            </a:r>
-            <a:r>
-              <a:rPr lang="en-US" sz="2200" b="0" dirty="0">
-                <a:solidFill>
-                  <a:srgbClr val="000000"/>
-                </a:solidFill>
-                <a:effectLst/>
-                <a:latin typeface="Consolas" panose="020B0609020204030204" pitchFamily="49" charset="0"/>
-                <a:cs typeface="Consolas" panose="020B0609020204030204" pitchFamily="49" charset="0"/>
-              </a:rPr>
-              <a:t>?</a:t>
-            </a:r>
-            <a:r>
-              <a:rPr lang="en-US" sz="2200" b="0" dirty="0">
-                <a:solidFill>
-                  <a:srgbClr val="3B3B3B"/>
-                </a:solidFill>
-                <a:effectLst/>
-                <a:latin typeface="Consolas" panose="020B0609020204030204" pitchFamily="49" charset="0"/>
-                <a:cs typeface="Consolas" panose="020B0609020204030204" pitchFamily="49" charset="0"/>
-              </a:rPr>
-              <a:t> </a:t>
-            </a:r>
-            <a:r>
-              <a:rPr lang="en-US" sz="2200" dirty="0">
-                <a:solidFill>
-                  <a:srgbClr val="098658"/>
-                </a:solidFill>
-                <a:latin typeface="Consolas" panose="020B0609020204030204" pitchFamily="49" charset="0"/>
-                <a:cs typeface="Consolas" panose="020B0609020204030204" pitchFamily="49" charset="0"/>
-              </a:rPr>
-              <a:t>1</a:t>
-            </a:r>
-            <a:r>
-              <a:rPr lang="en-US" sz="2200" b="0" dirty="0">
-                <a:solidFill>
-                  <a:srgbClr val="3B3B3B"/>
-                </a:solidFill>
-                <a:effectLst/>
-                <a:latin typeface="Consolas" panose="020B0609020204030204" pitchFamily="49" charset="0"/>
-                <a:cs typeface="Consolas" panose="020B0609020204030204" pitchFamily="49" charset="0"/>
-              </a:rPr>
-              <a:t> </a:t>
-            </a:r>
-            <a:r>
-              <a:rPr lang="en-US" sz="2200" b="0" dirty="0">
-                <a:solidFill>
-                  <a:srgbClr val="000000"/>
-                </a:solidFill>
-                <a:effectLst/>
-                <a:latin typeface="Consolas" panose="020B0609020204030204" pitchFamily="49" charset="0"/>
-                <a:cs typeface="Consolas" panose="020B0609020204030204" pitchFamily="49" charset="0"/>
-              </a:rPr>
-              <a:t>:</a:t>
-            </a:r>
-            <a:r>
-              <a:rPr lang="en-US" sz="2200" b="0" dirty="0">
-                <a:solidFill>
-                  <a:srgbClr val="3B3B3B"/>
-                </a:solidFill>
-                <a:effectLst/>
-                <a:latin typeface="Consolas" panose="020B0609020204030204" pitchFamily="49" charset="0"/>
-                <a:cs typeface="Consolas" panose="020B0609020204030204" pitchFamily="49" charset="0"/>
-              </a:rPr>
-              <a:t> </a:t>
-            </a:r>
-            <a:r>
-              <a:rPr lang="en-US" sz="2200" dirty="0">
-                <a:solidFill>
-                  <a:srgbClr val="098658"/>
-                </a:solidFill>
-                <a:latin typeface="Consolas" panose="020B0609020204030204" pitchFamily="49" charset="0"/>
-                <a:cs typeface="Consolas" panose="020B0609020204030204" pitchFamily="49" charset="0"/>
-              </a:rPr>
-              <a:t>2</a:t>
-            </a:r>
-            <a:r>
-              <a:rPr lang="en-US" sz="2200" b="0" dirty="0">
-                <a:solidFill>
-                  <a:srgbClr val="3B3B3B"/>
-                </a:solidFill>
-                <a:effectLst/>
-                <a:latin typeface="Consolas" panose="020B0609020204030204" pitchFamily="49" charset="0"/>
-                <a:cs typeface="Consolas" panose="020B0609020204030204" pitchFamily="49" charset="0"/>
-              </a:rPr>
-              <a:t>;</a:t>
-            </a:r>
-          </a:p>
-          <a:p>
-            <a:pPr>
-              <a:lnSpc>
-                <a:spcPct val="110000"/>
-              </a:lnSpc>
-            </a:pPr>
-            <a:r>
-              <a:rPr lang="en-US" sz="2200" dirty="0">
-                <a:solidFill>
-                  <a:schemeClr val="bg2">
-                    <a:lumMod val="90000"/>
-                  </a:schemeClr>
-                </a:solidFill>
-                <a:latin typeface="Consolas" panose="020B0609020204030204" pitchFamily="49" charset="0"/>
-                <a:cs typeface="Consolas" panose="020B0609020204030204" pitchFamily="49" charset="0"/>
-              </a:rPr>
-              <a:t>7|   </a:t>
-            </a:r>
-            <a:r>
-              <a:rPr lang="en-US" sz="2200" b="0" dirty="0">
-                <a:solidFill>
-                  <a:srgbClr val="AF00DB"/>
-                </a:solidFill>
-                <a:effectLst/>
-                <a:latin typeface="Consolas" panose="020B0609020204030204" pitchFamily="49" charset="0"/>
-                <a:cs typeface="Consolas" panose="020B0609020204030204" pitchFamily="49" charset="0"/>
-              </a:rPr>
-              <a:t>return</a:t>
-            </a:r>
-            <a:r>
-              <a:rPr lang="en-US" sz="2200" b="0" dirty="0">
-                <a:solidFill>
-                  <a:srgbClr val="3B3B3B"/>
-                </a:solidFill>
-                <a:effectLst/>
-                <a:latin typeface="Consolas" panose="020B0609020204030204" pitchFamily="49" charset="0"/>
-                <a:cs typeface="Consolas" panose="020B0609020204030204" pitchFamily="49" charset="0"/>
-              </a:rPr>
-              <a:t> </a:t>
-            </a:r>
-            <a:r>
-              <a:rPr lang="en-US" sz="2200" b="0" dirty="0">
-                <a:solidFill>
-                  <a:srgbClr val="0070C1"/>
-                </a:solidFill>
-                <a:effectLst/>
-                <a:latin typeface="Consolas" panose="020B0609020204030204" pitchFamily="49" charset="0"/>
-                <a:cs typeface="Consolas" panose="020B0609020204030204" pitchFamily="49" charset="0"/>
-              </a:rPr>
-              <a:t>x</a:t>
-            </a:r>
-            <a:r>
-              <a:rPr lang="en-US" sz="2200" b="0" dirty="0">
-                <a:solidFill>
-                  <a:srgbClr val="3B3B3B"/>
-                </a:solidFill>
-                <a:effectLst/>
-                <a:latin typeface="Consolas" panose="020B0609020204030204" pitchFamily="49" charset="0"/>
-                <a:cs typeface="Consolas" panose="020B0609020204030204" pitchFamily="49" charset="0"/>
-              </a:rPr>
-              <a:t> </a:t>
-            </a:r>
-            <a:r>
-              <a:rPr lang="en-US" sz="2200" b="0" dirty="0">
-                <a:solidFill>
-                  <a:srgbClr val="000000"/>
-                </a:solidFill>
-                <a:effectLst/>
-                <a:latin typeface="Consolas" panose="020B0609020204030204" pitchFamily="49" charset="0"/>
-                <a:cs typeface="Consolas" panose="020B0609020204030204" pitchFamily="49" charset="0"/>
-              </a:rPr>
-              <a:t>/</a:t>
-            </a:r>
-            <a:r>
-              <a:rPr lang="en-US" sz="2200" b="0" dirty="0">
-                <a:solidFill>
-                  <a:srgbClr val="3B3B3B"/>
-                </a:solidFill>
-                <a:effectLst/>
-                <a:latin typeface="Consolas" panose="020B0609020204030204" pitchFamily="49" charset="0"/>
-                <a:cs typeface="Consolas" panose="020B0609020204030204" pitchFamily="49" charset="0"/>
-              </a:rPr>
-              <a:t> (</a:t>
-            </a:r>
-            <a:r>
-              <a:rPr lang="en-US" sz="2200" b="0" dirty="0">
-                <a:solidFill>
-                  <a:srgbClr val="0070C1"/>
-                </a:solidFill>
-                <a:effectLst/>
-                <a:latin typeface="Consolas" panose="020B0609020204030204" pitchFamily="49" charset="0"/>
-                <a:cs typeface="Consolas" panose="020B0609020204030204" pitchFamily="49" charset="0"/>
-              </a:rPr>
-              <a:t>y</a:t>
-            </a:r>
-            <a:r>
-              <a:rPr lang="en-US" sz="2200" b="0" dirty="0">
-                <a:solidFill>
-                  <a:srgbClr val="3B3B3B"/>
-                </a:solidFill>
-                <a:effectLst/>
-                <a:latin typeface="Consolas" panose="020B0609020204030204" pitchFamily="49" charset="0"/>
-                <a:cs typeface="Consolas" panose="020B0609020204030204" pitchFamily="49" charset="0"/>
-              </a:rPr>
-              <a:t> </a:t>
-            </a:r>
-            <a:r>
-              <a:rPr lang="en-US" sz="2200" b="0" dirty="0">
-                <a:solidFill>
-                  <a:srgbClr val="000000"/>
-                </a:solidFill>
-                <a:effectLst/>
-                <a:latin typeface="Consolas" panose="020B0609020204030204" pitchFamily="49" charset="0"/>
-                <a:cs typeface="Consolas" panose="020B0609020204030204" pitchFamily="49" charset="0"/>
-              </a:rPr>
-              <a:t>-</a:t>
-            </a:r>
-            <a:r>
-              <a:rPr lang="en-US" sz="2200" b="0" dirty="0">
-                <a:solidFill>
-                  <a:srgbClr val="3B3B3B"/>
-                </a:solidFill>
-                <a:effectLst/>
-                <a:latin typeface="Consolas" panose="020B0609020204030204" pitchFamily="49" charset="0"/>
-                <a:cs typeface="Consolas" panose="020B0609020204030204" pitchFamily="49" charset="0"/>
-              </a:rPr>
-              <a:t> </a:t>
-            </a:r>
-            <a:r>
-              <a:rPr lang="en-US" sz="2200" b="0" dirty="0">
-                <a:solidFill>
-                  <a:srgbClr val="0070C1"/>
-                </a:solidFill>
-                <a:effectLst/>
-                <a:latin typeface="Consolas" panose="020B0609020204030204" pitchFamily="49" charset="0"/>
-                <a:cs typeface="Consolas" panose="020B0609020204030204" pitchFamily="49" charset="0"/>
-              </a:rPr>
-              <a:t>z</a:t>
-            </a:r>
-            <a:r>
-              <a:rPr lang="en-US" sz="2200" b="0" dirty="0">
-                <a:solidFill>
-                  <a:srgbClr val="3B3B3B"/>
-                </a:solidFill>
-                <a:effectLst/>
-                <a:latin typeface="Consolas" panose="020B0609020204030204" pitchFamily="49" charset="0"/>
-                <a:cs typeface="Consolas" panose="020B0609020204030204" pitchFamily="49" charset="0"/>
-              </a:rPr>
-              <a:t>);</a:t>
-            </a:r>
-          </a:p>
-          <a:p>
-            <a:pPr>
-              <a:lnSpc>
-                <a:spcPct val="110000"/>
-              </a:lnSpc>
-            </a:pPr>
-            <a:r>
-              <a:rPr lang="en-US" sz="2200" dirty="0">
-                <a:solidFill>
-                  <a:schemeClr val="bg2">
-                    <a:lumMod val="90000"/>
-                  </a:schemeClr>
-                </a:solidFill>
-                <a:latin typeface="Consolas" panose="020B0609020204030204" pitchFamily="49" charset="0"/>
-                <a:cs typeface="Consolas" panose="020B0609020204030204" pitchFamily="49" charset="0"/>
-              </a:rPr>
-              <a:t>8| </a:t>
-            </a:r>
-            <a:r>
-              <a:rPr lang="en-US" sz="2200" dirty="0">
-                <a:solidFill>
-                  <a:srgbClr val="3B3B3B"/>
-                </a:solidFill>
-                <a:latin typeface="Consolas" panose="020B0609020204030204" pitchFamily="49" charset="0"/>
-                <a:cs typeface="Consolas" panose="020B0609020204030204" pitchFamily="49" charset="0"/>
-              </a:rPr>
-              <a:t>}</a:t>
-            </a:r>
-          </a:p>
-        </p:txBody>
-      </p:sp>
-    </p:spTree>
-    <p:extLst>
-      <p:ext uri="{BB962C8B-B14F-4D97-AF65-F5344CB8AC3E}">
-        <p14:creationId xmlns:p14="http://schemas.microsoft.com/office/powerpoint/2010/main" val="4237173428"/>
       </p:ext>
     </p:extLst>
   </p:cSld>
@@ -17641,7 +16494,9 @@
           </a:xfrm>
         </p:spPr>
         <p:txBody>
-          <a:bodyPr/>
+          <a:bodyPr>
+            <a:normAutofit fontScale="92500"/>
+          </a:bodyPr>
           <a:lstStyle/>
           <a:p>
             <a:pPr marL="0" indent="0">
@@ -17649,57 +16504,61 @@
             </a:pPr>
             <a:r>
               <a:rPr lang="en-US" dirty="0"/>
-              <a:t>At the end of this lesson, you should be able to</a:t>
-            </a:r>
-          </a:p>
-          <a:p>
-            <a:pPr lvl="1"/>
+              <a:t>At the end of this lesson, you should be able to:</a:t>
+            </a:r>
+          </a:p>
+          <a:p>
+            <a:pPr marL="514350" indent="-514350">
+              <a:buFont typeface="+mj-lt"/>
+              <a:buAutoNum type="arabicPeriod"/>
+            </a:pPr>
             <a:r>
               <a:rPr lang="en-US" dirty="0"/>
-              <a:t>Explain how TypeScript types and documented preconditions influence what tests you need to write</a:t>
-            </a:r>
-          </a:p>
-          <a:p>
-            <a:pPr lvl="1"/>
+              <a:t>Explain three general ways of judging whether we've written enough tests</a:t>
+            </a:r>
+          </a:p>
+          <a:p>
+            <a:pPr marL="514350" indent="-514350">
+              <a:buFont typeface="+mj-lt"/>
+              <a:buAutoNum type="arabicPeriod"/>
+            </a:pPr>
             <a:r>
               <a:rPr lang="en-US" dirty="0"/>
-              <a:t>Explain the difference between the </a:t>
-            </a:r>
-            <a:r>
-              <a:rPr lang="en-US" dirty="0">
-                <a:solidFill>
-                  <a:srgbClr val="FF0000"/>
-                </a:solidFill>
-                <a:latin typeface="Consolas" panose="020B0609020204030204" pitchFamily="49" charset="0"/>
-                <a:cs typeface="Consolas" panose="020B0609020204030204" pitchFamily="49" charset="0"/>
-              </a:rPr>
-              <a:t>any</a:t>
-            </a:r>
+              <a:t>Explain how contracts provide better guidance than types in choosing test cases</a:t>
+            </a:r>
+          </a:p>
+          <a:p>
+            <a:pPr marL="514350" indent="-514350">
+              <a:buFont typeface="+mj-lt"/>
+              <a:buAutoNum type="arabicPeriod"/>
+            </a:pPr>
             <a:r>
               <a:rPr lang="en-US" dirty="0"/>
-              <a:t> vs </a:t>
-            </a:r>
-            <a:r>
-              <a:rPr lang="en-US" dirty="0">
-                <a:solidFill>
-                  <a:srgbClr val="FF0000"/>
-                </a:solidFill>
-                <a:latin typeface="Consolas" panose="020B0609020204030204" pitchFamily="49" charset="0"/>
-                <a:cs typeface="Consolas" panose="020B0609020204030204" pitchFamily="49" charset="0"/>
-              </a:rPr>
-              <a:t>unknown</a:t>
-            </a:r>
+              <a:t>Explain various measures of code coverage (including statements, branches, functions, and lines)</a:t>
+            </a:r>
+          </a:p>
+          <a:p>
+            <a:pPr marL="514350" indent="-514350">
+              <a:buFont typeface="+mj-lt"/>
+              <a:buAutoNum type="arabicPeriod"/>
+            </a:pPr>
             <a:r>
               <a:rPr lang="en-US" dirty="0"/>
-              <a:t> types in TypeScript</a:t>
-            </a:r>
-          </a:p>
-          <a:p>
-            <a:pPr lvl="1"/>
-            <a:r>
-              <a:rPr lang="en-US" dirty="0"/>
-              <a:t>Understand the structure of a simple Express server incorporating Zod validation</a:t>
-            </a:r>
+              <a:t>Explain how adversarial testing helps gauge whether our tests are sensitive enough to detect likely bugs</a:t>
+            </a:r>
+          </a:p>
+          <a:p>
+            <a:pPr marL="514350" indent="-514350">
+              <a:buFont typeface="+mj-lt"/>
+              <a:buAutoNum type="arabicPeriod"/>
+            </a:pPr>
+            <a:endParaRPr lang="en-US" dirty="0"/>
+          </a:p>
+          <a:p>
+            <a:pPr marL="0" indent="0">
+              <a:buNone/>
+            </a:pPr>
+            <a:endParaRPr lang="en-US" dirty="0"/>
           </a:p>
         </p:txBody>
       </p:sp>
@@ -17739,12 +16598,181 @@
           </a:p>
         </p:txBody>
       </p:sp>
+    </p:spTree>
+    <p:extLst>
+      <p:ext uri="{BB962C8B-B14F-4D97-AF65-F5344CB8AC3E}">
+        <p14:creationId xmlns:p14="http://schemas.microsoft.com/office/powerpoint/2010/main" val="578407451"/>
+      </p:ext>
+    </p:extLst>
+  </p:cSld>
+  <p:clrMapOvr>
+    <a:masterClrMapping/>
+  </p:clrMapOvr>
+</p:sld>
+</file>
+
+<file path=ppt/slides/slide20.xml><?xml version="1.0" encoding="utf-8"?>
+<p:sld xmlns:a="http://schemas.openxmlformats.org/drawingml/2006/main" xmlns:r="http://schemas.openxmlformats.org/officeDocument/2006/relationships" xmlns:p="http://schemas.openxmlformats.org/presentationml/2006/main">
+  <p:cSld>
+    <p:spTree>
+      <p:nvGrpSpPr>
+        <p:cNvPr id="1" name="">
+          <a:extLst>
+            <a:ext uri="{FF2B5EF4-FFF2-40B4-BE49-F238E27FC236}">
+              <a16:creationId xmlns:a16="http://schemas.microsoft.com/office/drawing/2014/main" id="{10C68DFF-D7BB-13BF-CA3C-2866BE9B07A1}"/>
+            </a:ext>
+          </a:extLst>
+        </p:cNvPr>
+        <p:cNvGrpSpPr/>
+        <p:nvPr/>
+      </p:nvGrpSpPr>
+      <p:grpSpPr>
+        <a:xfrm>
+          <a:off x="0" y="0"/>
+          <a:ext cx="0" cy="0"/>
+          <a:chOff x="0" y="0"/>
+          <a:chExt cx="0" cy="0"/>
+        </a:xfrm>
+      </p:grpSpPr>
       <p:sp>
         <p:nvSpPr>
-          <p:cNvPr id="5" name="TextBox 4">
+          <p:cNvPr id="2" name="Title 1">
             <a:extLst>
               <a:ext uri="{FF2B5EF4-FFF2-40B4-BE49-F238E27FC236}">
-                <a16:creationId xmlns:a16="http://schemas.microsoft.com/office/drawing/2014/main" id="{91F80B79-D0C8-94F8-6A5C-FF0A12961CAE}"/>
+                <a16:creationId xmlns:a16="http://schemas.microsoft.com/office/drawing/2014/main" id="{ECBF8E00-1CE9-8EE5-3CBB-E4301F131DD0}"/>
+              </a:ext>
+            </a:extLst>
+          </p:cNvPr>
+          <p:cNvSpPr>
+            <a:spLocks noGrp="1"/>
+          </p:cNvSpPr>
+          <p:nvPr>
+            <p:ph type="title"/>
+          </p:nvPr>
+        </p:nvSpPr>
+        <p:spPr>
+          <a:xfrm>
+            <a:off x="838200" y="18255"/>
+            <a:ext cx="10515600" cy="1325563"/>
+          </a:xfrm>
+        </p:spPr>
+        <p:txBody>
+          <a:bodyPr/>
+          <a:lstStyle/>
+          <a:p>
+            <a:r>
+              <a:rPr lang="en-US" dirty="0"/>
+              <a:t>Code Coverage: Line or Statement Coverage</a:t>
+            </a:r>
+          </a:p>
+        </p:txBody>
+      </p:sp>
+      <p:sp>
+        <p:nvSpPr>
+          <p:cNvPr id="4" name="Slide Number Placeholder 3">
+            <a:extLst>
+              <a:ext uri="{FF2B5EF4-FFF2-40B4-BE49-F238E27FC236}">
+                <a16:creationId xmlns:a16="http://schemas.microsoft.com/office/drawing/2014/main" id="{197B8237-DA67-CC8A-F2A8-DEF0DA641FAA}"/>
+              </a:ext>
+            </a:extLst>
+          </p:cNvPr>
+          <p:cNvSpPr>
+            <a:spLocks noGrp="1"/>
+          </p:cNvSpPr>
+          <p:nvPr>
+            <p:ph type="sldNum" sz="quarter" idx="12"/>
+          </p:nvPr>
+        </p:nvSpPr>
+        <p:spPr>
+          <a:xfrm>
+            <a:off x="8610600" y="6356350"/>
+            <a:ext cx="2743200" cy="365125"/>
+          </a:xfrm>
+        </p:spPr>
+        <p:txBody>
+          <a:bodyPr/>
+          <a:lstStyle/>
+          <a:p>
+            <a:fld id="{20F37917-FD3A-4669-9018-DA04BCDD3D75}" type="slidenum">
+              <a:rPr lang="en-US" smtClean="0"/>
+              <a:pPr/>
+              <a:t>20</a:t>
+            </a:fld>
+            <a:endParaRPr lang="en-US"/>
+          </a:p>
+        </p:txBody>
+      </p:sp>
+      <p:sp>
+        <p:nvSpPr>
+          <p:cNvPr id="10" name="Content Placeholder 9">
+            <a:extLst>
+              <a:ext uri="{FF2B5EF4-FFF2-40B4-BE49-F238E27FC236}">
+                <a16:creationId xmlns:a16="http://schemas.microsoft.com/office/drawing/2014/main" id="{EF657526-5CD9-6D31-F247-63D6442BDF12}"/>
+              </a:ext>
+            </a:extLst>
+          </p:cNvPr>
+          <p:cNvSpPr>
+            <a:spLocks noGrp="1"/>
+          </p:cNvSpPr>
+          <p:nvPr>
+            <p:ph idx="1"/>
+          </p:nvPr>
+        </p:nvSpPr>
+        <p:spPr>
+          <a:xfrm>
+            <a:off x="838200" y="1500159"/>
+            <a:ext cx="4882662" cy="5221316"/>
+          </a:xfrm>
+        </p:spPr>
+        <p:txBody>
+          <a:bodyPr>
+            <a:normAutofit/>
+          </a:bodyPr>
+          <a:lstStyle/>
+          <a:p>
+            <a:r>
+              <a:rPr lang="en-US" i="1" dirty="0"/>
+              <a:t>Line </a:t>
+            </a:r>
+            <a:r>
+              <a:rPr lang="en-US" dirty="0"/>
+              <a:t>and </a:t>
+            </a:r>
+            <a:r>
+              <a:rPr lang="en-US" i="1" dirty="0"/>
+              <a:t>Statement </a:t>
+            </a:r>
+            <a:r>
+              <a:rPr lang="en-US" dirty="0"/>
+              <a:t>coverage are a coarse measurement.</a:t>
+            </a:r>
+          </a:p>
+          <a:p>
+            <a:r>
+              <a:rPr lang="en-US" dirty="0"/>
+              <a:t>Testing x = 0 exercises lines 2 and 3</a:t>
+            </a:r>
+          </a:p>
+          <a:p>
+            <a:r>
+              <a:rPr lang="en-US" dirty="0"/>
+              <a:t>Testing x = 10 exercises lines 2, 5, 6, and 7.</a:t>
+            </a:r>
+          </a:p>
+          <a:p>
+            <a:pPr marL="0" indent="0">
+              <a:buNone/>
+            </a:pPr>
+            <a:endParaRPr lang="en-US" dirty="0"/>
+          </a:p>
+        </p:txBody>
+      </p:sp>
+      <p:sp>
+        <p:nvSpPr>
+          <p:cNvPr id="3" name="TextBox 2">
+            <a:extLst>
+              <a:ext uri="{FF2B5EF4-FFF2-40B4-BE49-F238E27FC236}">
+                <a16:creationId xmlns:a16="http://schemas.microsoft.com/office/drawing/2014/main" id="{DAED0082-17B9-FF5F-8F05-BB126115B63F}"/>
               </a:ext>
             </a:extLst>
           </p:cNvPr>
@@ -17753,18 +16781,19 @@
         </p:nvSpPr>
         <p:spPr>
           <a:xfrm>
-            <a:off x="8724900" y="2298700"/>
-            <a:ext cx="2743200" cy="2679700"/>
+            <a:off x="6283569" y="2501474"/>
+            <a:ext cx="5814645" cy="3051092"/>
           </a:xfrm>
           <a:prstGeom prst="rect">
             <a:avLst/>
           </a:prstGeom>
-          <a:solidFill>
-            <a:srgbClr val="FFFF00"/>
-          </a:solidFill>
-          <a:ln>
+          <a:noFill/>
+          <a:ln w="12700" cap="flat" cmpd="sng" algn="ctr">
             <a:noFill/>
+            <a:prstDash val="solid"/>
+            <a:miter lim="800000"/>
           </a:ln>
+          <a:effectLst/>
         </p:spPr>
         <p:style>
           <a:lnRef idx="2">
@@ -17783,22 +16812,1021 @@
           </a:fontRef>
         </p:style>
         <p:txBody>
-          <a:bodyPr rot="0" spcFirstLastPara="0" vertOverflow="overflow" horzOverflow="overflow" vert="horz" wrap="square" lIns="91440" tIns="45720" rIns="91440" bIns="45720" numCol="1" spcCol="0" rtlCol="0" fromWordArt="0" anchor="ctr" anchorCtr="0" forceAA="0" compatLnSpc="1">
-            <a:prstTxWarp prst="textNoShape">
-              <a:avLst/>
-            </a:prstTxWarp>
-            <a:noAutofit/>
+          <a:bodyPr wrap="square">
+            <a:spAutoFit/>
           </a:bodyPr>
           <a:lstStyle/>
           <a:p>
-            <a:pPr algn="l"/>
-            <a:r>
-              <a:rPr lang="en-US" sz="4000" dirty="0">
-                <a:solidFill>
-                  <a:schemeClr val="accent2"/>
-                </a:solidFill>
-              </a:rPr>
-              <a:t>NEED TO REDO</a:t>
+            <a:pPr>
+              <a:lnSpc>
+                <a:spcPct val="110000"/>
+              </a:lnSpc>
+              <a:buNone/>
+            </a:pPr>
+            <a:r>
+              <a:rPr lang="en-US" sz="2200" b="0" dirty="0">
+                <a:solidFill>
+                  <a:schemeClr val="bg2">
+                    <a:lumMod val="90000"/>
+                  </a:schemeClr>
+                </a:solidFill>
+                <a:effectLst/>
+                <a:latin typeface="Consolas" panose="020B0609020204030204" pitchFamily="49" charset="0"/>
+                <a:cs typeface="Consolas" panose="020B0609020204030204" pitchFamily="49" charset="0"/>
+              </a:rPr>
+              <a:t>1| </a:t>
+            </a:r>
+            <a:r>
+              <a:rPr lang="en-US" sz="2200" dirty="0">
+                <a:solidFill>
+                  <a:srgbClr val="AF00DB"/>
+                </a:solidFill>
+                <a:latin typeface="Consolas" panose="020B0609020204030204" pitchFamily="49" charset="0"/>
+                <a:cs typeface="Consolas" panose="020B0609020204030204" pitchFamily="49" charset="0"/>
+              </a:rPr>
+              <a:t>export </a:t>
+            </a:r>
+            <a:r>
+              <a:rPr lang="en-US" sz="2200" dirty="0">
+                <a:solidFill>
+                  <a:srgbClr val="0000FF"/>
+                </a:solidFill>
+                <a:latin typeface="Consolas" panose="020B0609020204030204" pitchFamily="49" charset="0"/>
+                <a:cs typeface="Consolas" panose="020B0609020204030204" pitchFamily="49" charset="0"/>
+              </a:rPr>
+              <a:t>function </a:t>
+            </a:r>
+            <a:r>
+              <a:rPr lang="en-US" sz="2200" dirty="0">
+                <a:solidFill>
+                  <a:schemeClr val="accent4">
+                    <a:lumMod val="50000"/>
+                  </a:schemeClr>
+                </a:solidFill>
+                <a:latin typeface="Consolas" panose="020B0609020204030204" pitchFamily="49" charset="0"/>
+                <a:cs typeface="Consolas" panose="020B0609020204030204" pitchFamily="49" charset="0"/>
+              </a:rPr>
+              <a:t>f</a:t>
+            </a:r>
+            <a:r>
+              <a:rPr lang="en-US" sz="2200" dirty="0">
+                <a:solidFill>
+                  <a:srgbClr val="0000FF"/>
+                </a:solidFill>
+                <a:latin typeface="Consolas" panose="020B0609020204030204" pitchFamily="49" charset="0"/>
+                <a:cs typeface="Consolas" panose="020B0609020204030204" pitchFamily="49" charset="0"/>
+              </a:rPr>
+              <a:t>(x: </a:t>
+            </a:r>
+            <a:r>
+              <a:rPr lang="en-US" sz="2200" dirty="0">
+                <a:solidFill>
+                  <a:srgbClr val="0070C0"/>
+                </a:solidFill>
+                <a:latin typeface="Consolas" panose="020B0609020204030204" pitchFamily="49" charset="0"/>
+                <a:cs typeface="Consolas" panose="020B0609020204030204" pitchFamily="49" charset="0"/>
+              </a:rPr>
+              <a:t>number</a:t>
+            </a:r>
+            <a:r>
+              <a:rPr lang="en-US" sz="2200" dirty="0">
+                <a:solidFill>
+                  <a:schemeClr val="tx1"/>
+                </a:solidFill>
+                <a:latin typeface="Consolas" panose="020B0609020204030204" pitchFamily="49" charset="0"/>
+                <a:cs typeface="Consolas" panose="020B0609020204030204" pitchFamily="49" charset="0"/>
+              </a:rPr>
+              <a:t>) {</a:t>
+            </a:r>
+            <a:endParaRPr lang="en-US" sz="2200" b="0" dirty="0">
+              <a:solidFill>
+                <a:schemeClr val="tx1"/>
+              </a:solidFill>
+              <a:effectLst/>
+              <a:latin typeface="Consolas" panose="020B0609020204030204" pitchFamily="49" charset="0"/>
+              <a:cs typeface="Consolas" panose="020B0609020204030204" pitchFamily="49" charset="0"/>
+            </a:endParaRPr>
+          </a:p>
+          <a:p>
+            <a:pPr>
+              <a:lnSpc>
+                <a:spcPct val="110000"/>
+              </a:lnSpc>
+              <a:buNone/>
+            </a:pPr>
+            <a:r>
+              <a:rPr lang="en-US" sz="2200" dirty="0">
+                <a:solidFill>
+                  <a:schemeClr val="bg2">
+                    <a:lumMod val="90000"/>
+                  </a:schemeClr>
+                </a:solidFill>
+                <a:latin typeface="Consolas" panose="020B0609020204030204" pitchFamily="49" charset="0"/>
+                <a:cs typeface="Consolas" panose="020B0609020204030204" pitchFamily="49" charset="0"/>
+              </a:rPr>
+              <a:t>2</a:t>
+            </a:r>
+            <a:r>
+              <a:rPr lang="en-US" sz="2200" b="0" dirty="0">
+                <a:solidFill>
+                  <a:schemeClr val="bg2">
+                    <a:lumMod val="90000"/>
+                  </a:schemeClr>
+                </a:solidFill>
+                <a:effectLst/>
+                <a:latin typeface="Consolas" panose="020B0609020204030204" pitchFamily="49" charset="0"/>
+                <a:cs typeface="Consolas" panose="020B0609020204030204" pitchFamily="49" charset="0"/>
+              </a:rPr>
+              <a:t>|   </a:t>
+            </a:r>
+            <a:r>
+              <a:rPr lang="en-US" sz="2200" b="0" dirty="0">
+                <a:solidFill>
+                  <a:srgbClr val="AF00DB"/>
+                </a:solidFill>
+                <a:effectLst/>
+                <a:latin typeface="Consolas" panose="020B0609020204030204" pitchFamily="49" charset="0"/>
+                <a:cs typeface="Consolas" panose="020B0609020204030204" pitchFamily="49" charset="0"/>
+              </a:rPr>
+              <a:t>if</a:t>
+            </a:r>
+            <a:r>
+              <a:rPr lang="en-US" sz="2200" b="0" dirty="0">
+                <a:solidFill>
+                  <a:srgbClr val="3B3B3B"/>
+                </a:solidFill>
+                <a:effectLst/>
+                <a:latin typeface="Consolas" panose="020B0609020204030204" pitchFamily="49" charset="0"/>
+                <a:cs typeface="Consolas" panose="020B0609020204030204" pitchFamily="49" charset="0"/>
+              </a:rPr>
+              <a:t> (</a:t>
+            </a:r>
+            <a:r>
+              <a:rPr lang="en-US" sz="2200" b="0" dirty="0">
+                <a:solidFill>
+                  <a:srgbClr val="0070C1"/>
+                </a:solidFill>
+                <a:effectLst/>
+                <a:latin typeface="Consolas" panose="020B0609020204030204" pitchFamily="49" charset="0"/>
+                <a:cs typeface="Consolas" panose="020B0609020204030204" pitchFamily="49" charset="0"/>
+              </a:rPr>
+              <a:t>x</a:t>
+            </a:r>
+            <a:r>
+              <a:rPr lang="en-US" sz="2200" b="0" dirty="0">
+                <a:solidFill>
+                  <a:srgbClr val="3B3B3B"/>
+                </a:solidFill>
+                <a:effectLst/>
+                <a:latin typeface="Consolas" panose="020B0609020204030204" pitchFamily="49" charset="0"/>
+                <a:cs typeface="Consolas" panose="020B0609020204030204" pitchFamily="49" charset="0"/>
+              </a:rPr>
+              <a:t> </a:t>
+            </a:r>
+            <a:r>
+              <a:rPr lang="en-US" sz="2200" b="0" dirty="0">
+                <a:solidFill>
+                  <a:srgbClr val="000000"/>
+                </a:solidFill>
+                <a:effectLst/>
+                <a:latin typeface="Consolas" panose="020B0609020204030204" pitchFamily="49" charset="0"/>
+                <a:cs typeface="Consolas" panose="020B0609020204030204" pitchFamily="49" charset="0"/>
+              </a:rPr>
+              <a:t>===</a:t>
+            </a:r>
+            <a:r>
+              <a:rPr lang="en-US" sz="2200" b="0" dirty="0">
+                <a:solidFill>
+                  <a:srgbClr val="3B3B3B"/>
+                </a:solidFill>
+                <a:effectLst/>
+                <a:latin typeface="Consolas" panose="020B0609020204030204" pitchFamily="49" charset="0"/>
+                <a:cs typeface="Consolas" panose="020B0609020204030204" pitchFamily="49" charset="0"/>
+              </a:rPr>
+              <a:t> </a:t>
+            </a:r>
+            <a:r>
+              <a:rPr lang="en-US" sz="2200" b="0" dirty="0">
+                <a:solidFill>
+                  <a:srgbClr val="098658"/>
+                </a:solidFill>
+                <a:effectLst/>
+                <a:latin typeface="Consolas" panose="020B0609020204030204" pitchFamily="49" charset="0"/>
+                <a:cs typeface="Consolas" panose="020B0609020204030204" pitchFamily="49" charset="0"/>
+              </a:rPr>
+              <a:t>0</a:t>
+            </a:r>
+            <a:r>
+              <a:rPr lang="en-US" sz="2200" b="0" dirty="0">
+                <a:solidFill>
+                  <a:srgbClr val="3B3B3B"/>
+                </a:solidFill>
+                <a:effectLst/>
+                <a:latin typeface="Consolas" panose="020B0609020204030204" pitchFamily="49" charset="0"/>
+                <a:cs typeface="Consolas" panose="020B0609020204030204" pitchFamily="49" charset="0"/>
+              </a:rPr>
+              <a:t>) {</a:t>
+            </a:r>
+          </a:p>
+          <a:p>
+            <a:pPr>
+              <a:lnSpc>
+                <a:spcPct val="110000"/>
+              </a:lnSpc>
+              <a:buNone/>
+            </a:pPr>
+            <a:r>
+              <a:rPr lang="en-US" sz="2200" b="0" dirty="0">
+                <a:solidFill>
+                  <a:schemeClr val="bg2">
+                    <a:lumMod val="90000"/>
+                  </a:schemeClr>
+                </a:solidFill>
+                <a:effectLst/>
+                <a:latin typeface="Consolas" panose="020B0609020204030204" pitchFamily="49" charset="0"/>
+                <a:cs typeface="Consolas" panose="020B0609020204030204" pitchFamily="49" charset="0"/>
+              </a:rPr>
+              <a:t>3|</a:t>
+            </a:r>
+            <a:r>
+              <a:rPr lang="en-US" sz="2200" b="0" dirty="0">
+                <a:solidFill>
+                  <a:srgbClr val="AF00DB"/>
+                </a:solidFill>
+                <a:effectLst/>
+                <a:latin typeface="Consolas" panose="020B0609020204030204" pitchFamily="49" charset="0"/>
+                <a:cs typeface="Consolas" panose="020B0609020204030204" pitchFamily="49" charset="0"/>
+              </a:rPr>
+              <a:t>     return</a:t>
+            </a:r>
+            <a:r>
+              <a:rPr lang="en-US" sz="2200" b="0" dirty="0">
+                <a:solidFill>
+                  <a:srgbClr val="3B3B3B"/>
+                </a:solidFill>
+                <a:effectLst/>
+                <a:latin typeface="Consolas" panose="020B0609020204030204" pitchFamily="49" charset="0"/>
+                <a:cs typeface="Consolas" panose="020B0609020204030204" pitchFamily="49" charset="0"/>
+              </a:rPr>
+              <a:t> </a:t>
+            </a:r>
+            <a:r>
+              <a:rPr lang="en-US" sz="2200" b="0" dirty="0">
+                <a:solidFill>
+                  <a:srgbClr val="098658"/>
+                </a:solidFill>
+                <a:effectLst/>
+                <a:latin typeface="Consolas" panose="020B0609020204030204" pitchFamily="49" charset="0"/>
+                <a:cs typeface="Consolas" panose="020B0609020204030204" pitchFamily="49" charset="0"/>
+              </a:rPr>
+              <a:t>3</a:t>
+            </a:r>
+            <a:r>
+              <a:rPr lang="en-US" sz="2200" b="0" dirty="0">
+                <a:solidFill>
+                  <a:srgbClr val="3B3B3B"/>
+                </a:solidFill>
+                <a:effectLst/>
+                <a:latin typeface="Consolas" panose="020B0609020204030204" pitchFamily="49" charset="0"/>
+                <a:cs typeface="Consolas" panose="020B0609020204030204" pitchFamily="49" charset="0"/>
+              </a:rPr>
+              <a:t>;</a:t>
+            </a:r>
+          </a:p>
+          <a:p>
+            <a:pPr>
+              <a:lnSpc>
+                <a:spcPct val="110000"/>
+              </a:lnSpc>
+              <a:buNone/>
+            </a:pPr>
+            <a:r>
+              <a:rPr lang="en-US" sz="2200" b="0" dirty="0">
+                <a:solidFill>
+                  <a:schemeClr val="bg2">
+                    <a:lumMod val="90000"/>
+                  </a:schemeClr>
+                </a:solidFill>
+                <a:effectLst/>
+                <a:latin typeface="Consolas" panose="020B0609020204030204" pitchFamily="49" charset="0"/>
+                <a:cs typeface="Consolas" panose="020B0609020204030204" pitchFamily="49" charset="0"/>
+              </a:rPr>
+              <a:t>4|   </a:t>
+            </a:r>
+            <a:r>
+              <a:rPr lang="en-US" sz="2200" b="0" dirty="0">
+                <a:solidFill>
+                  <a:srgbClr val="3B3B3B"/>
+                </a:solidFill>
+                <a:effectLst/>
+                <a:latin typeface="Consolas" panose="020B0609020204030204" pitchFamily="49" charset="0"/>
+                <a:cs typeface="Consolas" panose="020B0609020204030204" pitchFamily="49" charset="0"/>
+              </a:rPr>
+              <a:t>}</a:t>
+            </a:r>
+          </a:p>
+          <a:p>
+            <a:pPr>
+              <a:lnSpc>
+                <a:spcPct val="110000"/>
+              </a:lnSpc>
+              <a:buNone/>
+            </a:pPr>
+            <a:r>
+              <a:rPr lang="en-US" sz="2200" b="0" dirty="0">
+                <a:solidFill>
+                  <a:schemeClr val="bg2">
+                    <a:lumMod val="90000"/>
+                  </a:schemeClr>
+                </a:solidFill>
+                <a:effectLst/>
+                <a:latin typeface="Consolas" panose="020B0609020204030204" pitchFamily="49" charset="0"/>
+                <a:cs typeface="Consolas" panose="020B0609020204030204" pitchFamily="49" charset="0"/>
+              </a:rPr>
+              <a:t>5|   </a:t>
+            </a:r>
+            <a:r>
+              <a:rPr lang="en-US" sz="2200" b="0" dirty="0">
+                <a:solidFill>
+                  <a:srgbClr val="0000FF"/>
+                </a:solidFill>
+                <a:effectLst/>
+                <a:latin typeface="Consolas" panose="020B0609020204030204" pitchFamily="49" charset="0"/>
+                <a:cs typeface="Consolas" panose="020B0609020204030204" pitchFamily="49" charset="0"/>
+              </a:rPr>
+              <a:t>const</a:t>
+            </a:r>
+            <a:r>
+              <a:rPr lang="en-US" sz="2200" b="0" dirty="0">
+                <a:solidFill>
+                  <a:srgbClr val="3B3B3B"/>
+                </a:solidFill>
+                <a:effectLst/>
+                <a:latin typeface="Consolas" panose="020B0609020204030204" pitchFamily="49" charset="0"/>
+                <a:cs typeface="Consolas" panose="020B0609020204030204" pitchFamily="49" charset="0"/>
+              </a:rPr>
+              <a:t> </a:t>
+            </a:r>
+            <a:r>
+              <a:rPr lang="en-US" sz="2200" b="0" dirty="0">
+                <a:solidFill>
+                  <a:srgbClr val="0070C1"/>
+                </a:solidFill>
+                <a:effectLst/>
+                <a:latin typeface="Consolas" panose="020B0609020204030204" pitchFamily="49" charset="0"/>
+                <a:cs typeface="Consolas" panose="020B0609020204030204" pitchFamily="49" charset="0"/>
+              </a:rPr>
+              <a:t>y</a:t>
+            </a:r>
+            <a:r>
+              <a:rPr lang="en-US" sz="2200" b="0" dirty="0">
+                <a:solidFill>
+                  <a:srgbClr val="3B3B3B"/>
+                </a:solidFill>
+                <a:effectLst/>
+                <a:latin typeface="Consolas" panose="020B0609020204030204" pitchFamily="49" charset="0"/>
+                <a:cs typeface="Consolas" panose="020B0609020204030204" pitchFamily="49" charset="0"/>
+              </a:rPr>
+              <a:t> </a:t>
+            </a:r>
+            <a:r>
+              <a:rPr lang="en-US" sz="2200" b="0" dirty="0">
+                <a:solidFill>
+                  <a:srgbClr val="000000"/>
+                </a:solidFill>
+                <a:effectLst/>
+                <a:latin typeface="Consolas" panose="020B0609020204030204" pitchFamily="49" charset="0"/>
+                <a:cs typeface="Consolas" panose="020B0609020204030204" pitchFamily="49" charset="0"/>
+              </a:rPr>
+              <a:t>=</a:t>
+            </a:r>
+            <a:r>
+              <a:rPr lang="en-US" sz="2200" b="0" dirty="0">
+                <a:solidFill>
+                  <a:srgbClr val="3B3B3B"/>
+                </a:solidFill>
+                <a:effectLst/>
+                <a:latin typeface="Consolas" panose="020B0609020204030204" pitchFamily="49" charset="0"/>
+                <a:cs typeface="Consolas" panose="020B0609020204030204" pitchFamily="49" charset="0"/>
+              </a:rPr>
+              <a:t> </a:t>
+            </a:r>
+            <a:r>
+              <a:rPr lang="en-US" sz="2200" b="0" dirty="0">
+                <a:solidFill>
+                  <a:srgbClr val="0070C1"/>
+                </a:solidFill>
+                <a:effectLst/>
+                <a:latin typeface="Consolas" panose="020B0609020204030204" pitchFamily="49" charset="0"/>
+                <a:cs typeface="Consolas" panose="020B0609020204030204" pitchFamily="49" charset="0"/>
+              </a:rPr>
+              <a:t>x</a:t>
+            </a:r>
+            <a:r>
+              <a:rPr lang="en-US" sz="2200" b="0" dirty="0">
+                <a:solidFill>
+                  <a:srgbClr val="3B3B3B"/>
+                </a:solidFill>
+                <a:effectLst/>
+                <a:latin typeface="Consolas" panose="020B0609020204030204" pitchFamily="49" charset="0"/>
+                <a:cs typeface="Consolas" panose="020B0609020204030204" pitchFamily="49" charset="0"/>
+              </a:rPr>
+              <a:t> </a:t>
+            </a:r>
+            <a:r>
+              <a:rPr lang="en-US" sz="2200" b="0" dirty="0">
+                <a:solidFill>
+                  <a:srgbClr val="000000"/>
+                </a:solidFill>
+                <a:effectLst/>
+                <a:latin typeface="Consolas" panose="020B0609020204030204" pitchFamily="49" charset="0"/>
+                <a:cs typeface="Consolas" panose="020B0609020204030204" pitchFamily="49" charset="0"/>
+              </a:rPr>
+              <a:t>&gt;</a:t>
+            </a:r>
+            <a:r>
+              <a:rPr lang="en-US" sz="2200" b="0" dirty="0">
+                <a:solidFill>
+                  <a:srgbClr val="3B3B3B"/>
+                </a:solidFill>
+                <a:effectLst/>
+                <a:latin typeface="Consolas" panose="020B0609020204030204" pitchFamily="49" charset="0"/>
+                <a:cs typeface="Consolas" panose="020B0609020204030204" pitchFamily="49" charset="0"/>
+              </a:rPr>
+              <a:t> </a:t>
+            </a:r>
+            <a:r>
+              <a:rPr lang="en-US" sz="2200" b="0" dirty="0">
+                <a:solidFill>
+                  <a:srgbClr val="098658"/>
+                </a:solidFill>
+                <a:effectLst/>
+                <a:latin typeface="Consolas" panose="020B0609020204030204" pitchFamily="49" charset="0"/>
+                <a:cs typeface="Consolas" panose="020B0609020204030204" pitchFamily="49" charset="0"/>
+              </a:rPr>
+              <a:t>4</a:t>
+            </a:r>
+            <a:r>
+              <a:rPr lang="en-US" sz="2200" b="0" dirty="0">
+                <a:solidFill>
+                  <a:srgbClr val="3B3B3B"/>
+                </a:solidFill>
+                <a:effectLst/>
+                <a:latin typeface="Consolas" panose="020B0609020204030204" pitchFamily="49" charset="0"/>
+                <a:cs typeface="Consolas" panose="020B0609020204030204" pitchFamily="49" charset="0"/>
+              </a:rPr>
+              <a:t> </a:t>
+            </a:r>
+            <a:r>
+              <a:rPr lang="en-US" sz="2200" b="0" dirty="0">
+                <a:solidFill>
+                  <a:srgbClr val="000000"/>
+                </a:solidFill>
+                <a:effectLst/>
+                <a:latin typeface="Consolas" panose="020B0609020204030204" pitchFamily="49" charset="0"/>
+                <a:cs typeface="Consolas" panose="020B0609020204030204" pitchFamily="49" charset="0"/>
+              </a:rPr>
+              <a:t>?</a:t>
+            </a:r>
+            <a:r>
+              <a:rPr lang="en-US" sz="2200" b="0" dirty="0">
+                <a:solidFill>
+                  <a:srgbClr val="3B3B3B"/>
+                </a:solidFill>
+                <a:effectLst/>
+                <a:latin typeface="Consolas" panose="020B0609020204030204" pitchFamily="49" charset="0"/>
+                <a:cs typeface="Consolas" panose="020B0609020204030204" pitchFamily="49" charset="0"/>
+              </a:rPr>
+              <a:t> </a:t>
+            </a:r>
+            <a:r>
+              <a:rPr lang="en-US" sz="2200" b="0" dirty="0">
+                <a:solidFill>
+                  <a:srgbClr val="098658"/>
+                </a:solidFill>
+                <a:effectLst/>
+                <a:latin typeface="Consolas" panose="020B0609020204030204" pitchFamily="49" charset="0"/>
+                <a:cs typeface="Consolas" panose="020B0609020204030204" pitchFamily="49" charset="0"/>
+              </a:rPr>
+              <a:t>2</a:t>
+            </a:r>
+            <a:r>
+              <a:rPr lang="en-US" sz="2200" b="0" dirty="0">
+                <a:solidFill>
+                  <a:srgbClr val="3B3B3B"/>
+                </a:solidFill>
+                <a:effectLst/>
+                <a:latin typeface="Consolas" panose="020B0609020204030204" pitchFamily="49" charset="0"/>
+                <a:cs typeface="Consolas" panose="020B0609020204030204" pitchFamily="49" charset="0"/>
+              </a:rPr>
+              <a:t> </a:t>
+            </a:r>
+            <a:r>
+              <a:rPr lang="en-US" sz="2200" b="0" dirty="0">
+                <a:solidFill>
+                  <a:srgbClr val="000000"/>
+                </a:solidFill>
+                <a:effectLst/>
+                <a:latin typeface="Consolas" panose="020B0609020204030204" pitchFamily="49" charset="0"/>
+                <a:cs typeface="Consolas" panose="020B0609020204030204" pitchFamily="49" charset="0"/>
+              </a:rPr>
+              <a:t>:</a:t>
+            </a:r>
+            <a:r>
+              <a:rPr lang="en-US" sz="2200" b="0" dirty="0">
+                <a:solidFill>
+                  <a:srgbClr val="3B3B3B"/>
+                </a:solidFill>
+                <a:effectLst/>
+                <a:latin typeface="Consolas" panose="020B0609020204030204" pitchFamily="49" charset="0"/>
+                <a:cs typeface="Consolas" panose="020B0609020204030204" pitchFamily="49" charset="0"/>
+              </a:rPr>
+              <a:t> </a:t>
+            </a:r>
+            <a:r>
+              <a:rPr lang="en-US" sz="2200" b="0" dirty="0">
+                <a:solidFill>
+                  <a:srgbClr val="098658"/>
+                </a:solidFill>
+                <a:effectLst/>
+                <a:latin typeface="Consolas" panose="020B0609020204030204" pitchFamily="49" charset="0"/>
+                <a:cs typeface="Consolas" panose="020B0609020204030204" pitchFamily="49" charset="0"/>
+              </a:rPr>
+              <a:t>3</a:t>
+            </a:r>
+            <a:r>
+              <a:rPr lang="en-US" sz="2200" b="0" dirty="0">
+                <a:solidFill>
+                  <a:srgbClr val="3B3B3B"/>
+                </a:solidFill>
+                <a:effectLst/>
+                <a:latin typeface="Consolas" panose="020B0609020204030204" pitchFamily="49" charset="0"/>
+                <a:cs typeface="Consolas" panose="020B0609020204030204" pitchFamily="49" charset="0"/>
+              </a:rPr>
+              <a:t>;</a:t>
+            </a:r>
+          </a:p>
+          <a:p>
+            <a:pPr>
+              <a:lnSpc>
+                <a:spcPct val="110000"/>
+              </a:lnSpc>
+              <a:buNone/>
+            </a:pPr>
+            <a:r>
+              <a:rPr lang="en-US" sz="2200" b="0" dirty="0">
+                <a:solidFill>
+                  <a:schemeClr val="bg2">
+                    <a:lumMod val="90000"/>
+                  </a:schemeClr>
+                </a:solidFill>
+                <a:effectLst/>
+                <a:latin typeface="Consolas" panose="020B0609020204030204" pitchFamily="49" charset="0"/>
+                <a:cs typeface="Consolas" panose="020B0609020204030204" pitchFamily="49" charset="0"/>
+              </a:rPr>
+              <a:t>6|   </a:t>
+            </a:r>
+            <a:r>
+              <a:rPr lang="en-US" sz="2200" b="0" dirty="0">
+                <a:solidFill>
+                  <a:srgbClr val="0000FF"/>
+                </a:solidFill>
+                <a:effectLst/>
+                <a:latin typeface="Consolas" panose="020B0609020204030204" pitchFamily="49" charset="0"/>
+                <a:cs typeface="Consolas" panose="020B0609020204030204" pitchFamily="49" charset="0"/>
+              </a:rPr>
+              <a:t>const</a:t>
+            </a:r>
+            <a:r>
+              <a:rPr lang="en-US" sz="2200" b="0" dirty="0">
+                <a:solidFill>
+                  <a:srgbClr val="3B3B3B"/>
+                </a:solidFill>
+                <a:effectLst/>
+                <a:latin typeface="Consolas" panose="020B0609020204030204" pitchFamily="49" charset="0"/>
+                <a:cs typeface="Consolas" panose="020B0609020204030204" pitchFamily="49" charset="0"/>
+              </a:rPr>
+              <a:t> </a:t>
+            </a:r>
+            <a:r>
+              <a:rPr lang="en-US" sz="2200" b="0" dirty="0">
+                <a:solidFill>
+                  <a:srgbClr val="0070C1"/>
+                </a:solidFill>
+                <a:effectLst/>
+                <a:latin typeface="Consolas" panose="020B0609020204030204" pitchFamily="49" charset="0"/>
+                <a:cs typeface="Consolas" panose="020B0609020204030204" pitchFamily="49" charset="0"/>
+              </a:rPr>
+              <a:t>z</a:t>
+            </a:r>
+            <a:r>
+              <a:rPr lang="en-US" sz="2200" b="0" dirty="0">
+                <a:solidFill>
+                  <a:srgbClr val="3B3B3B"/>
+                </a:solidFill>
+                <a:effectLst/>
+                <a:latin typeface="Consolas" panose="020B0609020204030204" pitchFamily="49" charset="0"/>
+                <a:cs typeface="Consolas" panose="020B0609020204030204" pitchFamily="49" charset="0"/>
+              </a:rPr>
+              <a:t> </a:t>
+            </a:r>
+            <a:r>
+              <a:rPr lang="en-US" sz="2200" b="0" dirty="0">
+                <a:solidFill>
+                  <a:srgbClr val="000000"/>
+                </a:solidFill>
+                <a:effectLst/>
+                <a:latin typeface="Consolas" panose="020B0609020204030204" pitchFamily="49" charset="0"/>
+                <a:cs typeface="Consolas" panose="020B0609020204030204" pitchFamily="49" charset="0"/>
+              </a:rPr>
+              <a:t>=</a:t>
+            </a:r>
+            <a:r>
+              <a:rPr lang="en-US" sz="2200" b="0" dirty="0">
+                <a:solidFill>
+                  <a:srgbClr val="3B3B3B"/>
+                </a:solidFill>
+                <a:effectLst/>
+                <a:latin typeface="Consolas" panose="020B0609020204030204" pitchFamily="49" charset="0"/>
+                <a:cs typeface="Consolas" panose="020B0609020204030204" pitchFamily="49" charset="0"/>
+              </a:rPr>
+              <a:t> </a:t>
+            </a:r>
+            <a:r>
+              <a:rPr lang="en-US" sz="2200" b="0" dirty="0">
+                <a:solidFill>
+                  <a:srgbClr val="0070C1"/>
+                </a:solidFill>
+                <a:effectLst/>
+                <a:latin typeface="Consolas" panose="020B0609020204030204" pitchFamily="49" charset="0"/>
+                <a:cs typeface="Consolas" panose="020B0609020204030204" pitchFamily="49" charset="0"/>
+              </a:rPr>
+              <a:t>x</a:t>
+            </a:r>
+            <a:r>
+              <a:rPr lang="en-US" sz="2200" b="0" dirty="0">
+                <a:solidFill>
+                  <a:srgbClr val="3B3B3B"/>
+                </a:solidFill>
+                <a:effectLst/>
+                <a:latin typeface="Consolas" panose="020B0609020204030204" pitchFamily="49" charset="0"/>
+                <a:cs typeface="Consolas" panose="020B0609020204030204" pitchFamily="49" charset="0"/>
+              </a:rPr>
+              <a:t> </a:t>
+            </a:r>
+            <a:r>
+              <a:rPr lang="en-US" sz="2200" b="0" dirty="0">
+                <a:solidFill>
+                  <a:srgbClr val="000000"/>
+                </a:solidFill>
+                <a:effectLst/>
+                <a:latin typeface="Consolas" panose="020B0609020204030204" pitchFamily="49" charset="0"/>
+                <a:cs typeface="Consolas" panose="020B0609020204030204" pitchFamily="49" charset="0"/>
+              </a:rPr>
+              <a:t>%</a:t>
+            </a:r>
+            <a:r>
+              <a:rPr lang="en-US" sz="2200" b="0" dirty="0">
+                <a:solidFill>
+                  <a:srgbClr val="3B3B3B"/>
+                </a:solidFill>
+                <a:effectLst/>
+                <a:latin typeface="Consolas" panose="020B0609020204030204" pitchFamily="49" charset="0"/>
+                <a:cs typeface="Consolas" panose="020B0609020204030204" pitchFamily="49" charset="0"/>
+              </a:rPr>
+              <a:t> </a:t>
+            </a:r>
+            <a:r>
+              <a:rPr lang="en-US" sz="2200" b="0" dirty="0">
+                <a:solidFill>
+                  <a:srgbClr val="098658"/>
+                </a:solidFill>
+                <a:effectLst/>
+                <a:latin typeface="Consolas" panose="020B0609020204030204" pitchFamily="49" charset="0"/>
+                <a:cs typeface="Consolas" panose="020B0609020204030204" pitchFamily="49" charset="0"/>
+              </a:rPr>
+              <a:t>2</a:t>
+            </a:r>
+            <a:r>
+              <a:rPr lang="en-US" sz="2200" b="0" dirty="0">
+                <a:solidFill>
+                  <a:srgbClr val="3B3B3B"/>
+                </a:solidFill>
+                <a:effectLst/>
+                <a:latin typeface="Consolas" panose="020B0609020204030204" pitchFamily="49" charset="0"/>
+                <a:cs typeface="Consolas" panose="020B0609020204030204" pitchFamily="49" charset="0"/>
+              </a:rPr>
+              <a:t> </a:t>
+            </a:r>
+            <a:r>
+              <a:rPr lang="en-US" sz="2200" b="0" dirty="0">
+                <a:solidFill>
+                  <a:srgbClr val="000000"/>
+                </a:solidFill>
+                <a:effectLst/>
+                <a:latin typeface="Consolas" panose="020B0609020204030204" pitchFamily="49" charset="0"/>
+                <a:cs typeface="Consolas" panose="020B0609020204030204" pitchFamily="49" charset="0"/>
+              </a:rPr>
+              <a:t>===</a:t>
+            </a:r>
+            <a:r>
+              <a:rPr lang="en-US" sz="2200" b="0" dirty="0">
+                <a:solidFill>
+                  <a:srgbClr val="3B3B3B"/>
+                </a:solidFill>
+                <a:effectLst/>
+                <a:latin typeface="Consolas" panose="020B0609020204030204" pitchFamily="49" charset="0"/>
+                <a:cs typeface="Consolas" panose="020B0609020204030204" pitchFamily="49" charset="0"/>
+              </a:rPr>
+              <a:t> </a:t>
+            </a:r>
+            <a:r>
+              <a:rPr lang="en-US" sz="2200" b="0" dirty="0">
+                <a:solidFill>
+                  <a:srgbClr val="098658"/>
+                </a:solidFill>
+                <a:effectLst/>
+                <a:latin typeface="Consolas" panose="020B0609020204030204" pitchFamily="49" charset="0"/>
+                <a:cs typeface="Consolas" panose="020B0609020204030204" pitchFamily="49" charset="0"/>
+              </a:rPr>
+              <a:t>0</a:t>
+            </a:r>
+            <a:r>
+              <a:rPr lang="en-US" sz="2200" b="0" dirty="0">
+                <a:solidFill>
+                  <a:srgbClr val="3B3B3B"/>
+                </a:solidFill>
+                <a:effectLst/>
+                <a:latin typeface="Consolas" panose="020B0609020204030204" pitchFamily="49" charset="0"/>
+                <a:cs typeface="Consolas" panose="020B0609020204030204" pitchFamily="49" charset="0"/>
+              </a:rPr>
+              <a:t> </a:t>
+            </a:r>
+            <a:r>
+              <a:rPr lang="en-US" sz="2200" b="0" dirty="0">
+                <a:solidFill>
+                  <a:srgbClr val="000000"/>
+                </a:solidFill>
+                <a:effectLst/>
+                <a:latin typeface="Consolas" panose="020B0609020204030204" pitchFamily="49" charset="0"/>
+                <a:cs typeface="Consolas" panose="020B0609020204030204" pitchFamily="49" charset="0"/>
+              </a:rPr>
+              <a:t>?</a:t>
+            </a:r>
+            <a:r>
+              <a:rPr lang="en-US" sz="2200" b="0" dirty="0">
+                <a:solidFill>
+                  <a:srgbClr val="3B3B3B"/>
+                </a:solidFill>
+                <a:effectLst/>
+                <a:latin typeface="Consolas" panose="020B0609020204030204" pitchFamily="49" charset="0"/>
+                <a:cs typeface="Consolas" panose="020B0609020204030204" pitchFamily="49" charset="0"/>
+              </a:rPr>
+              <a:t> </a:t>
+            </a:r>
+            <a:r>
+              <a:rPr lang="en-US" sz="2200" dirty="0">
+                <a:solidFill>
+                  <a:srgbClr val="098658"/>
+                </a:solidFill>
+                <a:latin typeface="Consolas" panose="020B0609020204030204" pitchFamily="49" charset="0"/>
+                <a:cs typeface="Consolas" panose="020B0609020204030204" pitchFamily="49" charset="0"/>
+              </a:rPr>
+              <a:t>1</a:t>
+            </a:r>
+            <a:r>
+              <a:rPr lang="en-US" sz="2200" b="0" dirty="0">
+                <a:solidFill>
+                  <a:srgbClr val="3B3B3B"/>
+                </a:solidFill>
+                <a:effectLst/>
+                <a:latin typeface="Consolas" panose="020B0609020204030204" pitchFamily="49" charset="0"/>
+                <a:cs typeface="Consolas" panose="020B0609020204030204" pitchFamily="49" charset="0"/>
+              </a:rPr>
+              <a:t> </a:t>
+            </a:r>
+            <a:r>
+              <a:rPr lang="en-US" sz="2200" b="0" dirty="0">
+                <a:solidFill>
+                  <a:srgbClr val="000000"/>
+                </a:solidFill>
+                <a:effectLst/>
+                <a:latin typeface="Consolas" panose="020B0609020204030204" pitchFamily="49" charset="0"/>
+                <a:cs typeface="Consolas" panose="020B0609020204030204" pitchFamily="49" charset="0"/>
+              </a:rPr>
+              <a:t>:</a:t>
+            </a:r>
+            <a:r>
+              <a:rPr lang="en-US" sz="2200" b="0" dirty="0">
+                <a:solidFill>
+                  <a:srgbClr val="3B3B3B"/>
+                </a:solidFill>
+                <a:effectLst/>
+                <a:latin typeface="Consolas" panose="020B0609020204030204" pitchFamily="49" charset="0"/>
+                <a:cs typeface="Consolas" panose="020B0609020204030204" pitchFamily="49" charset="0"/>
+              </a:rPr>
+              <a:t> </a:t>
+            </a:r>
+            <a:r>
+              <a:rPr lang="en-US" sz="2200" dirty="0">
+                <a:solidFill>
+                  <a:srgbClr val="098658"/>
+                </a:solidFill>
+                <a:latin typeface="Consolas" panose="020B0609020204030204" pitchFamily="49" charset="0"/>
+                <a:cs typeface="Consolas" panose="020B0609020204030204" pitchFamily="49" charset="0"/>
+              </a:rPr>
+              <a:t>2</a:t>
+            </a:r>
+            <a:r>
+              <a:rPr lang="en-US" sz="2200" b="0" dirty="0">
+                <a:solidFill>
+                  <a:srgbClr val="3B3B3B"/>
+                </a:solidFill>
+                <a:effectLst/>
+                <a:latin typeface="Consolas" panose="020B0609020204030204" pitchFamily="49" charset="0"/>
+                <a:cs typeface="Consolas" panose="020B0609020204030204" pitchFamily="49" charset="0"/>
+              </a:rPr>
+              <a:t>;</a:t>
+            </a:r>
+          </a:p>
+          <a:p>
+            <a:pPr>
+              <a:lnSpc>
+                <a:spcPct val="110000"/>
+              </a:lnSpc>
+            </a:pPr>
+            <a:r>
+              <a:rPr lang="en-US" sz="2200" dirty="0">
+                <a:solidFill>
+                  <a:schemeClr val="bg2">
+                    <a:lumMod val="90000"/>
+                  </a:schemeClr>
+                </a:solidFill>
+                <a:latin typeface="Consolas" panose="020B0609020204030204" pitchFamily="49" charset="0"/>
+                <a:cs typeface="Consolas" panose="020B0609020204030204" pitchFamily="49" charset="0"/>
+              </a:rPr>
+              <a:t>7|   </a:t>
+            </a:r>
+            <a:r>
+              <a:rPr lang="en-US" sz="2200" b="0" dirty="0">
+                <a:solidFill>
+                  <a:srgbClr val="AF00DB"/>
+                </a:solidFill>
+                <a:effectLst/>
+                <a:latin typeface="Consolas" panose="020B0609020204030204" pitchFamily="49" charset="0"/>
+                <a:cs typeface="Consolas" panose="020B0609020204030204" pitchFamily="49" charset="0"/>
+              </a:rPr>
+              <a:t>return</a:t>
+            </a:r>
+            <a:r>
+              <a:rPr lang="en-US" sz="2200" b="0" dirty="0">
+                <a:solidFill>
+                  <a:srgbClr val="3B3B3B"/>
+                </a:solidFill>
+                <a:effectLst/>
+                <a:latin typeface="Consolas" panose="020B0609020204030204" pitchFamily="49" charset="0"/>
+                <a:cs typeface="Consolas" panose="020B0609020204030204" pitchFamily="49" charset="0"/>
+              </a:rPr>
+              <a:t> </a:t>
+            </a:r>
+            <a:r>
+              <a:rPr lang="en-US" sz="2200" b="0" dirty="0">
+                <a:solidFill>
+                  <a:srgbClr val="0070C1"/>
+                </a:solidFill>
+                <a:effectLst/>
+                <a:latin typeface="Consolas" panose="020B0609020204030204" pitchFamily="49" charset="0"/>
+                <a:cs typeface="Consolas" panose="020B0609020204030204" pitchFamily="49" charset="0"/>
+              </a:rPr>
+              <a:t>x</a:t>
+            </a:r>
+            <a:r>
+              <a:rPr lang="en-US" sz="2200" b="0" dirty="0">
+                <a:solidFill>
+                  <a:srgbClr val="3B3B3B"/>
+                </a:solidFill>
+                <a:effectLst/>
+                <a:latin typeface="Consolas" panose="020B0609020204030204" pitchFamily="49" charset="0"/>
+                <a:cs typeface="Consolas" panose="020B0609020204030204" pitchFamily="49" charset="0"/>
+              </a:rPr>
+              <a:t> </a:t>
+            </a:r>
+            <a:r>
+              <a:rPr lang="en-US" sz="2200" b="0" dirty="0">
+                <a:solidFill>
+                  <a:srgbClr val="000000"/>
+                </a:solidFill>
+                <a:effectLst/>
+                <a:latin typeface="Consolas" panose="020B0609020204030204" pitchFamily="49" charset="0"/>
+                <a:cs typeface="Consolas" panose="020B0609020204030204" pitchFamily="49" charset="0"/>
+              </a:rPr>
+              <a:t>/</a:t>
+            </a:r>
+            <a:r>
+              <a:rPr lang="en-US" sz="2200" b="0" dirty="0">
+                <a:solidFill>
+                  <a:srgbClr val="3B3B3B"/>
+                </a:solidFill>
+                <a:effectLst/>
+                <a:latin typeface="Consolas" panose="020B0609020204030204" pitchFamily="49" charset="0"/>
+                <a:cs typeface="Consolas" panose="020B0609020204030204" pitchFamily="49" charset="0"/>
+              </a:rPr>
+              <a:t> (</a:t>
+            </a:r>
+            <a:r>
+              <a:rPr lang="en-US" sz="2200" b="0" dirty="0">
+                <a:solidFill>
+                  <a:srgbClr val="0070C1"/>
+                </a:solidFill>
+                <a:effectLst/>
+                <a:latin typeface="Consolas" panose="020B0609020204030204" pitchFamily="49" charset="0"/>
+                <a:cs typeface="Consolas" panose="020B0609020204030204" pitchFamily="49" charset="0"/>
+              </a:rPr>
+              <a:t>y</a:t>
+            </a:r>
+            <a:r>
+              <a:rPr lang="en-US" sz="2200" b="0" dirty="0">
+                <a:solidFill>
+                  <a:srgbClr val="3B3B3B"/>
+                </a:solidFill>
+                <a:effectLst/>
+                <a:latin typeface="Consolas" panose="020B0609020204030204" pitchFamily="49" charset="0"/>
+                <a:cs typeface="Consolas" panose="020B0609020204030204" pitchFamily="49" charset="0"/>
+              </a:rPr>
+              <a:t> </a:t>
+            </a:r>
+            <a:r>
+              <a:rPr lang="en-US" sz="2200" b="0" dirty="0">
+                <a:solidFill>
+                  <a:srgbClr val="000000"/>
+                </a:solidFill>
+                <a:effectLst/>
+                <a:latin typeface="Consolas" panose="020B0609020204030204" pitchFamily="49" charset="0"/>
+                <a:cs typeface="Consolas" panose="020B0609020204030204" pitchFamily="49" charset="0"/>
+              </a:rPr>
+              <a:t>-</a:t>
+            </a:r>
+            <a:r>
+              <a:rPr lang="en-US" sz="2200" b="0" dirty="0">
+                <a:solidFill>
+                  <a:srgbClr val="3B3B3B"/>
+                </a:solidFill>
+                <a:effectLst/>
+                <a:latin typeface="Consolas" panose="020B0609020204030204" pitchFamily="49" charset="0"/>
+                <a:cs typeface="Consolas" panose="020B0609020204030204" pitchFamily="49" charset="0"/>
+              </a:rPr>
+              <a:t> </a:t>
+            </a:r>
+            <a:r>
+              <a:rPr lang="en-US" sz="2200" b="0" dirty="0">
+                <a:solidFill>
+                  <a:srgbClr val="0070C1"/>
+                </a:solidFill>
+                <a:effectLst/>
+                <a:latin typeface="Consolas" panose="020B0609020204030204" pitchFamily="49" charset="0"/>
+                <a:cs typeface="Consolas" panose="020B0609020204030204" pitchFamily="49" charset="0"/>
+              </a:rPr>
+              <a:t>z</a:t>
+            </a:r>
+            <a:r>
+              <a:rPr lang="en-US" sz="2200" b="0" dirty="0">
+                <a:solidFill>
+                  <a:srgbClr val="3B3B3B"/>
+                </a:solidFill>
+                <a:effectLst/>
+                <a:latin typeface="Consolas" panose="020B0609020204030204" pitchFamily="49" charset="0"/>
+                <a:cs typeface="Consolas" panose="020B0609020204030204" pitchFamily="49" charset="0"/>
+              </a:rPr>
+              <a:t>);</a:t>
+            </a:r>
+          </a:p>
+          <a:p>
+            <a:pPr>
+              <a:lnSpc>
+                <a:spcPct val="110000"/>
+              </a:lnSpc>
+            </a:pPr>
+            <a:r>
+              <a:rPr lang="en-US" sz="2200" dirty="0">
+                <a:solidFill>
+                  <a:schemeClr val="bg2">
+                    <a:lumMod val="90000"/>
+                  </a:schemeClr>
+                </a:solidFill>
+                <a:latin typeface="Consolas" panose="020B0609020204030204" pitchFamily="49" charset="0"/>
+                <a:cs typeface="Consolas" panose="020B0609020204030204" pitchFamily="49" charset="0"/>
+              </a:rPr>
+              <a:t>8| </a:t>
+            </a:r>
+            <a:r>
+              <a:rPr lang="en-US" sz="2200" dirty="0">
+                <a:solidFill>
+                  <a:srgbClr val="3B3B3B"/>
+                </a:solidFill>
+                <a:latin typeface="Consolas" panose="020B0609020204030204" pitchFamily="49" charset="0"/>
+                <a:cs typeface="Consolas" panose="020B0609020204030204" pitchFamily="49" charset="0"/>
+              </a:rPr>
+              <a:t>}</a:t>
             </a:r>
           </a:p>
         </p:txBody>
@@ -17806,7 +17834,7 @@
     </p:spTree>
     <p:extLst>
       <p:ext uri="{BB962C8B-B14F-4D97-AF65-F5344CB8AC3E}">
-        <p14:creationId xmlns:p14="http://schemas.microsoft.com/office/powerpoint/2010/main" val="578407451"/>
+        <p14:creationId xmlns:p14="http://schemas.microsoft.com/office/powerpoint/2010/main" val="4237173428"/>
       </p:ext>
     </p:extLst>
   </p:cSld>
@@ -17816,7 +17844,7 @@
 </p:sld>
 </file>
 
-<file path=ppt/slides/slide20.xml><?xml version="1.0" encoding="utf-8"?>
+<file path=ppt/slides/slide21.xml><?xml version="1.0" encoding="utf-8"?>
 <p:sld xmlns:a="http://schemas.openxmlformats.org/drawingml/2006/main" xmlns:r="http://schemas.openxmlformats.org/officeDocument/2006/relationships" xmlns:p="http://schemas.openxmlformats.org/presentationml/2006/main">
   <p:cSld>
     <p:spTree>
@@ -17901,7 +17929,7 @@
             <a:fld id="{20F37917-FD3A-4669-9018-DA04BCDD3D75}" type="slidenum">
               <a:rPr lang="en-US" smtClean="0"/>
               <a:pPr/>
-              <a:t>20</a:t>
+              <a:t>21</a:t>
             </a:fld>
             <a:endParaRPr lang="en-US"/>
           </a:p>
@@ -18954,7 +18982,7 @@
 </p:sld>
 </file>
 
-<file path=ppt/slides/slide21.xml><?xml version="1.0" encoding="utf-8"?>
+<file path=ppt/slides/slide22.xml><?xml version="1.0" encoding="utf-8"?>
 <p:sld xmlns:a="http://schemas.openxmlformats.org/drawingml/2006/main" xmlns:r="http://schemas.openxmlformats.org/officeDocument/2006/relationships" xmlns:p="http://schemas.openxmlformats.org/presentationml/2006/main">
   <p:cSld>
     <p:spTree>
@@ -19039,7 +19067,7 @@
             <a:fld id="{20F37917-FD3A-4669-9018-DA04BCDD3D75}" type="slidenum">
               <a:rPr lang="en-US" smtClean="0"/>
               <a:pPr/>
-              <a:t>21</a:t>
+              <a:t>22</a:t>
             </a:fld>
             <a:endParaRPr lang="en-US"/>
           </a:p>
@@ -20104,7 +20132,7 @@
 </p:sld>
 </file>
 
-<file path=ppt/slides/slide22.xml><?xml version="1.0" encoding="utf-8"?>
+<file path=ppt/slides/slide23.xml><?xml version="1.0" encoding="utf-8"?>
 <p:sld xmlns:a="http://schemas.openxmlformats.org/drawingml/2006/main" xmlns:r="http://schemas.openxmlformats.org/officeDocument/2006/relationships" xmlns:p="http://schemas.openxmlformats.org/presentationml/2006/main">
   <p:cSld>
     <p:spTree>
@@ -20203,7 +20231,7 @@
           <a:p>
             <a:fld id="{20F37917-FD3A-4669-9018-DA04BCDD3D75}" type="slidenum">
               <a:rPr lang="en-US" smtClean="0"/>
-              <a:t>22</a:t>
+              <a:t>23</a:t>
             </a:fld>
             <a:endParaRPr lang="en-US"/>
           </a:p>
@@ -20937,7 +20965,7 @@
 </p:sld>
 </file>
 
-<file path=ppt/slides/slide23.xml><?xml version="1.0" encoding="utf-8"?>
+<file path=ppt/slides/slide24.xml><?xml version="1.0" encoding="utf-8"?>
 <p:sld xmlns:a="http://schemas.openxmlformats.org/drawingml/2006/main" xmlns:r="http://schemas.openxmlformats.org/officeDocument/2006/relationships" xmlns:p="http://schemas.openxmlformats.org/presentationml/2006/main">
   <p:cSld>
     <p:spTree>
@@ -21042,7 +21070,7 @@
           <a:p>
             <a:fld id="{20F37917-FD3A-4669-9018-DA04BCDD3D75}" type="slidenum">
               <a:rPr lang="en-US" smtClean="0"/>
-              <a:t>23</a:t>
+              <a:t>24</a:t>
             </a:fld>
             <a:endParaRPr lang="en-US"/>
           </a:p>
@@ -22206,7 +22234,7 @@
 </p:sld>
 </file>
 
-<file path=ppt/slides/slide24.xml><?xml version="1.0" encoding="utf-8"?>
+<file path=ppt/slides/slide25.xml><?xml version="1.0" encoding="utf-8"?>
 <p:sld xmlns:a="http://schemas.openxmlformats.org/drawingml/2006/main" xmlns:r="http://schemas.openxmlformats.org/officeDocument/2006/relationships" xmlns:p="http://schemas.openxmlformats.org/presentationml/2006/main">
   <p:cSld>
     <p:spTree>
@@ -22356,7 +22384,7 @@
           <a:p>
             <a:fld id="{20F37917-FD3A-4669-9018-DA04BCDD3D75}" type="slidenum">
               <a:rPr lang="en-US" smtClean="0"/>
-              <a:t>24</a:t>
+              <a:t>25</a:t>
             </a:fld>
             <a:endParaRPr lang="en-US"/>
           </a:p>
@@ -22375,7 +22403,7 @@
 </p:sld>
 </file>
 
-<file path=ppt/slides/slide25.xml><?xml version="1.0" encoding="utf-8"?>
+<file path=ppt/slides/slide26.xml><?xml version="1.0" encoding="utf-8"?>
 <p:sld xmlns:a="http://schemas.openxmlformats.org/drawingml/2006/main" xmlns:r="http://schemas.openxmlformats.org/officeDocument/2006/relationships" xmlns:p="http://schemas.openxmlformats.org/presentationml/2006/main">
   <p:cSld>
     <p:spTree>
@@ -22497,7 +22525,7 @@
           <a:p>
             <a:fld id="{20F37917-FD3A-4669-9018-DA04BCDD3D75}" type="slidenum">
               <a:rPr lang="en-US" smtClean="0"/>
-              <a:t>25</a:t>
+              <a:t>26</a:t>
             </a:fld>
             <a:endParaRPr lang="en-US"/>
           </a:p>
@@ -22719,7 +22747,7 @@
 </p:sld>
 </file>
 
-<file path=ppt/slides/slide26.xml><?xml version="1.0" encoding="utf-8"?>
+<file path=ppt/slides/slide27.xml><?xml version="1.0" encoding="utf-8"?>
 <p:sld xmlns:a="http://schemas.openxmlformats.org/drawingml/2006/main" xmlns:r="http://schemas.openxmlformats.org/officeDocument/2006/relationships" xmlns:p="http://schemas.openxmlformats.org/presentationml/2006/main">
   <p:cSld>
     <p:spTree>
@@ -22870,7 +22898,7 @@
           <a:p>
             <a:fld id="{20F37917-FD3A-4669-9018-DA04BCDD3D75}" type="slidenum">
               <a:rPr lang="en-US" smtClean="0"/>
-              <a:t>26</a:t>
+              <a:t>27</a:t>
             </a:fld>
             <a:endParaRPr lang="en-US"/>
           </a:p>
@@ -22889,7 +22917,7 @@
 </p:sld>
 </file>
 
-<file path=ppt/slides/slide27.xml><?xml version="1.0" encoding="utf-8"?>
+<file path=ppt/slides/slide28.xml><?xml version="1.0" encoding="utf-8"?>
 <p:sld xmlns:a="http://schemas.openxmlformats.org/drawingml/2006/main" xmlns:r="http://schemas.openxmlformats.org/officeDocument/2006/relationships" xmlns:p="http://schemas.openxmlformats.org/presentationml/2006/main">
   <p:cSld>
     <p:spTree>
@@ -23016,7 +23044,7 @@
           <a:p>
             <a:fld id="{20F37917-FD3A-4669-9018-DA04BCDD3D75}" type="slidenum">
               <a:rPr lang="en-US" smtClean="0"/>
-              <a:t>27</a:t>
+              <a:t>28</a:t>
             </a:fld>
             <a:endParaRPr lang="en-US"/>
           </a:p>
@@ -23035,7 +23063,7 @@
 </p:sld>
 </file>
 
-<file path=ppt/slides/slide28.xml><?xml version="1.0" encoding="utf-8"?>
+<file path=ppt/slides/slide29.xml><?xml version="1.0" encoding="utf-8"?>
 <p:sld xmlns:a="http://schemas.openxmlformats.org/drawingml/2006/main" xmlns:r="http://schemas.openxmlformats.org/officeDocument/2006/relationships" xmlns:p="http://schemas.openxmlformats.org/presentationml/2006/main">
   <p:cSld>
     <p:spTree>
@@ -23134,7 +23162,7 @@
           <a:p>
             <a:fld id="{20F37917-FD3A-4669-9018-DA04BCDD3D75}" type="slidenum">
               <a:rPr lang="en-US" smtClean="0"/>
-              <a:t>28</a:t>
+              <a:t>29</a:t>
             </a:fld>
             <a:endParaRPr lang="en-US"/>
           </a:p>
@@ -23153,7 +23181,134 @@
 </p:sld>
 </file>
 
-<file path=ppt/slides/slide29.xml><?xml version="1.0" encoding="utf-8"?>
+<file path=ppt/slides/slide3.xml><?xml version="1.0" encoding="utf-8"?>
+<p:sld xmlns:a="http://schemas.openxmlformats.org/drawingml/2006/main" xmlns:r="http://schemas.openxmlformats.org/officeDocument/2006/relationships" xmlns:p="http://schemas.openxmlformats.org/presentationml/2006/main">
+  <p:cSld>
+    <p:spTree>
+      <p:nvGrpSpPr>
+        <p:cNvPr id="1" name=""/>
+        <p:cNvGrpSpPr/>
+        <p:nvPr/>
+      </p:nvGrpSpPr>
+      <p:grpSpPr>
+        <a:xfrm>
+          <a:off x="0" y="0"/>
+          <a:ext cx="0" cy="0"/>
+          <a:chOff x="0" y="0"/>
+          <a:chExt cx="0" cy="0"/>
+        </a:xfrm>
+      </p:grpSpPr>
+      <p:sp>
+        <p:nvSpPr>
+          <p:cNvPr id="2" name="Title 1">
+            <a:extLst>
+              <a:ext uri="{FF2B5EF4-FFF2-40B4-BE49-F238E27FC236}">
+                <a16:creationId xmlns:a16="http://schemas.microsoft.com/office/drawing/2014/main" id="{E0F6BE06-E7A1-310E-E500-E63DFAD176C6}"/>
+              </a:ext>
+            </a:extLst>
+          </p:cNvPr>
+          <p:cNvSpPr>
+            <a:spLocks noGrp="1"/>
+          </p:cNvSpPr>
+          <p:nvPr>
+            <p:ph type="title"/>
+          </p:nvPr>
+        </p:nvSpPr>
+        <p:spPr/>
+        <p:txBody>
+          <a:bodyPr/>
+          <a:lstStyle/>
+          <a:p>
+            <a:r>
+              <a:rPr lang="en-US" dirty="0"/>
+              <a:t>When have we written enough tests?</a:t>
+            </a:r>
+          </a:p>
+        </p:txBody>
+      </p:sp>
+      <p:sp>
+        <p:nvSpPr>
+          <p:cNvPr id="3" name="Content Placeholder 2">
+            <a:extLst>
+              <a:ext uri="{FF2B5EF4-FFF2-40B4-BE49-F238E27FC236}">
+                <a16:creationId xmlns:a16="http://schemas.microsoft.com/office/drawing/2014/main" id="{D5B33EF4-B109-7CF2-B4C0-2A72F88FD737}"/>
+              </a:ext>
+            </a:extLst>
+          </p:cNvPr>
+          <p:cNvSpPr>
+            <a:spLocks noGrp="1"/>
+          </p:cNvSpPr>
+          <p:nvPr>
+            <p:ph idx="1"/>
+          </p:nvPr>
+        </p:nvSpPr>
+        <p:spPr/>
+        <p:txBody>
+          <a:bodyPr/>
+          <a:lstStyle/>
+          <a:p>
+            <a:r>
+              <a:rPr lang="en-US" dirty="0"/>
+              <a:t>When we've tested each component with enough inputs?</a:t>
+            </a:r>
+          </a:p>
+          <a:p>
+            <a:r>
+              <a:rPr lang="en-US" dirty="0"/>
+              <a:t>When we've tested enough of our code?</a:t>
+            </a:r>
+          </a:p>
+          <a:p>
+            <a:r>
+              <a:rPr lang="en-US" dirty="0"/>
+              <a:t>When our tests are precise enough to detect likely bugs?</a:t>
+            </a:r>
+          </a:p>
+        </p:txBody>
+      </p:sp>
+      <p:sp>
+        <p:nvSpPr>
+          <p:cNvPr id="4" name="Slide Number Placeholder 3">
+            <a:extLst>
+              <a:ext uri="{FF2B5EF4-FFF2-40B4-BE49-F238E27FC236}">
+                <a16:creationId xmlns:a16="http://schemas.microsoft.com/office/drawing/2014/main" id="{E8E4E1C4-8272-0715-724D-5DFD08706E26}"/>
+              </a:ext>
+            </a:extLst>
+          </p:cNvPr>
+          <p:cNvSpPr>
+            <a:spLocks noGrp="1"/>
+          </p:cNvSpPr>
+          <p:nvPr>
+            <p:ph type="sldNum" sz="quarter" idx="12"/>
+          </p:nvPr>
+        </p:nvSpPr>
+        <p:spPr/>
+        <p:txBody>
+          <a:bodyPr/>
+          <a:lstStyle/>
+          <a:p>
+            <a:fld id="{20F37917-FD3A-4669-9018-DA04BCDD3D75}" type="slidenum">
+              <a:rPr lang="en-US" smtClean="0"/>
+              <a:t>3</a:t>
+            </a:fld>
+            <a:endParaRPr lang="en-US"/>
+          </a:p>
+        </p:txBody>
+      </p:sp>
+    </p:spTree>
+    <p:extLst>
+      <p:ext uri="{BB962C8B-B14F-4D97-AF65-F5344CB8AC3E}">
+        <p14:creationId xmlns:p14="http://schemas.microsoft.com/office/powerpoint/2010/main" val="4211547200"/>
+      </p:ext>
+    </p:extLst>
+  </p:cSld>
+  <p:clrMapOvr>
+    <a:masterClrMapping/>
+  </p:clrMapOvr>
+</p:sld>
+</file>
+
+<file path=ppt/slides/slide30.xml><?xml version="1.0" encoding="utf-8"?>
 <p:sld xmlns:a="http://schemas.openxmlformats.org/drawingml/2006/main" xmlns:r="http://schemas.openxmlformats.org/officeDocument/2006/relationships" xmlns:p="http://schemas.openxmlformats.org/presentationml/2006/main">
   <p:cSld>
     <p:spTree>
@@ -23292,7 +23447,7 @@
           <a:p>
             <a:fld id="{20F37917-FD3A-4669-9018-DA04BCDD3D75}" type="slidenum">
               <a:rPr lang="en-US" smtClean="0"/>
-              <a:t>29</a:t>
+              <a:t>30</a:t>
             </a:fld>
             <a:endParaRPr lang="en-US"/>
           </a:p>
@@ -23311,182 +23466,7 @@
 </p:sld>
 </file>
 
-<file path=ppt/slides/slide3.xml><?xml version="1.0" encoding="utf-8"?>
-<p:sld xmlns:a="http://schemas.openxmlformats.org/drawingml/2006/main" xmlns:r="http://schemas.openxmlformats.org/officeDocument/2006/relationships" xmlns:p="http://schemas.openxmlformats.org/presentationml/2006/main">
-  <p:cSld>
-    <p:spTree>
-      <p:nvGrpSpPr>
-        <p:cNvPr id="1" name="">
-          <a:extLst>
-            <a:ext uri="{FF2B5EF4-FFF2-40B4-BE49-F238E27FC236}">
-              <a16:creationId xmlns:a16="http://schemas.microsoft.com/office/drawing/2014/main" id="{C61BD440-603A-05C3-E8C1-2E3F5E2563AB}"/>
-            </a:ext>
-          </a:extLst>
-        </p:cNvPr>
-        <p:cNvGrpSpPr/>
-        <p:nvPr/>
-      </p:nvGrpSpPr>
-      <p:grpSpPr>
-        <a:xfrm>
-          <a:off x="0" y="0"/>
-          <a:ext cx="0" cy="0"/>
-          <a:chOff x="0" y="0"/>
-          <a:chExt cx="0" cy="0"/>
-        </a:xfrm>
-      </p:grpSpPr>
-      <p:sp>
-        <p:nvSpPr>
-          <p:cNvPr id="2" name="Title 1">
-            <a:extLst>
-              <a:ext uri="{FF2B5EF4-FFF2-40B4-BE49-F238E27FC236}">
-                <a16:creationId xmlns:a16="http://schemas.microsoft.com/office/drawing/2014/main" id="{BC3C517A-72F6-65B5-FBC6-9D0BE0002A3D}"/>
-              </a:ext>
-            </a:extLst>
-          </p:cNvPr>
-          <p:cNvSpPr>
-            <a:spLocks noGrp="1"/>
-          </p:cNvSpPr>
-          <p:nvPr>
-            <p:ph type="title"/>
-          </p:nvPr>
-        </p:nvSpPr>
-        <p:spPr>
-          <a:xfrm>
-            <a:off x="838200" y="18255"/>
-            <a:ext cx="10515600" cy="1325563"/>
-          </a:xfrm>
-        </p:spPr>
-        <p:txBody>
-          <a:bodyPr>
-            <a:normAutofit/>
-          </a:bodyPr>
-          <a:lstStyle/>
-          <a:p>
-            <a:r>
-              <a:rPr lang="en-US" dirty="0"/>
-              <a:t>Unit tests vs. Integration tests</a:t>
-            </a:r>
-          </a:p>
-        </p:txBody>
-      </p:sp>
-      <p:sp>
-        <p:nvSpPr>
-          <p:cNvPr id="3" name="Content Placeholder 2">
-            <a:extLst>
-              <a:ext uri="{FF2B5EF4-FFF2-40B4-BE49-F238E27FC236}">
-                <a16:creationId xmlns:a16="http://schemas.microsoft.com/office/drawing/2014/main" id="{00CB2293-7E1F-6CC7-FB97-4AB32BB83276}"/>
-              </a:ext>
-            </a:extLst>
-          </p:cNvPr>
-          <p:cNvSpPr>
-            <a:spLocks noGrp="1"/>
-          </p:cNvSpPr>
-          <p:nvPr>
-            <p:ph idx="1"/>
-          </p:nvPr>
-        </p:nvSpPr>
-        <p:spPr>
-          <a:xfrm>
-            <a:off x="838199" y="1500188"/>
-            <a:ext cx="10906126" cy="4351337"/>
-          </a:xfrm>
-        </p:spPr>
-        <p:txBody>
-          <a:bodyPr/>
-          <a:lstStyle/>
-          <a:p>
-            <a:r>
-              <a:rPr lang="en-US" b="1" dirty="0"/>
-              <a:t>Unit Tests: </a:t>
-            </a:r>
-            <a:r>
-              <a:rPr lang="en-US" dirty="0"/>
-              <a:t>testing a single function in isolation</a:t>
-            </a:r>
-          </a:p>
-          <a:p>
-            <a:pPr lvl="1"/>
-            <a:r>
-              <a:rPr lang="en-US" dirty="0"/>
-              <a:t>Unit testing only needs to give a function tests that respect the functions preconditions: no need to test -3 or 1.4</a:t>
-            </a:r>
-          </a:p>
-          <a:p>
-            <a:r>
-              <a:rPr lang="en-US" b="1" dirty="0"/>
-              <a:t>Integration Tests: </a:t>
-            </a:r>
-            <a:r>
-              <a:rPr lang="en-US" dirty="0"/>
-              <a:t>testing more than a single unit</a:t>
-            </a:r>
-          </a:p>
-          <a:p>
-            <a:pPr lvl="1"/>
-            <a:r>
-              <a:rPr lang="en-US" dirty="0"/>
-              <a:t> test how parts of a program work together: that’s where we ensure </a:t>
-            </a:r>
-            <a:r>
-              <a:rPr lang="en-US" i="1" dirty="0"/>
-              <a:t>other </a:t>
-            </a:r>
-            <a:r>
-              <a:rPr lang="en-US" dirty="0"/>
-              <a:t>functions respect our function’s contracts.</a:t>
-            </a:r>
-          </a:p>
-        </p:txBody>
-      </p:sp>
-      <p:sp>
-        <p:nvSpPr>
-          <p:cNvPr id="4" name="Slide Number Placeholder 3">
-            <a:extLst>
-              <a:ext uri="{FF2B5EF4-FFF2-40B4-BE49-F238E27FC236}">
-                <a16:creationId xmlns:a16="http://schemas.microsoft.com/office/drawing/2014/main" id="{0486A18B-CA70-9E6F-27B7-5820FA9E11C8}"/>
-              </a:ext>
-            </a:extLst>
-          </p:cNvPr>
-          <p:cNvSpPr>
-            <a:spLocks noGrp="1"/>
-          </p:cNvSpPr>
-          <p:nvPr>
-            <p:ph type="sldNum" sz="quarter" idx="12"/>
-          </p:nvPr>
-        </p:nvSpPr>
-        <p:spPr>
-          <a:xfrm>
-            <a:off x="8610600" y="6356350"/>
-            <a:ext cx="2743200" cy="365125"/>
-          </a:xfrm>
-        </p:spPr>
-        <p:txBody>
-          <a:bodyPr/>
-          <a:lstStyle/>
-          <a:p>
-            <a:fld id="{20F37917-FD3A-4669-9018-DA04BCDD3D75}" type="slidenum">
-              <a:rPr lang="en-US" smtClean="0"/>
-              <a:pPr/>
-              <a:t>3</a:t>
-            </a:fld>
-            <a:endParaRPr lang="en-US"/>
-          </a:p>
-        </p:txBody>
-      </p:sp>
-    </p:spTree>
-    <p:extLst>
-      <p:ext uri="{BB962C8B-B14F-4D97-AF65-F5344CB8AC3E}">
-        <p14:creationId xmlns:p14="http://schemas.microsoft.com/office/powerpoint/2010/main" val="2526771949"/>
-      </p:ext>
-    </p:extLst>
-  </p:cSld>
-  <p:clrMapOvr>
-    <a:masterClrMapping/>
-  </p:clrMapOvr>
-</p:sld>
-</file>
-
-<file path=ppt/slides/slide30.xml><?xml version="1.0" encoding="utf-8"?>
+<file path=ppt/slides/slide31.xml><?xml version="1.0" encoding="utf-8"?>
 <p:sld xmlns:a="http://schemas.openxmlformats.org/drawingml/2006/main" xmlns:r="http://schemas.openxmlformats.org/officeDocument/2006/relationships" xmlns:p="http://schemas.openxmlformats.org/presentationml/2006/main">
   <p:cSld>
     <p:spTree>
@@ -23588,7 +23568,7 @@
           <a:p>
             <a:fld id="{20F37917-FD3A-4669-9018-DA04BCDD3D75}" type="slidenum">
               <a:rPr lang="en-US" smtClean="0"/>
-              <a:t>30</a:t>
+              <a:t>31</a:t>
             </a:fld>
             <a:endParaRPr lang="en-US"/>
           </a:p>
@@ -23607,7 +23587,7 @@
 </p:sld>
 </file>
 
-<file path=ppt/slides/slide31.xml><?xml version="1.0" encoding="utf-8"?>
+<file path=ppt/slides/slide32.xml><?xml version="1.0" encoding="utf-8"?>
 <p:sld xmlns:a="http://schemas.openxmlformats.org/drawingml/2006/main" xmlns:r="http://schemas.openxmlformats.org/officeDocument/2006/relationships" xmlns:p="http://schemas.openxmlformats.org/presentationml/2006/main">
   <p:cSld>
     <p:spTree>
@@ -23667,7 +23647,7 @@
           </a:ln>
           <a:extLst>
             <a:ext uri="{C572A759-6A51-4108-AA02-DFA0A04FC94B}">
-              <ma14:wrappingTextBoxFlag xmlns="" xmlns:m="http://schemas.openxmlformats.org/officeDocument/2006/math" xmlns:a14="http://schemas.microsoft.com/office/drawing/2010/main" xmlns:ma14="http://schemas.microsoft.com/office/mac/drawingml/2011/main" val="1"/>
+              <ma14:wrappingTextBoxFlag xmlns:ma14="http://schemas.microsoft.com/office/mac/drawingml/2011/main" xmlns:a14="http://schemas.microsoft.com/office/drawing/2010/main" xmlns:m="http://schemas.openxmlformats.org/officeDocument/2006/math" xmlns="" val="1"/>
             </a:ext>
           </a:extLst>
         </p:spPr>
@@ -23977,7 +23957,7 @@
             <a:fld id="{86CB4B4D-7CA3-9044-876B-883B54F8677D}" type="slidenum">
               <a:rPr lang="en-US" smtClean="0"/>
               <a:pPr/>
-              <a:t>31</a:t>
+              <a:t>32</a:t>
             </a:fld>
             <a:endParaRPr/>
           </a:p>
@@ -24005,7 +23985,7 @@
           </a:ln>
           <a:extLst>
             <a:ext uri="{C572A759-6A51-4108-AA02-DFA0A04FC94B}">
-              <ma14:wrappingTextBoxFlag xmlns="" xmlns:m="http://schemas.openxmlformats.org/officeDocument/2006/math" xmlns:a14="http://schemas.microsoft.com/office/drawing/2010/main" xmlns:ma14="http://schemas.microsoft.com/office/mac/drawingml/2011/main" val="1"/>
+              <ma14:wrappingTextBoxFlag xmlns:ma14="http://schemas.microsoft.com/office/mac/drawingml/2011/main" xmlns:a14="http://schemas.microsoft.com/office/drawing/2010/main" xmlns:m="http://schemas.openxmlformats.org/officeDocument/2006/math" xmlns="" val="1"/>
             </a:ext>
           </a:extLst>
         </p:spPr>
@@ -24430,7 +24410,7 @@
           </a:ln>
           <a:extLst>
             <a:ext uri="{C572A759-6A51-4108-AA02-DFA0A04FC94B}">
-              <ma14:wrappingTextBoxFlag xmlns="" xmlns:m="http://schemas.openxmlformats.org/officeDocument/2006/math" xmlns:a14="http://schemas.microsoft.com/office/drawing/2010/main" xmlns:ma14="http://schemas.microsoft.com/office/mac/drawingml/2011/main" val="1"/>
+              <ma14:wrappingTextBoxFlag xmlns:ma14="http://schemas.microsoft.com/office/mac/drawingml/2011/main" xmlns:a14="http://schemas.microsoft.com/office/drawing/2010/main" xmlns:m="http://schemas.openxmlformats.org/officeDocument/2006/math" xmlns="" val="1"/>
             </a:ext>
           </a:extLst>
         </p:spPr>
@@ -24467,7 +24447,7 @@
           </a:ln>
           <a:extLst>
             <a:ext uri="{C572A759-6A51-4108-AA02-DFA0A04FC94B}">
-              <ma14:wrappingTextBoxFlag xmlns="" xmlns:m="http://schemas.openxmlformats.org/officeDocument/2006/math" xmlns:a14="http://schemas.microsoft.com/office/drawing/2010/main" xmlns:ma14="http://schemas.microsoft.com/office/mac/drawingml/2011/main" val="1"/>
+              <ma14:wrappingTextBoxFlag xmlns:ma14="http://schemas.microsoft.com/office/mac/drawingml/2011/main" xmlns:a14="http://schemas.microsoft.com/office/drawing/2010/main" xmlns:m="http://schemas.openxmlformats.org/officeDocument/2006/math" xmlns="" val="1"/>
             </a:ext>
           </a:extLst>
         </p:spPr>
@@ -24530,7 +24510,7 @@
             </a:ln>
             <a:extLst>
               <a:ext uri="{C572A759-6A51-4108-AA02-DFA0A04FC94B}">
-                <ma14:wrappingTextBoxFlag xmlns="" xmlns:m="http://schemas.openxmlformats.org/officeDocument/2006/math" xmlns:a14="http://schemas.microsoft.com/office/drawing/2010/main" xmlns:ma14="http://schemas.microsoft.com/office/mac/drawingml/2011/main" val="1"/>
+                <ma14:wrappingTextBoxFlag xmlns:ma14="http://schemas.microsoft.com/office/mac/drawingml/2011/main" xmlns:a14="http://schemas.microsoft.com/office/drawing/2010/main" xmlns:m="http://schemas.openxmlformats.org/officeDocument/2006/math" xmlns="" val="1"/>
               </a:ext>
             </a:extLst>
           </p:spPr>
@@ -25039,7 +25019,7 @@
 </p:sld>
 </file>
 
-<file path=ppt/slides/slide32.xml><?xml version="1.0" encoding="utf-8"?>
+<file path=ppt/slides/slide33.xml><?xml version="1.0" encoding="utf-8"?>
 <p:sld xmlns:a="http://schemas.openxmlformats.org/drawingml/2006/main" xmlns:r="http://schemas.openxmlformats.org/officeDocument/2006/relationships" xmlns:p="http://schemas.openxmlformats.org/presentationml/2006/main">
   <p:cSld>
     <p:spTree>
@@ -25448,7 +25428,7 @@
               <a:pPr defTabSz="457200" hangingPunct="1">
                 <a:defRPr/>
               </a:pPr>
-              <a:t>32</a:t>
+              <a:t>33</a:t>
             </a:fld>
             <a:endParaRPr lang="en-US" sz="1200">
               <a:solidFill>
@@ -25474,7 +25454,7 @@
 </p:sld>
 </file>
 
-<file path=ppt/slides/slide33.xml><?xml version="1.0" encoding="utf-8"?>
+<file path=ppt/slides/slide34.xml><?xml version="1.0" encoding="utf-8"?>
 <p:sld xmlns:a="http://schemas.openxmlformats.org/drawingml/2006/main" xmlns:r="http://schemas.openxmlformats.org/officeDocument/2006/relationships" xmlns:p="http://schemas.openxmlformats.org/presentationml/2006/main">
   <p:cSld>
     <p:spTree>
@@ -26082,7 +26062,7 @@
 </p:sld>
 </file>
 
-<file path=ppt/slides/slide34.xml><?xml version="1.0" encoding="utf-8"?>
+<file path=ppt/slides/slide35.xml><?xml version="1.0" encoding="utf-8"?>
 <p:sld xmlns:a="http://schemas.openxmlformats.org/drawingml/2006/main" xmlns:r="http://schemas.openxmlformats.org/officeDocument/2006/relationships" xmlns:p="http://schemas.openxmlformats.org/presentationml/2006/main">
   <p:cSld>
     <p:spTree>
@@ -26933,7 +26913,7 @@
 </p:sld>
 </file>
 
-<file path=ppt/slides/slide35.xml><?xml version="1.0" encoding="utf-8"?>
+<file path=ppt/slides/slide36.xml><?xml version="1.0" encoding="utf-8"?>
 <p:sld xmlns:a="http://schemas.openxmlformats.org/drawingml/2006/main" xmlns:r="http://schemas.openxmlformats.org/officeDocument/2006/relationships" xmlns:p="http://schemas.openxmlformats.org/presentationml/2006/main">
   <p:cSld>
     <p:spTree>
@@ -27591,7 +27571,7 @@
 </p:sld>
 </file>
 
-<file path=ppt/slides/slide36.xml><?xml version="1.0" encoding="utf-8"?>
+<file path=ppt/slides/slide37.xml><?xml version="1.0" encoding="utf-8"?>
 <p:sld xmlns:a="http://schemas.openxmlformats.org/drawingml/2006/main" xmlns:r="http://schemas.openxmlformats.org/officeDocument/2006/relationships" xmlns:p="http://schemas.openxmlformats.org/presentationml/2006/main">
   <p:cSld>
     <p:spTree>
@@ -27939,7 +27919,7 @@
 </p:sld>
 </file>
 
-<file path=ppt/slides/slide37.xml><?xml version="1.0" encoding="utf-8"?>
+<file path=ppt/slides/slide38.xml><?xml version="1.0" encoding="utf-8"?>
 <p:sld xmlns:a="http://schemas.openxmlformats.org/drawingml/2006/main" xmlns:r="http://schemas.openxmlformats.org/officeDocument/2006/relationships" xmlns:p="http://schemas.openxmlformats.org/presentationml/2006/main">
   <p:cSld>
     <p:spTree>
@@ -28610,7 +28590,7 @@
 </p:sld>
 </file>
 
-<file path=ppt/slides/slide38.xml><?xml version="1.0" encoding="utf-8"?>
+<file path=ppt/slides/slide39.xml><?xml version="1.0" encoding="utf-8"?>
 <p:sld xmlns:a="http://schemas.openxmlformats.org/drawingml/2006/main" xmlns:r="http://schemas.openxmlformats.org/officeDocument/2006/relationships" xmlns:p="http://schemas.openxmlformats.org/presentationml/2006/main">
   <p:cSld>
     <p:spTree>
@@ -28937,7 +28917,182 @@
 </p:sld>
 </file>
 
-<file path=ppt/slides/slide39.xml><?xml version="1.0" encoding="utf-8"?>
+<file path=ppt/slides/slide4.xml><?xml version="1.0" encoding="utf-8"?>
+<p:sld xmlns:a="http://schemas.openxmlformats.org/drawingml/2006/main" xmlns:r="http://schemas.openxmlformats.org/officeDocument/2006/relationships" xmlns:p="http://schemas.openxmlformats.org/presentationml/2006/main">
+  <p:cSld>
+    <p:spTree>
+      <p:nvGrpSpPr>
+        <p:cNvPr id="1" name="">
+          <a:extLst>
+            <a:ext uri="{FF2B5EF4-FFF2-40B4-BE49-F238E27FC236}">
+              <a16:creationId xmlns:a16="http://schemas.microsoft.com/office/drawing/2014/main" id="{C61BD440-603A-05C3-E8C1-2E3F5E2563AB}"/>
+            </a:ext>
+          </a:extLst>
+        </p:cNvPr>
+        <p:cNvGrpSpPr/>
+        <p:nvPr/>
+      </p:nvGrpSpPr>
+      <p:grpSpPr>
+        <a:xfrm>
+          <a:off x="0" y="0"/>
+          <a:ext cx="0" cy="0"/>
+          <a:chOff x="0" y="0"/>
+          <a:chExt cx="0" cy="0"/>
+        </a:xfrm>
+      </p:grpSpPr>
+      <p:sp>
+        <p:nvSpPr>
+          <p:cNvPr id="2" name="Title 1">
+            <a:extLst>
+              <a:ext uri="{FF2B5EF4-FFF2-40B4-BE49-F238E27FC236}">
+                <a16:creationId xmlns:a16="http://schemas.microsoft.com/office/drawing/2014/main" id="{BC3C517A-72F6-65B5-FBC6-9D0BE0002A3D}"/>
+              </a:ext>
+            </a:extLst>
+          </p:cNvPr>
+          <p:cNvSpPr>
+            <a:spLocks noGrp="1"/>
+          </p:cNvSpPr>
+          <p:nvPr>
+            <p:ph type="title"/>
+          </p:nvPr>
+        </p:nvSpPr>
+        <p:spPr>
+          <a:xfrm>
+            <a:off x="838200" y="18255"/>
+            <a:ext cx="10515600" cy="1325563"/>
+          </a:xfrm>
+        </p:spPr>
+        <p:txBody>
+          <a:bodyPr>
+            <a:normAutofit/>
+          </a:bodyPr>
+          <a:lstStyle/>
+          <a:p>
+            <a:r>
+              <a:rPr lang="en-US" dirty="0"/>
+              <a:t>Unit tests vs. Integration tests</a:t>
+            </a:r>
+          </a:p>
+        </p:txBody>
+      </p:sp>
+      <p:sp>
+        <p:nvSpPr>
+          <p:cNvPr id="3" name="Content Placeholder 2">
+            <a:extLst>
+              <a:ext uri="{FF2B5EF4-FFF2-40B4-BE49-F238E27FC236}">
+                <a16:creationId xmlns:a16="http://schemas.microsoft.com/office/drawing/2014/main" id="{00CB2293-7E1F-6CC7-FB97-4AB32BB83276}"/>
+              </a:ext>
+            </a:extLst>
+          </p:cNvPr>
+          <p:cNvSpPr>
+            <a:spLocks noGrp="1"/>
+          </p:cNvSpPr>
+          <p:nvPr>
+            <p:ph idx="1"/>
+          </p:nvPr>
+        </p:nvSpPr>
+        <p:spPr>
+          <a:xfrm>
+            <a:off x="838199" y="1500188"/>
+            <a:ext cx="10906126" cy="4351337"/>
+          </a:xfrm>
+        </p:spPr>
+        <p:txBody>
+          <a:bodyPr/>
+          <a:lstStyle/>
+          <a:p>
+            <a:r>
+              <a:rPr lang="en-US" b="1" dirty="0"/>
+              <a:t>Unit Tests: </a:t>
+            </a:r>
+            <a:r>
+              <a:rPr lang="en-US" dirty="0"/>
+              <a:t>testing a single function in isolation</a:t>
+            </a:r>
+          </a:p>
+          <a:p>
+            <a:pPr lvl="1"/>
+            <a:r>
+              <a:rPr lang="en-US" dirty="0"/>
+              <a:t>Unit testing only needs to give a function tests that respect the functions preconditions: no need to test -3 or 1.4</a:t>
+            </a:r>
+          </a:p>
+          <a:p>
+            <a:r>
+              <a:rPr lang="en-US" b="1" dirty="0"/>
+              <a:t>Integration Tests: </a:t>
+            </a:r>
+            <a:r>
+              <a:rPr lang="en-US" dirty="0"/>
+              <a:t>testing more than a single unit</a:t>
+            </a:r>
+          </a:p>
+          <a:p>
+            <a:pPr lvl="1"/>
+            <a:r>
+              <a:rPr lang="en-US" dirty="0"/>
+              <a:t> test how parts of a program work together: that’s where we ensure </a:t>
+            </a:r>
+            <a:r>
+              <a:rPr lang="en-US" i="1" dirty="0"/>
+              <a:t>other </a:t>
+            </a:r>
+            <a:r>
+              <a:rPr lang="en-US" dirty="0"/>
+              <a:t>functions respect our function’s contracts.</a:t>
+            </a:r>
+          </a:p>
+        </p:txBody>
+      </p:sp>
+      <p:sp>
+        <p:nvSpPr>
+          <p:cNvPr id="4" name="Slide Number Placeholder 3">
+            <a:extLst>
+              <a:ext uri="{FF2B5EF4-FFF2-40B4-BE49-F238E27FC236}">
+                <a16:creationId xmlns:a16="http://schemas.microsoft.com/office/drawing/2014/main" id="{0486A18B-CA70-9E6F-27B7-5820FA9E11C8}"/>
+              </a:ext>
+            </a:extLst>
+          </p:cNvPr>
+          <p:cNvSpPr>
+            <a:spLocks noGrp="1"/>
+          </p:cNvSpPr>
+          <p:nvPr>
+            <p:ph type="sldNum" sz="quarter" idx="12"/>
+          </p:nvPr>
+        </p:nvSpPr>
+        <p:spPr>
+          <a:xfrm>
+            <a:off x="8610600" y="6356350"/>
+            <a:ext cx="2743200" cy="365125"/>
+          </a:xfrm>
+        </p:spPr>
+        <p:txBody>
+          <a:bodyPr/>
+          <a:lstStyle/>
+          <a:p>
+            <a:fld id="{20F37917-FD3A-4669-9018-DA04BCDD3D75}" type="slidenum">
+              <a:rPr lang="en-US" smtClean="0"/>
+              <a:pPr/>
+              <a:t>4</a:t>
+            </a:fld>
+            <a:endParaRPr lang="en-US"/>
+          </a:p>
+        </p:txBody>
+      </p:sp>
+    </p:spTree>
+    <p:extLst>
+      <p:ext uri="{BB962C8B-B14F-4D97-AF65-F5344CB8AC3E}">
+        <p14:creationId xmlns:p14="http://schemas.microsoft.com/office/powerpoint/2010/main" val="2526771949"/>
+      </p:ext>
+    </p:extLst>
+  </p:cSld>
+  <p:clrMapOvr>
+    <a:masterClrMapping/>
+  </p:clrMapOvr>
+</p:sld>
+</file>
+
+<file path=ppt/slides/slide40.xml><?xml version="1.0" encoding="utf-8"?>
 <p:sld xmlns:a="http://schemas.openxmlformats.org/drawingml/2006/main" xmlns:r="http://schemas.openxmlformats.org/officeDocument/2006/relationships" xmlns:p="http://schemas.openxmlformats.org/presentationml/2006/main">
   <p:cSld>
     <p:spTree>
@@ -29039,7 +29194,7 @@
           </a:ln>
           <a:extLst>
             <a:ext uri="{C572A759-6A51-4108-AA02-DFA0A04FC94B}">
-              <ma14:wrappingTextBoxFlag xmlns="" xmlns:m="http://schemas.openxmlformats.org/officeDocument/2006/math" xmlns:a14="http://schemas.microsoft.com/office/drawing/2010/main" xmlns:ma14="http://schemas.microsoft.com/office/mac/drawingml/2011/main" val="1"/>
+              <ma14:wrappingTextBoxFlag xmlns:ma14="http://schemas.microsoft.com/office/mac/drawingml/2011/main" xmlns:a14="http://schemas.microsoft.com/office/drawing/2010/main" xmlns:m="http://schemas.openxmlformats.org/officeDocument/2006/math" xmlns="" val="1"/>
             </a:ext>
           </a:extLst>
         </p:spPr>
@@ -29349,7 +29504,7 @@
             <a:fld id="{86CB4B4D-7CA3-9044-876B-883B54F8677D}" type="slidenum">
               <a:rPr lang="en-US" smtClean="0"/>
               <a:pPr/>
-              <a:t>39</a:t>
+              <a:t>40</a:t>
             </a:fld>
             <a:endParaRPr/>
           </a:p>
@@ -29404,7 +29559,7 @@
           </a:ln>
           <a:extLst>
             <a:ext uri="{C572A759-6A51-4108-AA02-DFA0A04FC94B}">
-              <ma14:wrappingTextBoxFlag xmlns="" xmlns:m="http://schemas.openxmlformats.org/officeDocument/2006/math" xmlns:a14="http://schemas.microsoft.com/office/drawing/2010/main" xmlns:ma14="http://schemas.microsoft.com/office/mac/drawingml/2011/main" val="1"/>
+              <ma14:wrappingTextBoxFlag xmlns:ma14="http://schemas.microsoft.com/office/mac/drawingml/2011/main" xmlns:a14="http://schemas.microsoft.com/office/drawing/2010/main" xmlns:m="http://schemas.openxmlformats.org/officeDocument/2006/math" xmlns="" val="1"/>
             </a:ext>
           </a:extLst>
         </p:spPr>
@@ -29429,543 +29584,7 @@
 </p:sld>
 </file>
 
-<file path=ppt/slides/slide4.xml><?xml version="1.0" encoding="utf-8"?>
-<p:sld xmlns:a="http://schemas.openxmlformats.org/drawingml/2006/main" xmlns:r="http://schemas.openxmlformats.org/officeDocument/2006/relationships" xmlns:p="http://schemas.openxmlformats.org/presentationml/2006/main">
-  <p:cSld>
-    <p:spTree>
-      <p:nvGrpSpPr>
-        <p:cNvPr id="1" name=""/>
-        <p:cNvGrpSpPr/>
-        <p:nvPr/>
-      </p:nvGrpSpPr>
-      <p:grpSpPr>
-        <a:xfrm>
-          <a:off x="0" y="0"/>
-          <a:ext cx="0" cy="0"/>
-          <a:chOff x="0" y="0"/>
-          <a:chExt cx="0" cy="0"/>
-        </a:xfrm>
-      </p:grpSpPr>
-      <p:sp>
-        <p:nvSpPr>
-          <p:cNvPr id="321" name="Title 1"/>
-          <p:cNvSpPr txBox="1">
-            <a:spLocks noGrp="1"/>
-          </p:cNvSpPr>
-          <p:nvPr>
-            <p:ph type="title"/>
-          </p:nvPr>
-        </p:nvSpPr>
-        <p:spPr>
-          <a:prstGeom prst="rect">
-            <a:avLst/>
-          </a:prstGeom>
-        </p:spPr>
-        <p:txBody>
-          <a:bodyPr/>
-          <a:lstStyle/>
-          <a:p>
-            <a:r>
-              <a:rPr lang="en-US" dirty="0"/>
-              <a:t>Why do we test? Because Tests </a:t>
-            </a:r>
-            <a:r>
-              <a:rPr lang="en-US" i="1" dirty="0"/>
-              <a:t>are</a:t>
-            </a:r>
-            <a:r>
-              <a:rPr lang="en-US" dirty="0"/>
-              <a:t> the specification (Beyonce rule)</a:t>
-            </a:r>
-            <a:endParaRPr dirty="0"/>
-          </a:p>
-        </p:txBody>
-      </p:sp>
-      <p:sp>
-        <p:nvSpPr>
-          <p:cNvPr id="322" name="Content Placeholder 5"/>
-          <p:cNvSpPr txBox="1">
-            <a:spLocks noGrp="1"/>
-          </p:cNvSpPr>
-          <p:nvPr>
-            <p:ph idx="1"/>
-          </p:nvPr>
-        </p:nvSpPr>
-        <p:spPr>
-          <a:xfrm>
-            <a:off x="838199" y="1500160"/>
-            <a:ext cx="9643947" cy="4351338"/>
-          </a:xfrm>
-          <a:prstGeom prst="rect">
-            <a:avLst/>
-          </a:prstGeom>
-        </p:spPr>
-        <p:txBody>
-          <a:bodyPr>
-            <a:normAutofit fontScale="55000" lnSpcReduction="20000"/>
-          </a:bodyPr>
-          <a:lstStyle/>
-          <a:p>
-            <a:pPr marL="214884" indent="-214884" defTabSz="859536">
-              <a:spcBef>
-                <a:spcPts val="900"/>
-              </a:spcBef>
-              <a:defRPr sz="5264"/>
-            </a:pPr>
-            <a:r>
-              <a:rPr dirty="0"/>
-              <a:t>Test Driven Development</a:t>
-            </a:r>
-          </a:p>
-          <a:p>
-            <a:pPr marL="429768" lvl="1" indent="-214884" defTabSz="859536">
-              <a:spcBef>
-                <a:spcPts val="450"/>
-              </a:spcBef>
-              <a:defRPr sz="4512"/>
-            </a:pPr>
-            <a:r>
-              <a:rPr lang="en-US" dirty="0"/>
-              <a:t>If we start with tests, passing the tests lets us know we’re done meeting the conditions of satisfaction</a:t>
-            </a:r>
-          </a:p>
-          <a:p>
-            <a:pPr marL="214884" indent="-214884" defTabSz="859536">
-              <a:spcBef>
-                <a:spcPts val="900"/>
-              </a:spcBef>
-              <a:defRPr sz="5264"/>
-            </a:pPr>
-            <a:r>
-              <a:rPr lang="en-US" dirty="0"/>
-              <a:t>Acceptance Testing</a:t>
-            </a:r>
-          </a:p>
-          <a:p>
-            <a:pPr marL="429768" lvl="1" indent="-214884" defTabSz="859536">
-              <a:spcBef>
-                <a:spcPts val="450"/>
-              </a:spcBef>
-              <a:defRPr sz="4512"/>
-            </a:pPr>
-            <a:r>
-              <a:rPr lang="en-US" dirty="0"/>
-              <a:t>Does the customer agree we’ve met the conditions of satisfaction?</a:t>
-            </a:r>
-            <a:endParaRPr dirty="0"/>
-          </a:p>
-          <a:p>
-            <a:pPr marL="214884" indent="-214884" defTabSz="859536">
-              <a:spcBef>
-                <a:spcPts val="900"/>
-              </a:spcBef>
-              <a:defRPr sz="5264"/>
-            </a:pPr>
-            <a:r>
-              <a:rPr dirty="0"/>
-              <a:t>Regression Test</a:t>
-            </a:r>
-            <a:r>
-              <a:rPr lang="en-US" dirty="0"/>
-              <a:t>ing</a:t>
-            </a:r>
-            <a:endParaRPr dirty="0"/>
-          </a:p>
-          <a:p>
-            <a:pPr marL="429768" lvl="1" indent="-214884" defTabSz="859536">
-              <a:spcBef>
-                <a:spcPts val="450"/>
-              </a:spcBef>
-              <a:defRPr sz="4512"/>
-            </a:pPr>
-            <a:r>
-              <a:rPr dirty="0"/>
-              <a:t>Did something change since some previous version? </a:t>
-            </a:r>
-          </a:p>
-          <a:p>
-            <a:pPr marL="429768" lvl="1" indent="-214884" defTabSz="859536">
-              <a:spcBef>
-                <a:spcPts val="450"/>
-              </a:spcBef>
-              <a:defRPr sz="4512"/>
-            </a:pPr>
-            <a:r>
-              <a:rPr dirty="0"/>
-              <a:t>Prevent bugs from (re-)entering during maintenance.</a:t>
-            </a:r>
-          </a:p>
-          <a:p>
-            <a:pPr marL="429768" lvl="1" indent="-214884" defTabSz="859536">
-              <a:spcBef>
-                <a:spcPts val="450"/>
-              </a:spcBef>
-              <a:defRPr sz="4512"/>
-            </a:pPr>
-            <a:r>
-              <a:rPr dirty="0"/>
-              <a:t>“Good” test suite detects bugs that </a:t>
-            </a:r>
-            <a:r>
-              <a:rPr lang="en-US" dirty="0"/>
-              <a:t>(inevitably) get added as software is developed over time: tests are for </a:t>
-            </a:r>
-            <a:r>
-              <a:rPr lang="en-US" i="1" dirty="0"/>
-              <a:t>the future</a:t>
-            </a:r>
-            <a:endParaRPr lang="en-US" dirty="0"/>
-          </a:p>
-        </p:txBody>
-      </p:sp>
-      <p:sp>
-        <p:nvSpPr>
-          <p:cNvPr id="323" name="Slide Number Placeholder 4"/>
-          <p:cNvSpPr txBox="1">
-            <a:spLocks noGrp="1"/>
-          </p:cNvSpPr>
-          <p:nvPr>
-            <p:ph type="sldNum" sz="quarter" idx="4294967295"/>
-          </p:nvPr>
-        </p:nvSpPr>
-        <p:spPr>
-          <a:xfrm>
-            <a:off x="11687175" y="12836525"/>
-            <a:ext cx="504825" cy="482600"/>
-          </a:xfrm>
-          <a:prstGeom prst="rect">
-            <a:avLst/>
-          </a:prstGeom>
-          <a:ln w="25400">
-            <a:miter lim="400000"/>
-          </a:ln>
-          <a:extLst>
-            <a:ext uri="{C572A759-6A51-4108-AA02-DFA0A04FC94B}">
-              <ma14:wrappingTextBoxFlag xmlns="" xmlns:m="http://schemas.openxmlformats.org/officeDocument/2006/math" xmlns:a14="http://schemas.microsoft.com/office/drawing/2010/main" xmlns:ma14="http://schemas.microsoft.com/office/mac/drawingml/2011/main" val="1"/>
-            </a:ext>
-          </a:extLst>
-        </p:spPr>
-        <p:txBody>
-          <a:bodyPr wrap="none" tIns="91439" bIns="91439" anchor="ctr">
-            <a:spAutoFit/>
-          </a:bodyPr>
-          <a:lstStyle>
-            <a:defPPr marL="0" marR="0" indent="0" algn="l" defTabSz="914400" rtl="0" fontAlgn="auto" latinLnBrk="1" hangingPunct="0">
-              <a:lnSpc>
-                <a:spcPct val="100000"/>
-              </a:lnSpc>
-              <a:spcBef>
-                <a:spcPts val="0"/>
-              </a:spcBef>
-              <a:spcAft>
-                <a:spcPts val="0"/>
-              </a:spcAft>
-              <a:buClrTx/>
-              <a:buSzTx/>
-              <a:buFontTx/>
-              <a:buNone/>
-              <a:tabLst/>
-              <a:defRPr kumimoji="0" sz="1800" b="0" i="0" u="none" strike="noStrike" cap="none" spc="0" normalizeH="0" baseline="0">
-                <a:ln>
-                  <a:noFill/>
-                </a:ln>
-                <a:solidFill>
-                  <a:srgbClr val="000000"/>
-                </a:solidFill>
-                <a:effectLst/>
-                <a:uFillTx/>
-              </a:defRPr>
-            </a:defPPr>
-            <a:lvl1pPr marL="0" marR="0" indent="0" algn="r" defTabSz="1828800" rtl="0" fontAlgn="auto" latinLnBrk="0" hangingPunct="0">
-              <a:lnSpc>
-                <a:spcPct val="100000"/>
-              </a:lnSpc>
-              <a:spcBef>
-                <a:spcPts val="0"/>
-              </a:spcBef>
-              <a:spcAft>
-                <a:spcPts val="0"/>
-              </a:spcAft>
-              <a:buClrTx/>
-              <a:buSzTx/>
-              <a:buFontTx/>
-              <a:buNone/>
-              <a:tabLst/>
-              <a:defRPr kumimoji="0" sz="2400" b="0" i="0" u="none" strike="noStrike" cap="none" spc="0" normalizeH="0" baseline="0">
-                <a:ln>
-                  <a:noFill/>
-                </a:ln>
-                <a:solidFill>
-                  <a:srgbClr val="888888"/>
-                </a:solidFill>
-                <a:effectLst/>
-                <a:uFillTx/>
-                <a:latin typeface="+mj-lt"/>
-                <a:ea typeface="+mj-ea"/>
-                <a:cs typeface="+mj-cs"/>
-                <a:sym typeface="Calibri"/>
-              </a:defRPr>
-            </a:lvl1pPr>
-            <a:lvl2pPr marL="0" marR="0" indent="457200" algn="l" defTabSz="1828800" rtl="0" fontAlgn="auto" latinLnBrk="0" hangingPunct="0">
-              <a:lnSpc>
-                <a:spcPct val="100000"/>
-              </a:lnSpc>
-              <a:spcBef>
-                <a:spcPts val="0"/>
-              </a:spcBef>
-              <a:spcAft>
-                <a:spcPts val="0"/>
-              </a:spcAft>
-              <a:buClrTx/>
-              <a:buSzTx/>
-              <a:buFontTx/>
-              <a:buNone/>
-              <a:tabLst/>
-              <a:defRPr kumimoji="0" sz="3600" b="0" i="0" u="none" strike="noStrike" cap="none" spc="0" normalizeH="0" baseline="0">
-                <a:ln>
-                  <a:noFill/>
-                </a:ln>
-                <a:solidFill>
-                  <a:srgbClr val="000000"/>
-                </a:solidFill>
-                <a:effectLst/>
-                <a:uFillTx/>
-                <a:latin typeface="+mj-lt"/>
-                <a:ea typeface="+mj-ea"/>
-                <a:cs typeface="+mj-cs"/>
-                <a:sym typeface="Calibri"/>
-              </a:defRPr>
-            </a:lvl2pPr>
-            <a:lvl3pPr marL="0" marR="0" indent="914400" algn="l" defTabSz="1828800" rtl="0" fontAlgn="auto" latinLnBrk="0" hangingPunct="0">
-              <a:lnSpc>
-                <a:spcPct val="100000"/>
-              </a:lnSpc>
-              <a:spcBef>
-                <a:spcPts val="0"/>
-              </a:spcBef>
-              <a:spcAft>
-                <a:spcPts val="0"/>
-              </a:spcAft>
-              <a:buClrTx/>
-              <a:buSzTx/>
-              <a:buFontTx/>
-              <a:buNone/>
-              <a:tabLst/>
-              <a:defRPr kumimoji="0" sz="3600" b="0" i="0" u="none" strike="noStrike" cap="none" spc="0" normalizeH="0" baseline="0">
-                <a:ln>
-                  <a:noFill/>
-                </a:ln>
-                <a:solidFill>
-                  <a:srgbClr val="000000"/>
-                </a:solidFill>
-                <a:effectLst/>
-                <a:uFillTx/>
-                <a:latin typeface="+mj-lt"/>
-                <a:ea typeface="+mj-ea"/>
-                <a:cs typeface="+mj-cs"/>
-                <a:sym typeface="Calibri"/>
-              </a:defRPr>
-            </a:lvl3pPr>
-            <a:lvl4pPr marL="0" marR="0" indent="1371600" algn="l" defTabSz="1828800" rtl="0" fontAlgn="auto" latinLnBrk="0" hangingPunct="0">
-              <a:lnSpc>
-                <a:spcPct val="100000"/>
-              </a:lnSpc>
-              <a:spcBef>
-                <a:spcPts val="0"/>
-              </a:spcBef>
-              <a:spcAft>
-                <a:spcPts val="0"/>
-              </a:spcAft>
-              <a:buClrTx/>
-              <a:buSzTx/>
-              <a:buFontTx/>
-              <a:buNone/>
-              <a:tabLst/>
-              <a:defRPr kumimoji="0" sz="3600" b="0" i="0" u="none" strike="noStrike" cap="none" spc="0" normalizeH="0" baseline="0">
-                <a:ln>
-                  <a:noFill/>
-                </a:ln>
-                <a:solidFill>
-                  <a:srgbClr val="000000"/>
-                </a:solidFill>
-                <a:effectLst/>
-                <a:uFillTx/>
-                <a:latin typeface="+mj-lt"/>
-                <a:ea typeface="+mj-ea"/>
-                <a:cs typeface="+mj-cs"/>
-                <a:sym typeface="Calibri"/>
-              </a:defRPr>
-            </a:lvl4pPr>
-            <a:lvl5pPr marL="0" marR="0" indent="1828800" algn="l" defTabSz="1828800" rtl="0" fontAlgn="auto" latinLnBrk="0" hangingPunct="0">
-              <a:lnSpc>
-                <a:spcPct val="100000"/>
-              </a:lnSpc>
-              <a:spcBef>
-                <a:spcPts val="0"/>
-              </a:spcBef>
-              <a:spcAft>
-                <a:spcPts val="0"/>
-              </a:spcAft>
-              <a:buClrTx/>
-              <a:buSzTx/>
-              <a:buFontTx/>
-              <a:buNone/>
-              <a:tabLst/>
-              <a:defRPr kumimoji="0" sz="3600" b="0" i="0" u="none" strike="noStrike" cap="none" spc="0" normalizeH="0" baseline="0">
-                <a:ln>
-                  <a:noFill/>
-                </a:ln>
-                <a:solidFill>
-                  <a:srgbClr val="000000"/>
-                </a:solidFill>
-                <a:effectLst/>
-                <a:uFillTx/>
-                <a:latin typeface="+mj-lt"/>
-                <a:ea typeface="+mj-ea"/>
-                <a:cs typeface="+mj-cs"/>
-                <a:sym typeface="Calibri"/>
-              </a:defRPr>
-            </a:lvl5pPr>
-            <a:lvl6pPr marL="0" marR="0" indent="2286000" algn="l" defTabSz="1828800" rtl="0" fontAlgn="auto" latinLnBrk="0" hangingPunct="0">
-              <a:lnSpc>
-                <a:spcPct val="100000"/>
-              </a:lnSpc>
-              <a:spcBef>
-                <a:spcPts val="0"/>
-              </a:spcBef>
-              <a:spcAft>
-                <a:spcPts val="0"/>
-              </a:spcAft>
-              <a:buClrTx/>
-              <a:buSzTx/>
-              <a:buFontTx/>
-              <a:buNone/>
-              <a:tabLst/>
-              <a:defRPr kumimoji="0" sz="3600" b="0" i="0" u="none" strike="noStrike" cap="none" spc="0" normalizeH="0" baseline="0">
-                <a:ln>
-                  <a:noFill/>
-                </a:ln>
-                <a:solidFill>
-                  <a:srgbClr val="000000"/>
-                </a:solidFill>
-                <a:effectLst/>
-                <a:uFillTx/>
-                <a:latin typeface="+mj-lt"/>
-                <a:ea typeface="+mj-ea"/>
-                <a:cs typeface="+mj-cs"/>
-                <a:sym typeface="Calibri"/>
-              </a:defRPr>
-            </a:lvl6pPr>
-            <a:lvl7pPr marL="0" marR="0" indent="2743200" algn="l" defTabSz="1828800" rtl="0" fontAlgn="auto" latinLnBrk="0" hangingPunct="0">
-              <a:lnSpc>
-                <a:spcPct val="100000"/>
-              </a:lnSpc>
-              <a:spcBef>
-                <a:spcPts val="0"/>
-              </a:spcBef>
-              <a:spcAft>
-                <a:spcPts val="0"/>
-              </a:spcAft>
-              <a:buClrTx/>
-              <a:buSzTx/>
-              <a:buFontTx/>
-              <a:buNone/>
-              <a:tabLst/>
-              <a:defRPr kumimoji="0" sz="3600" b="0" i="0" u="none" strike="noStrike" cap="none" spc="0" normalizeH="0" baseline="0">
-                <a:ln>
-                  <a:noFill/>
-                </a:ln>
-                <a:solidFill>
-                  <a:srgbClr val="000000"/>
-                </a:solidFill>
-                <a:effectLst/>
-                <a:uFillTx/>
-                <a:latin typeface="+mj-lt"/>
-                <a:ea typeface="+mj-ea"/>
-                <a:cs typeface="+mj-cs"/>
-                <a:sym typeface="Calibri"/>
-              </a:defRPr>
-            </a:lvl7pPr>
-            <a:lvl8pPr marL="0" marR="0" indent="3200400" algn="l" defTabSz="1828800" rtl="0" fontAlgn="auto" latinLnBrk="0" hangingPunct="0">
-              <a:lnSpc>
-                <a:spcPct val="100000"/>
-              </a:lnSpc>
-              <a:spcBef>
-                <a:spcPts val="0"/>
-              </a:spcBef>
-              <a:spcAft>
-                <a:spcPts val="0"/>
-              </a:spcAft>
-              <a:buClrTx/>
-              <a:buSzTx/>
-              <a:buFontTx/>
-              <a:buNone/>
-              <a:tabLst/>
-              <a:defRPr kumimoji="0" sz="3600" b="0" i="0" u="none" strike="noStrike" cap="none" spc="0" normalizeH="0" baseline="0">
-                <a:ln>
-                  <a:noFill/>
-                </a:ln>
-                <a:solidFill>
-                  <a:srgbClr val="000000"/>
-                </a:solidFill>
-                <a:effectLst/>
-                <a:uFillTx/>
-                <a:latin typeface="+mj-lt"/>
-                <a:ea typeface="+mj-ea"/>
-                <a:cs typeface="+mj-cs"/>
-                <a:sym typeface="Calibri"/>
-              </a:defRPr>
-            </a:lvl8pPr>
-            <a:lvl9pPr marL="0" marR="0" indent="3657600" algn="l" defTabSz="1828800" rtl="0" fontAlgn="auto" latinLnBrk="0" hangingPunct="0">
-              <a:lnSpc>
-                <a:spcPct val="100000"/>
-              </a:lnSpc>
-              <a:spcBef>
-                <a:spcPts val="0"/>
-              </a:spcBef>
-              <a:spcAft>
-                <a:spcPts val="0"/>
-              </a:spcAft>
-              <a:buClrTx/>
-              <a:buSzTx/>
-              <a:buFontTx/>
-              <a:buNone/>
-              <a:tabLst/>
-              <a:defRPr kumimoji="0" sz="3600" b="0" i="0" u="none" strike="noStrike" cap="none" spc="0" normalizeH="0" baseline="0">
-                <a:ln>
-                  <a:noFill/>
-                </a:ln>
-                <a:solidFill>
-                  <a:srgbClr val="000000"/>
-                </a:solidFill>
-                <a:effectLst/>
-                <a:uFillTx/>
-                <a:latin typeface="+mj-lt"/>
-                <a:ea typeface="+mj-ea"/>
-                <a:cs typeface="+mj-cs"/>
-                <a:sym typeface="Calibri"/>
-              </a:defRPr>
-            </a:lvl9pPr>
-          </a:lstStyle>
-          <a:p>
-            <a:fld id="{86CB4B4D-7CA3-9044-876B-883B54F8677D}" type="slidenum">
-              <a:rPr lang="en-US" smtClean="0"/>
-              <a:pPr/>
-              <a:t>4</a:t>
-            </a:fld>
-            <a:endParaRPr/>
-          </a:p>
-        </p:txBody>
-      </p:sp>
-    </p:spTree>
-  </p:cSld>
-  <p:clrMapOvr>
-    <a:masterClrMapping/>
-  </p:clrMapOvr>
-</p:sld>
-</file>
-
-<file path=ppt/slides/slide40.xml><?xml version="1.0" encoding="utf-8"?>
+<file path=ppt/slides/slide41.xml><?xml version="1.0" encoding="utf-8"?>
 <p:sld xmlns:a="http://schemas.openxmlformats.org/drawingml/2006/main" xmlns:r="http://schemas.openxmlformats.org/officeDocument/2006/relationships" xmlns:p="http://schemas.openxmlformats.org/presentationml/2006/main">
   <p:cSld>
     <p:spTree>
@@ -30109,7 +29728,7 @@
           </a:ln>
           <a:extLst>
             <a:ext uri="{C572A759-6A51-4108-AA02-DFA0A04FC94B}">
-              <ma14:wrappingTextBoxFlag xmlns="" xmlns:m="http://schemas.openxmlformats.org/officeDocument/2006/math" xmlns:a14="http://schemas.microsoft.com/office/drawing/2010/main" xmlns:ma14="http://schemas.microsoft.com/office/mac/drawingml/2011/main" val="1"/>
+              <ma14:wrappingTextBoxFlag xmlns:ma14="http://schemas.microsoft.com/office/mac/drawingml/2011/main" xmlns:a14="http://schemas.microsoft.com/office/drawing/2010/main" xmlns:m="http://schemas.openxmlformats.org/officeDocument/2006/math" xmlns="" val="1"/>
             </a:ext>
           </a:extLst>
         </p:spPr>
@@ -30419,7 +30038,7 @@
             <a:fld id="{86CB4B4D-7CA3-9044-876B-883B54F8677D}" type="slidenum">
               <a:rPr lang="en-US" smtClean="0"/>
               <a:pPr/>
-              <a:t>40</a:t>
+              <a:t>41</a:t>
             </a:fld>
             <a:endParaRPr lang="en-US"/>
           </a:p>
@@ -30474,7 +30093,7 @@
 </p:sld>
 </file>
 
-<file path=ppt/slides/slide41.xml><?xml version="1.0" encoding="utf-8"?>
+<file path=ppt/slides/slide42.xml><?xml version="1.0" encoding="utf-8"?>
 <p:sld xmlns:a="http://schemas.openxmlformats.org/drawingml/2006/main" xmlns:r="http://schemas.openxmlformats.org/officeDocument/2006/relationships" xmlns:p="http://schemas.openxmlformats.org/presentationml/2006/main">
   <p:cSld>
     <p:spTree>
@@ -30601,7 +30220,7 @@
           </a:ln>
           <a:extLst>
             <a:ext uri="{C572A759-6A51-4108-AA02-DFA0A04FC94B}">
-              <ma14:wrappingTextBoxFlag xmlns:ma14="http://schemas.microsoft.com/office/mac/drawingml/2011/main" xmlns:a14="http://schemas.microsoft.com/office/drawing/2010/main" xmlns:m="http://schemas.openxmlformats.org/officeDocument/2006/math" xmlns="" val="1"/>
+              <ma14:wrappingTextBoxFlag xmlns="" xmlns:m="http://schemas.openxmlformats.org/officeDocument/2006/math" xmlns:a14="http://schemas.microsoft.com/office/drawing/2010/main" xmlns:ma14="http://schemas.microsoft.com/office/mac/drawingml/2011/main" val="1"/>
             </a:ext>
           </a:extLst>
         </p:spPr>
@@ -30911,7 +30530,7 @@
             <a:fld id="{86CB4B4D-7CA3-9044-876B-883B54F8677D}" type="slidenum">
               <a:rPr lang="en-US" smtClean="0"/>
               <a:pPr/>
-              <a:t>41</a:t>
+              <a:t>42</a:t>
             </a:fld>
             <a:endParaRPr/>
           </a:p>
@@ -30993,7 +30612,7 @@
 </p:sld>
 </file>
 
-<file path=ppt/slides/slide42.xml><?xml version="1.0" encoding="utf-8"?>
+<file path=ppt/slides/slide43.xml><?xml version="1.0" encoding="utf-8"?>
 <p:sld xmlns:a="http://schemas.openxmlformats.org/drawingml/2006/main" xmlns:r="http://schemas.openxmlformats.org/officeDocument/2006/relationships" xmlns:p="http://schemas.openxmlformats.org/presentationml/2006/main">
   <p:cSld>
     <p:spTree>
@@ -31073,7 +30692,7 @@
         </p:spPr>
         <p:txBody>
           <a:bodyPr>
-            <a:normAutofit/>
+            <a:normAutofit lnSpcReduction="10000"/>
           </a:bodyPr>
           <a:lstStyle/>
           <a:p>
@@ -31086,51 +30705,43 @@
             </a:r>
           </a:p>
           <a:p>
-            <a:pPr lvl="1"/>
+            <a:pPr marL="514350" indent="-514350">
+              <a:buFont typeface="+mj-lt"/>
+              <a:buAutoNum type="arabicPeriod"/>
+            </a:pPr>
             <a:r>
               <a:rPr lang="en-US" dirty="0"/>
-              <a:t>Explain what code coverage is, and how different measures differ, including statements, branches, functions, and lines</a:t>
-            </a:r>
-          </a:p>
-          <a:p>
-            <a:pPr lvl="1"/>
+              <a:t>Explain three general ways of judging whether we've written enough tests</a:t>
+            </a:r>
+          </a:p>
+          <a:p>
+            <a:pPr marL="514350" indent="-514350">
+              <a:buFont typeface="+mj-lt"/>
+              <a:buAutoNum type="arabicPeriod"/>
+            </a:pPr>
             <a:r>
               <a:rPr lang="en-US" dirty="0"/>
-              <a:t>Explain the benefits of mutation testing</a:t>
-            </a:r>
-          </a:p>
-          <a:p>
+              <a:t>Explain how contracts provide better guidance than types in choosing test cases</a:t>
+            </a:r>
+          </a:p>
+          <a:p>
+            <a:pPr marL="514350" indent="-514350">
+              <a:buFont typeface="+mj-lt"/>
+              <a:buAutoNum type="arabicPeriod"/>
+            </a:pPr>
             <a:r>
               <a:rPr lang="en-US" dirty="0"/>
-              <a:t>When have you written enough tests?</a:t>
-            </a:r>
-          </a:p>
-          <a:p>
-            <a:pPr lvl="1"/>
+              <a:t>Explain various measures of code coverage (including statements, branches, functions, and lines)</a:t>
+            </a:r>
+          </a:p>
+          <a:p>
+            <a:pPr marL="514350" indent="-514350">
+              <a:buFont typeface="+mj-lt"/>
+              <a:buAutoNum type="arabicPeriod"/>
+            </a:pPr>
             <a:r>
               <a:rPr lang="en-US" dirty="0"/>
-              <a:t>When you’ve tested all valid inputs?</a:t>
-            </a:r>
-          </a:p>
-          <a:p>
-            <a:pPr lvl="1"/>
-            <a:r>
-              <a:rPr lang="en-US" dirty="0"/>
-              <a:t>When your tests get full code coverage?</a:t>
-            </a:r>
-          </a:p>
-          <a:p>
-            <a:pPr lvl="1"/>
-            <a:r>
-              <a:rPr lang="en-US" dirty="0"/>
-              <a:t>When your tests can catch any buggy mutant code?</a:t>
-            </a:r>
-          </a:p>
-          <a:p>
-            <a:pPr lvl="1"/>
-            <a:r>
-              <a:rPr lang="en-US" dirty="0"/>
-              <a:t>The answer depends!</a:t>
+              <a:t>Explain how adversarial testing helps gauge whether our tests are sensitive enough to detect likely bugs</a:t>
             </a:r>
           </a:p>
           <a:p>
@@ -31177,7 +30788,7 @@
             <a:fld id="{20F37917-FD3A-4669-9018-DA04BCDD3D75}" type="slidenum">
               <a:rPr lang="en-US" noProof="0" smtClean="0"/>
               <a:pPr lvl="0"/>
-              <a:t>42</a:t>
+              <a:t>43</a:t>
             </a:fld>
             <a:endParaRPr lang="en-US" noProof="0"/>
           </a:p>
@@ -31197,6 +30808,542 @@
 </file>
 
 <file path=ppt/slides/slide5.xml><?xml version="1.0" encoding="utf-8"?>
+<p:sld xmlns:a="http://schemas.openxmlformats.org/drawingml/2006/main" xmlns:r="http://schemas.openxmlformats.org/officeDocument/2006/relationships" xmlns:p="http://schemas.openxmlformats.org/presentationml/2006/main">
+  <p:cSld>
+    <p:spTree>
+      <p:nvGrpSpPr>
+        <p:cNvPr id="1" name=""/>
+        <p:cNvGrpSpPr/>
+        <p:nvPr/>
+      </p:nvGrpSpPr>
+      <p:grpSpPr>
+        <a:xfrm>
+          <a:off x="0" y="0"/>
+          <a:ext cx="0" cy="0"/>
+          <a:chOff x="0" y="0"/>
+          <a:chExt cx="0" cy="0"/>
+        </a:xfrm>
+      </p:grpSpPr>
+      <p:sp>
+        <p:nvSpPr>
+          <p:cNvPr id="321" name="Title 1"/>
+          <p:cNvSpPr txBox="1">
+            <a:spLocks noGrp="1"/>
+          </p:cNvSpPr>
+          <p:nvPr>
+            <p:ph type="title"/>
+          </p:nvPr>
+        </p:nvSpPr>
+        <p:spPr>
+          <a:prstGeom prst="rect">
+            <a:avLst/>
+          </a:prstGeom>
+        </p:spPr>
+        <p:txBody>
+          <a:bodyPr/>
+          <a:lstStyle/>
+          <a:p>
+            <a:r>
+              <a:rPr lang="en-US" dirty="0"/>
+              <a:t>Why do we test? Because Tests </a:t>
+            </a:r>
+            <a:r>
+              <a:rPr lang="en-US" i="1" dirty="0"/>
+              <a:t>are</a:t>
+            </a:r>
+            <a:r>
+              <a:rPr lang="en-US" dirty="0"/>
+              <a:t> the specification (Beyonce rule)</a:t>
+            </a:r>
+            <a:endParaRPr dirty="0"/>
+          </a:p>
+        </p:txBody>
+      </p:sp>
+      <p:sp>
+        <p:nvSpPr>
+          <p:cNvPr id="322" name="Content Placeholder 5"/>
+          <p:cNvSpPr txBox="1">
+            <a:spLocks noGrp="1"/>
+          </p:cNvSpPr>
+          <p:nvPr>
+            <p:ph idx="1"/>
+          </p:nvPr>
+        </p:nvSpPr>
+        <p:spPr>
+          <a:xfrm>
+            <a:off x="838199" y="1500160"/>
+            <a:ext cx="9643947" cy="4351338"/>
+          </a:xfrm>
+          <a:prstGeom prst="rect">
+            <a:avLst/>
+          </a:prstGeom>
+        </p:spPr>
+        <p:txBody>
+          <a:bodyPr>
+            <a:normAutofit fontScale="55000" lnSpcReduction="20000"/>
+          </a:bodyPr>
+          <a:lstStyle/>
+          <a:p>
+            <a:pPr marL="214884" indent="-214884" defTabSz="859536">
+              <a:spcBef>
+                <a:spcPts val="900"/>
+              </a:spcBef>
+              <a:defRPr sz="5264"/>
+            </a:pPr>
+            <a:r>
+              <a:rPr dirty="0"/>
+              <a:t>Test Driven Development</a:t>
+            </a:r>
+          </a:p>
+          <a:p>
+            <a:pPr marL="429768" lvl="1" indent="-214884" defTabSz="859536">
+              <a:spcBef>
+                <a:spcPts val="450"/>
+              </a:spcBef>
+              <a:defRPr sz="4512"/>
+            </a:pPr>
+            <a:r>
+              <a:rPr lang="en-US" dirty="0"/>
+              <a:t>If we start with tests, passing the tests lets us know we’re done meeting the conditions of satisfaction</a:t>
+            </a:r>
+          </a:p>
+          <a:p>
+            <a:pPr marL="214884" indent="-214884" defTabSz="859536">
+              <a:spcBef>
+                <a:spcPts val="900"/>
+              </a:spcBef>
+              <a:defRPr sz="5264"/>
+            </a:pPr>
+            <a:r>
+              <a:rPr lang="en-US" dirty="0"/>
+              <a:t>Acceptance Testing</a:t>
+            </a:r>
+          </a:p>
+          <a:p>
+            <a:pPr marL="429768" lvl="1" indent="-214884" defTabSz="859536">
+              <a:spcBef>
+                <a:spcPts val="450"/>
+              </a:spcBef>
+              <a:defRPr sz="4512"/>
+            </a:pPr>
+            <a:r>
+              <a:rPr lang="en-US" dirty="0"/>
+              <a:t>Does the customer agree we’ve met the conditions of satisfaction?</a:t>
+            </a:r>
+            <a:endParaRPr dirty="0"/>
+          </a:p>
+          <a:p>
+            <a:pPr marL="214884" indent="-214884" defTabSz="859536">
+              <a:spcBef>
+                <a:spcPts val="900"/>
+              </a:spcBef>
+              <a:defRPr sz="5264"/>
+            </a:pPr>
+            <a:r>
+              <a:rPr dirty="0"/>
+              <a:t>Regression Test</a:t>
+            </a:r>
+            <a:r>
+              <a:rPr lang="en-US" dirty="0"/>
+              <a:t>ing</a:t>
+            </a:r>
+            <a:endParaRPr dirty="0"/>
+          </a:p>
+          <a:p>
+            <a:pPr marL="429768" lvl="1" indent="-214884" defTabSz="859536">
+              <a:spcBef>
+                <a:spcPts val="450"/>
+              </a:spcBef>
+              <a:defRPr sz="4512"/>
+            </a:pPr>
+            <a:r>
+              <a:rPr dirty="0"/>
+              <a:t>Did something change since some previous version? </a:t>
+            </a:r>
+          </a:p>
+          <a:p>
+            <a:pPr marL="429768" lvl="1" indent="-214884" defTabSz="859536">
+              <a:spcBef>
+                <a:spcPts val="450"/>
+              </a:spcBef>
+              <a:defRPr sz="4512"/>
+            </a:pPr>
+            <a:r>
+              <a:rPr dirty="0"/>
+              <a:t>Prevent bugs from (re-)entering during maintenance.</a:t>
+            </a:r>
+          </a:p>
+          <a:p>
+            <a:pPr marL="429768" lvl="1" indent="-214884" defTabSz="859536">
+              <a:spcBef>
+                <a:spcPts val="450"/>
+              </a:spcBef>
+              <a:defRPr sz="4512"/>
+            </a:pPr>
+            <a:r>
+              <a:rPr dirty="0"/>
+              <a:t>“Good” test suite detects bugs that </a:t>
+            </a:r>
+            <a:r>
+              <a:rPr lang="en-US" dirty="0"/>
+              <a:t>(inevitably) get added as software is developed over time: tests are for </a:t>
+            </a:r>
+            <a:r>
+              <a:rPr lang="en-US" i="1" dirty="0"/>
+              <a:t>the future</a:t>
+            </a:r>
+            <a:endParaRPr lang="en-US" dirty="0"/>
+          </a:p>
+        </p:txBody>
+      </p:sp>
+      <p:sp>
+        <p:nvSpPr>
+          <p:cNvPr id="323" name="Slide Number Placeholder 4"/>
+          <p:cNvSpPr txBox="1">
+            <a:spLocks noGrp="1"/>
+          </p:cNvSpPr>
+          <p:nvPr>
+            <p:ph type="sldNum" sz="quarter" idx="4294967295"/>
+          </p:nvPr>
+        </p:nvSpPr>
+        <p:spPr>
+          <a:xfrm>
+            <a:off x="11687175" y="12836525"/>
+            <a:ext cx="504825" cy="482600"/>
+          </a:xfrm>
+          <a:prstGeom prst="rect">
+            <a:avLst/>
+          </a:prstGeom>
+          <a:ln w="25400">
+            <a:miter lim="400000"/>
+          </a:ln>
+          <a:extLst>
+            <a:ext uri="{C572A759-6A51-4108-AA02-DFA0A04FC94B}">
+              <ma14:wrappingTextBoxFlag xmlns:ma14="http://schemas.microsoft.com/office/mac/drawingml/2011/main" xmlns:a14="http://schemas.microsoft.com/office/drawing/2010/main" xmlns:m="http://schemas.openxmlformats.org/officeDocument/2006/math" xmlns="" val="1"/>
+            </a:ext>
+          </a:extLst>
+        </p:spPr>
+        <p:txBody>
+          <a:bodyPr wrap="none" tIns="91439" bIns="91439" anchor="ctr">
+            <a:spAutoFit/>
+          </a:bodyPr>
+          <a:lstStyle>
+            <a:defPPr marL="0" marR="0" indent="0" algn="l" defTabSz="914400" rtl="0" fontAlgn="auto" latinLnBrk="1" hangingPunct="0">
+              <a:lnSpc>
+                <a:spcPct val="100000"/>
+              </a:lnSpc>
+              <a:spcBef>
+                <a:spcPts val="0"/>
+              </a:spcBef>
+              <a:spcAft>
+                <a:spcPts val="0"/>
+              </a:spcAft>
+              <a:buClrTx/>
+              <a:buSzTx/>
+              <a:buFontTx/>
+              <a:buNone/>
+              <a:tabLst/>
+              <a:defRPr kumimoji="0" sz="1800" b="0" i="0" u="none" strike="noStrike" cap="none" spc="0" normalizeH="0" baseline="0">
+                <a:ln>
+                  <a:noFill/>
+                </a:ln>
+                <a:solidFill>
+                  <a:srgbClr val="000000"/>
+                </a:solidFill>
+                <a:effectLst/>
+                <a:uFillTx/>
+              </a:defRPr>
+            </a:defPPr>
+            <a:lvl1pPr marL="0" marR="0" indent="0" algn="r" defTabSz="1828800" rtl="0" fontAlgn="auto" latinLnBrk="0" hangingPunct="0">
+              <a:lnSpc>
+                <a:spcPct val="100000"/>
+              </a:lnSpc>
+              <a:spcBef>
+                <a:spcPts val="0"/>
+              </a:spcBef>
+              <a:spcAft>
+                <a:spcPts val="0"/>
+              </a:spcAft>
+              <a:buClrTx/>
+              <a:buSzTx/>
+              <a:buFontTx/>
+              <a:buNone/>
+              <a:tabLst/>
+              <a:defRPr kumimoji="0" sz="2400" b="0" i="0" u="none" strike="noStrike" cap="none" spc="0" normalizeH="0" baseline="0">
+                <a:ln>
+                  <a:noFill/>
+                </a:ln>
+                <a:solidFill>
+                  <a:srgbClr val="888888"/>
+                </a:solidFill>
+                <a:effectLst/>
+                <a:uFillTx/>
+                <a:latin typeface="+mj-lt"/>
+                <a:ea typeface="+mj-ea"/>
+                <a:cs typeface="+mj-cs"/>
+                <a:sym typeface="Calibri"/>
+              </a:defRPr>
+            </a:lvl1pPr>
+            <a:lvl2pPr marL="0" marR="0" indent="457200" algn="l" defTabSz="1828800" rtl="0" fontAlgn="auto" latinLnBrk="0" hangingPunct="0">
+              <a:lnSpc>
+                <a:spcPct val="100000"/>
+              </a:lnSpc>
+              <a:spcBef>
+                <a:spcPts val="0"/>
+              </a:spcBef>
+              <a:spcAft>
+                <a:spcPts val="0"/>
+              </a:spcAft>
+              <a:buClrTx/>
+              <a:buSzTx/>
+              <a:buFontTx/>
+              <a:buNone/>
+              <a:tabLst/>
+              <a:defRPr kumimoji="0" sz="3600" b="0" i="0" u="none" strike="noStrike" cap="none" spc="0" normalizeH="0" baseline="0">
+                <a:ln>
+                  <a:noFill/>
+                </a:ln>
+                <a:solidFill>
+                  <a:srgbClr val="000000"/>
+                </a:solidFill>
+                <a:effectLst/>
+                <a:uFillTx/>
+                <a:latin typeface="+mj-lt"/>
+                <a:ea typeface="+mj-ea"/>
+                <a:cs typeface="+mj-cs"/>
+                <a:sym typeface="Calibri"/>
+              </a:defRPr>
+            </a:lvl2pPr>
+            <a:lvl3pPr marL="0" marR="0" indent="914400" algn="l" defTabSz="1828800" rtl="0" fontAlgn="auto" latinLnBrk="0" hangingPunct="0">
+              <a:lnSpc>
+                <a:spcPct val="100000"/>
+              </a:lnSpc>
+              <a:spcBef>
+                <a:spcPts val="0"/>
+              </a:spcBef>
+              <a:spcAft>
+                <a:spcPts val="0"/>
+              </a:spcAft>
+              <a:buClrTx/>
+              <a:buSzTx/>
+              <a:buFontTx/>
+              <a:buNone/>
+              <a:tabLst/>
+              <a:defRPr kumimoji="0" sz="3600" b="0" i="0" u="none" strike="noStrike" cap="none" spc="0" normalizeH="0" baseline="0">
+                <a:ln>
+                  <a:noFill/>
+                </a:ln>
+                <a:solidFill>
+                  <a:srgbClr val="000000"/>
+                </a:solidFill>
+                <a:effectLst/>
+                <a:uFillTx/>
+                <a:latin typeface="+mj-lt"/>
+                <a:ea typeface="+mj-ea"/>
+                <a:cs typeface="+mj-cs"/>
+                <a:sym typeface="Calibri"/>
+              </a:defRPr>
+            </a:lvl3pPr>
+            <a:lvl4pPr marL="0" marR="0" indent="1371600" algn="l" defTabSz="1828800" rtl="0" fontAlgn="auto" latinLnBrk="0" hangingPunct="0">
+              <a:lnSpc>
+                <a:spcPct val="100000"/>
+              </a:lnSpc>
+              <a:spcBef>
+                <a:spcPts val="0"/>
+              </a:spcBef>
+              <a:spcAft>
+                <a:spcPts val="0"/>
+              </a:spcAft>
+              <a:buClrTx/>
+              <a:buSzTx/>
+              <a:buFontTx/>
+              <a:buNone/>
+              <a:tabLst/>
+              <a:defRPr kumimoji="0" sz="3600" b="0" i="0" u="none" strike="noStrike" cap="none" spc="0" normalizeH="0" baseline="0">
+                <a:ln>
+                  <a:noFill/>
+                </a:ln>
+                <a:solidFill>
+                  <a:srgbClr val="000000"/>
+                </a:solidFill>
+                <a:effectLst/>
+                <a:uFillTx/>
+                <a:latin typeface="+mj-lt"/>
+                <a:ea typeface="+mj-ea"/>
+                <a:cs typeface="+mj-cs"/>
+                <a:sym typeface="Calibri"/>
+              </a:defRPr>
+            </a:lvl4pPr>
+            <a:lvl5pPr marL="0" marR="0" indent="1828800" algn="l" defTabSz="1828800" rtl="0" fontAlgn="auto" latinLnBrk="0" hangingPunct="0">
+              <a:lnSpc>
+                <a:spcPct val="100000"/>
+              </a:lnSpc>
+              <a:spcBef>
+                <a:spcPts val="0"/>
+              </a:spcBef>
+              <a:spcAft>
+                <a:spcPts val="0"/>
+              </a:spcAft>
+              <a:buClrTx/>
+              <a:buSzTx/>
+              <a:buFontTx/>
+              <a:buNone/>
+              <a:tabLst/>
+              <a:defRPr kumimoji="0" sz="3600" b="0" i="0" u="none" strike="noStrike" cap="none" spc="0" normalizeH="0" baseline="0">
+                <a:ln>
+                  <a:noFill/>
+                </a:ln>
+                <a:solidFill>
+                  <a:srgbClr val="000000"/>
+                </a:solidFill>
+                <a:effectLst/>
+                <a:uFillTx/>
+                <a:latin typeface="+mj-lt"/>
+                <a:ea typeface="+mj-ea"/>
+                <a:cs typeface="+mj-cs"/>
+                <a:sym typeface="Calibri"/>
+              </a:defRPr>
+            </a:lvl5pPr>
+            <a:lvl6pPr marL="0" marR="0" indent="2286000" algn="l" defTabSz="1828800" rtl="0" fontAlgn="auto" latinLnBrk="0" hangingPunct="0">
+              <a:lnSpc>
+                <a:spcPct val="100000"/>
+              </a:lnSpc>
+              <a:spcBef>
+                <a:spcPts val="0"/>
+              </a:spcBef>
+              <a:spcAft>
+                <a:spcPts val="0"/>
+              </a:spcAft>
+              <a:buClrTx/>
+              <a:buSzTx/>
+              <a:buFontTx/>
+              <a:buNone/>
+              <a:tabLst/>
+              <a:defRPr kumimoji="0" sz="3600" b="0" i="0" u="none" strike="noStrike" cap="none" spc="0" normalizeH="0" baseline="0">
+                <a:ln>
+                  <a:noFill/>
+                </a:ln>
+                <a:solidFill>
+                  <a:srgbClr val="000000"/>
+                </a:solidFill>
+                <a:effectLst/>
+                <a:uFillTx/>
+                <a:latin typeface="+mj-lt"/>
+                <a:ea typeface="+mj-ea"/>
+                <a:cs typeface="+mj-cs"/>
+                <a:sym typeface="Calibri"/>
+              </a:defRPr>
+            </a:lvl6pPr>
+            <a:lvl7pPr marL="0" marR="0" indent="2743200" algn="l" defTabSz="1828800" rtl="0" fontAlgn="auto" latinLnBrk="0" hangingPunct="0">
+              <a:lnSpc>
+                <a:spcPct val="100000"/>
+              </a:lnSpc>
+              <a:spcBef>
+                <a:spcPts val="0"/>
+              </a:spcBef>
+              <a:spcAft>
+                <a:spcPts val="0"/>
+              </a:spcAft>
+              <a:buClrTx/>
+              <a:buSzTx/>
+              <a:buFontTx/>
+              <a:buNone/>
+              <a:tabLst/>
+              <a:defRPr kumimoji="0" sz="3600" b="0" i="0" u="none" strike="noStrike" cap="none" spc="0" normalizeH="0" baseline="0">
+                <a:ln>
+                  <a:noFill/>
+                </a:ln>
+                <a:solidFill>
+                  <a:srgbClr val="000000"/>
+                </a:solidFill>
+                <a:effectLst/>
+                <a:uFillTx/>
+                <a:latin typeface="+mj-lt"/>
+                <a:ea typeface="+mj-ea"/>
+                <a:cs typeface="+mj-cs"/>
+                <a:sym typeface="Calibri"/>
+              </a:defRPr>
+            </a:lvl7pPr>
+            <a:lvl8pPr marL="0" marR="0" indent="3200400" algn="l" defTabSz="1828800" rtl="0" fontAlgn="auto" latinLnBrk="0" hangingPunct="0">
+              <a:lnSpc>
+                <a:spcPct val="100000"/>
+              </a:lnSpc>
+              <a:spcBef>
+                <a:spcPts val="0"/>
+              </a:spcBef>
+              <a:spcAft>
+                <a:spcPts val="0"/>
+              </a:spcAft>
+              <a:buClrTx/>
+              <a:buSzTx/>
+              <a:buFontTx/>
+              <a:buNone/>
+              <a:tabLst/>
+              <a:defRPr kumimoji="0" sz="3600" b="0" i="0" u="none" strike="noStrike" cap="none" spc="0" normalizeH="0" baseline="0">
+                <a:ln>
+                  <a:noFill/>
+                </a:ln>
+                <a:solidFill>
+                  <a:srgbClr val="000000"/>
+                </a:solidFill>
+                <a:effectLst/>
+                <a:uFillTx/>
+                <a:latin typeface="+mj-lt"/>
+                <a:ea typeface="+mj-ea"/>
+                <a:cs typeface="+mj-cs"/>
+                <a:sym typeface="Calibri"/>
+              </a:defRPr>
+            </a:lvl8pPr>
+            <a:lvl9pPr marL="0" marR="0" indent="3657600" algn="l" defTabSz="1828800" rtl="0" fontAlgn="auto" latinLnBrk="0" hangingPunct="0">
+              <a:lnSpc>
+                <a:spcPct val="100000"/>
+              </a:lnSpc>
+              <a:spcBef>
+                <a:spcPts val="0"/>
+              </a:spcBef>
+              <a:spcAft>
+                <a:spcPts val="0"/>
+              </a:spcAft>
+              <a:buClrTx/>
+              <a:buSzTx/>
+              <a:buFontTx/>
+              <a:buNone/>
+              <a:tabLst/>
+              <a:defRPr kumimoji="0" sz="3600" b="0" i="0" u="none" strike="noStrike" cap="none" spc="0" normalizeH="0" baseline="0">
+                <a:ln>
+                  <a:noFill/>
+                </a:ln>
+                <a:solidFill>
+                  <a:srgbClr val="000000"/>
+                </a:solidFill>
+                <a:effectLst/>
+                <a:uFillTx/>
+                <a:latin typeface="+mj-lt"/>
+                <a:ea typeface="+mj-ea"/>
+                <a:cs typeface="+mj-cs"/>
+                <a:sym typeface="Calibri"/>
+              </a:defRPr>
+            </a:lvl9pPr>
+          </a:lstStyle>
+          <a:p>
+            <a:fld id="{86CB4B4D-7CA3-9044-876B-883B54F8677D}" type="slidenum">
+              <a:rPr lang="en-US" smtClean="0"/>
+              <a:pPr/>
+              <a:t>5</a:t>
+            </a:fld>
+            <a:endParaRPr/>
+          </a:p>
+        </p:txBody>
+      </p:sp>
+    </p:spTree>
+  </p:cSld>
+  <p:clrMapOvr>
+    <a:masterClrMapping/>
+  </p:clrMapOvr>
+</p:sld>
+</file>
+
+<file path=ppt/slides/slide6.xml><?xml version="1.0" encoding="utf-8"?>
 <p:sld xmlns:a="http://schemas.openxmlformats.org/drawingml/2006/main" xmlns:r="http://schemas.openxmlformats.org/officeDocument/2006/relationships" xmlns:p="http://schemas.openxmlformats.org/presentationml/2006/main">
   <p:cSld>
     <p:spTree>
@@ -31338,7 +31485,7 @@
           <a:p>
             <a:fld id="{20F37917-FD3A-4669-9018-DA04BCDD3D75}" type="slidenum">
               <a:rPr lang="en-US" smtClean="0"/>
-              <a:t>5</a:t>
+              <a:t>6</a:t>
             </a:fld>
             <a:endParaRPr lang="en-US"/>
           </a:p>
@@ -31348,133 +31495,6 @@
     <p:extLst>
       <p:ext uri="{BB962C8B-B14F-4D97-AF65-F5344CB8AC3E}">
         <p14:creationId xmlns:p14="http://schemas.microsoft.com/office/powerpoint/2010/main" val="2730934275"/>
-      </p:ext>
-    </p:extLst>
-  </p:cSld>
-  <p:clrMapOvr>
-    <a:masterClrMapping/>
-  </p:clrMapOvr>
-</p:sld>
-</file>
-
-<file path=ppt/slides/slide6.xml><?xml version="1.0" encoding="utf-8"?>
-<p:sld xmlns:a="http://schemas.openxmlformats.org/drawingml/2006/main" xmlns:r="http://schemas.openxmlformats.org/officeDocument/2006/relationships" xmlns:p="http://schemas.openxmlformats.org/presentationml/2006/main">
-  <p:cSld>
-    <p:spTree>
-      <p:nvGrpSpPr>
-        <p:cNvPr id="1" name=""/>
-        <p:cNvGrpSpPr/>
-        <p:nvPr/>
-      </p:nvGrpSpPr>
-      <p:grpSpPr>
-        <a:xfrm>
-          <a:off x="0" y="0"/>
-          <a:ext cx="0" cy="0"/>
-          <a:chOff x="0" y="0"/>
-          <a:chExt cx="0" cy="0"/>
-        </a:xfrm>
-      </p:grpSpPr>
-      <p:sp>
-        <p:nvSpPr>
-          <p:cNvPr id="2" name="Title 1">
-            <a:extLst>
-              <a:ext uri="{FF2B5EF4-FFF2-40B4-BE49-F238E27FC236}">
-                <a16:creationId xmlns:a16="http://schemas.microsoft.com/office/drawing/2014/main" id="{E0F6BE06-E7A1-310E-E500-E63DFAD176C6}"/>
-              </a:ext>
-            </a:extLst>
-          </p:cNvPr>
-          <p:cNvSpPr>
-            <a:spLocks noGrp="1"/>
-          </p:cNvSpPr>
-          <p:nvPr>
-            <p:ph type="title"/>
-          </p:nvPr>
-        </p:nvSpPr>
-        <p:spPr/>
-        <p:txBody>
-          <a:bodyPr/>
-          <a:lstStyle/>
-          <a:p>
-            <a:r>
-              <a:rPr lang="en-US" dirty="0"/>
-              <a:t>When have we written enough tests?</a:t>
-            </a:r>
-          </a:p>
-        </p:txBody>
-      </p:sp>
-      <p:sp>
-        <p:nvSpPr>
-          <p:cNvPr id="3" name="Content Placeholder 2">
-            <a:extLst>
-              <a:ext uri="{FF2B5EF4-FFF2-40B4-BE49-F238E27FC236}">
-                <a16:creationId xmlns:a16="http://schemas.microsoft.com/office/drawing/2014/main" id="{D5B33EF4-B109-7CF2-B4C0-2A72F88FD737}"/>
-              </a:ext>
-            </a:extLst>
-          </p:cNvPr>
-          <p:cNvSpPr>
-            <a:spLocks noGrp="1"/>
-          </p:cNvSpPr>
-          <p:nvPr>
-            <p:ph idx="1"/>
-          </p:nvPr>
-        </p:nvSpPr>
-        <p:spPr/>
-        <p:txBody>
-          <a:bodyPr/>
-          <a:lstStyle/>
-          <a:p>
-            <a:r>
-              <a:rPr lang="en-US" dirty="0"/>
-              <a:t>When we've tested each component with enough inputs?</a:t>
-            </a:r>
-          </a:p>
-          <a:p>
-            <a:r>
-              <a:rPr lang="en-US" dirty="0"/>
-              <a:t>When we've tested enough of our code?</a:t>
-            </a:r>
-          </a:p>
-          <a:p>
-            <a:r>
-              <a:rPr lang="en-US" dirty="0"/>
-              <a:t>When our tests are precise enough to detect likely bugs?</a:t>
-            </a:r>
-          </a:p>
-        </p:txBody>
-      </p:sp>
-      <p:sp>
-        <p:nvSpPr>
-          <p:cNvPr id="4" name="Slide Number Placeholder 3">
-            <a:extLst>
-              <a:ext uri="{FF2B5EF4-FFF2-40B4-BE49-F238E27FC236}">
-                <a16:creationId xmlns:a16="http://schemas.microsoft.com/office/drawing/2014/main" id="{E8E4E1C4-8272-0715-724D-5DFD08706E26}"/>
-              </a:ext>
-            </a:extLst>
-          </p:cNvPr>
-          <p:cNvSpPr>
-            <a:spLocks noGrp="1"/>
-          </p:cNvSpPr>
-          <p:nvPr>
-            <p:ph type="sldNum" sz="quarter" idx="12"/>
-          </p:nvPr>
-        </p:nvSpPr>
-        <p:spPr/>
-        <p:txBody>
-          <a:bodyPr/>
-          <a:lstStyle/>
-          <a:p>
-            <a:fld id="{20F37917-FD3A-4669-9018-DA04BCDD3D75}" type="slidenum">
-              <a:rPr lang="en-US" smtClean="0"/>
-              <a:t>6</a:t>
-            </a:fld>
-            <a:endParaRPr lang="en-US"/>
-          </a:p>
-        </p:txBody>
-      </p:sp>
-    </p:spTree>
-    <p:extLst>
-      <p:ext uri="{BB962C8B-B14F-4D97-AF65-F5344CB8AC3E}">
-        <p14:creationId xmlns:p14="http://schemas.microsoft.com/office/powerpoint/2010/main" val="4211547200"/>
       </p:ext>
     </p:extLst>
   </p:cSld>

--- a/Slides/Module 03 Unit Testing.pptx
+++ b/Slides/Module 03 Unit Testing.pptx
@@ -23647,7 +23647,7 @@
           </a:ln>
           <a:extLst>
             <a:ext uri="{C572A759-6A51-4108-AA02-DFA0A04FC94B}">
-              <ma14:wrappingTextBoxFlag xmlns:ma14="http://schemas.microsoft.com/office/mac/drawingml/2011/main" xmlns:a14="http://schemas.microsoft.com/office/drawing/2010/main" xmlns:m="http://schemas.openxmlformats.org/officeDocument/2006/math" xmlns="" val="1"/>
+              <ma14:wrappingTextBoxFlag xmlns="" xmlns:m="http://schemas.openxmlformats.org/officeDocument/2006/math" xmlns:a14="http://schemas.microsoft.com/office/drawing/2010/main" xmlns:ma14="http://schemas.microsoft.com/office/mac/drawingml/2011/main" val="1"/>
             </a:ext>
           </a:extLst>
         </p:spPr>
@@ -23985,7 +23985,7 @@
           </a:ln>
           <a:extLst>
             <a:ext uri="{C572A759-6A51-4108-AA02-DFA0A04FC94B}">
-              <ma14:wrappingTextBoxFlag xmlns:ma14="http://schemas.microsoft.com/office/mac/drawingml/2011/main" xmlns:a14="http://schemas.microsoft.com/office/drawing/2010/main" xmlns:m="http://schemas.openxmlformats.org/officeDocument/2006/math" xmlns="" val="1"/>
+              <ma14:wrappingTextBoxFlag xmlns="" xmlns:m="http://schemas.openxmlformats.org/officeDocument/2006/math" xmlns:a14="http://schemas.microsoft.com/office/drawing/2010/main" xmlns:ma14="http://schemas.microsoft.com/office/mac/drawingml/2011/main" val="1"/>
             </a:ext>
           </a:extLst>
         </p:spPr>
@@ -24410,7 +24410,7 @@
           </a:ln>
           <a:extLst>
             <a:ext uri="{C572A759-6A51-4108-AA02-DFA0A04FC94B}">
-              <ma14:wrappingTextBoxFlag xmlns:ma14="http://schemas.microsoft.com/office/mac/drawingml/2011/main" xmlns:a14="http://schemas.microsoft.com/office/drawing/2010/main" xmlns:m="http://schemas.openxmlformats.org/officeDocument/2006/math" xmlns="" val="1"/>
+              <ma14:wrappingTextBoxFlag xmlns="" xmlns:m="http://schemas.openxmlformats.org/officeDocument/2006/math" xmlns:a14="http://schemas.microsoft.com/office/drawing/2010/main" xmlns:ma14="http://schemas.microsoft.com/office/mac/drawingml/2011/main" val="1"/>
             </a:ext>
           </a:extLst>
         </p:spPr>
@@ -24447,7 +24447,7 @@
           </a:ln>
           <a:extLst>
             <a:ext uri="{C572A759-6A51-4108-AA02-DFA0A04FC94B}">
-              <ma14:wrappingTextBoxFlag xmlns:ma14="http://schemas.microsoft.com/office/mac/drawingml/2011/main" xmlns:a14="http://schemas.microsoft.com/office/drawing/2010/main" xmlns:m="http://schemas.openxmlformats.org/officeDocument/2006/math" xmlns="" val="1"/>
+              <ma14:wrappingTextBoxFlag xmlns="" xmlns:m="http://schemas.openxmlformats.org/officeDocument/2006/math" xmlns:a14="http://schemas.microsoft.com/office/drawing/2010/main" xmlns:ma14="http://schemas.microsoft.com/office/mac/drawingml/2011/main" val="1"/>
             </a:ext>
           </a:extLst>
         </p:spPr>
@@ -24510,7 +24510,7 @@
             </a:ln>
             <a:extLst>
               <a:ext uri="{C572A759-6A51-4108-AA02-DFA0A04FC94B}">
-                <ma14:wrappingTextBoxFlag xmlns:ma14="http://schemas.microsoft.com/office/mac/drawingml/2011/main" xmlns:a14="http://schemas.microsoft.com/office/drawing/2010/main" xmlns:m="http://schemas.openxmlformats.org/officeDocument/2006/math" xmlns="" val="1"/>
+                <ma14:wrappingTextBoxFlag xmlns="" xmlns:m="http://schemas.openxmlformats.org/officeDocument/2006/math" xmlns:a14="http://schemas.microsoft.com/office/drawing/2010/main" xmlns:ma14="http://schemas.microsoft.com/office/mac/drawingml/2011/main" val="1"/>
               </a:ext>
             </a:extLst>
           </p:spPr>
@@ -29194,7 +29194,7 @@
           </a:ln>
           <a:extLst>
             <a:ext uri="{C572A759-6A51-4108-AA02-DFA0A04FC94B}">
-              <ma14:wrappingTextBoxFlag xmlns:ma14="http://schemas.microsoft.com/office/mac/drawingml/2011/main" xmlns:a14="http://schemas.microsoft.com/office/drawing/2010/main" xmlns:m="http://schemas.openxmlformats.org/officeDocument/2006/math" xmlns="" val="1"/>
+              <ma14:wrappingTextBoxFlag xmlns="" xmlns:m="http://schemas.openxmlformats.org/officeDocument/2006/math" xmlns:a14="http://schemas.microsoft.com/office/drawing/2010/main" xmlns:ma14="http://schemas.microsoft.com/office/mac/drawingml/2011/main" val="1"/>
             </a:ext>
           </a:extLst>
         </p:spPr>
@@ -29559,7 +29559,7 @@
           </a:ln>
           <a:extLst>
             <a:ext uri="{C572A759-6A51-4108-AA02-DFA0A04FC94B}">
-              <ma14:wrappingTextBoxFlag xmlns:ma14="http://schemas.microsoft.com/office/mac/drawingml/2011/main" xmlns:a14="http://schemas.microsoft.com/office/drawing/2010/main" xmlns:m="http://schemas.openxmlformats.org/officeDocument/2006/math" xmlns="" val="1"/>
+              <ma14:wrappingTextBoxFlag xmlns="" xmlns:m="http://schemas.openxmlformats.org/officeDocument/2006/math" xmlns:a14="http://schemas.microsoft.com/office/drawing/2010/main" xmlns:ma14="http://schemas.microsoft.com/office/mac/drawingml/2011/main" val="1"/>
             </a:ext>
           </a:extLst>
         </p:spPr>
@@ -29728,7 +29728,7 @@
           </a:ln>
           <a:extLst>
             <a:ext uri="{C572A759-6A51-4108-AA02-DFA0A04FC94B}">
-              <ma14:wrappingTextBoxFlag xmlns:ma14="http://schemas.microsoft.com/office/mac/drawingml/2011/main" xmlns:a14="http://schemas.microsoft.com/office/drawing/2010/main" xmlns:m="http://schemas.openxmlformats.org/officeDocument/2006/math" xmlns="" val="1"/>
+              <ma14:wrappingTextBoxFlag xmlns="" xmlns:m="http://schemas.openxmlformats.org/officeDocument/2006/math" xmlns:a14="http://schemas.microsoft.com/office/drawing/2010/main" xmlns:ma14="http://schemas.microsoft.com/office/mac/drawingml/2011/main" val="1"/>
             </a:ext>
           </a:extLst>
         </p:spPr>
@@ -30220,7 +30220,7 @@
           </a:ln>
           <a:extLst>
             <a:ext uri="{C572A759-6A51-4108-AA02-DFA0A04FC94B}">
-              <ma14:wrappingTextBoxFlag xmlns="" xmlns:m="http://schemas.openxmlformats.org/officeDocument/2006/math" xmlns:a14="http://schemas.microsoft.com/office/drawing/2010/main" xmlns:ma14="http://schemas.microsoft.com/office/mac/drawingml/2011/main" val="1"/>
+              <ma14:wrappingTextBoxFlag xmlns:ma14="http://schemas.microsoft.com/office/mac/drawingml/2011/main" xmlns:a14="http://schemas.microsoft.com/office/drawing/2010/main" xmlns:m="http://schemas.openxmlformats.org/officeDocument/2006/math" xmlns="" val="1"/>
             </a:ext>
           </a:extLst>
         </p:spPr>
@@ -31019,7 +31019,7 @@
           </a:ln>
           <a:extLst>
             <a:ext uri="{C572A759-6A51-4108-AA02-DFA0A04FC94B}">
-              <ma14:wrappingTextBoxFlag xmlns:ma14="http://schemas.microsoft.com/office/mac/drawingml/2011/main" xmlns:a14="http://schemas.microsoft.com/office/drawing/2010/main" xmlns:m="http://schemas.openxmlformats.org/officeDocument/2006/math" xmlns="" val="1"/>
+              <ma14:wrappingTextBoxFlag xmlns="" xmlns:m="http://schemas.openxmlformats.org/officeDocument/2006/math" xmlns:a14="http://schemas.microsoft.com/office/drawing/2010/main" xmlns:ma14="http://schemas.microsoft.com/office/mac/drawingml/2011/main" val="1"/>
             </a:ext>
           </a:extLst>
         </p:spPr>

--- a/Slides/Module 03 Unit Testing.pptx
+++ b/Slides/Module 03 Unit Testing.pptx
@@ -324,7 +324,7 @@
           <a:p>
             <a:fld id="{7C7E5181-6CF5-45F7-A87A-E0E0B1FD7549}" type="datetimeFigureOut">
               <a:rPr lang="en-US" smtClean="0"/>
-              <a:t>8/18/2026</a:t>
+              <a:t>9/11/2026</a:t>
             </a:fld>
             <a:endParaRPr lang="en-US"/>
           </a:p>
@@ -4895,7 +4895,7 @@
           <a:p>
             <a:fld id="{5D2A64DE-480B-420F-9649-4F8E696E08E0}" type="datetime1">
               <a:rPr lang="en-US" smtClean="0"/>
-              <a:t>8/18/2026</a:t>
+              <a:t>9/11/2026</a:t>
             </a:fld>
             <a:endParaRPr lang="en-US"/>
           </a:p>
@@ -5219,7 +5219,7 @@
           <a:p>
             <a:fld id="{EA476A42-A091-4468-A075-64A31BE59948}" type="datetime1">
               <a:rPr lang="en-US" smtClean="0"/>
-              <a:t>8/18/2026</a:t>
+              <a:t>9/11/2026</a:t>
             </a:fld>
             <a:endParaRPr lang="en-US"/>
           </a:p>
@@ -5417,7 +5417,7 @@
           <a:p>
             <a:fld id="{0D3616D0-8311-4107-9726-6B805E7D05BA}" type="datetime1">
               <a:rPr lang="en-US" smtClean="0"/>
-              <a:t>8/18/2026</a:t>
+              <a:t>9/11/2026</a:t>
             </a:fld>
             <a:endParaRPr lang="en-US"/>
           </a:p>
@@ -5625,7 +5625,7 @@
           <a:p>
             <a:fld id="{3BC2557A-5C88-417A-A763-5AC779462A5F}" type="datetime1">
               <a:rPr lang="en-US" smtClean="0"/>
-              <a:t>8/18/2026</a:t>
+              <a:t>9/11/2026</a:t>
             </a:fld>
             <a:endParaRPr lang="en-US"/>
           </a:p>
@@ -6047,7 +6047,7 @@
           <a:p>
             <a:fld id="{07C7BFD4-467E-4EDE-93EA-052F5B39A4E5}" type="datetime1">
               <a:rPr lang="en-US" smtClean="0"/>
-              <a:t>8/18/2026</a:t>
+              <a:t>9/11/2026</a:t>
             </a:fld>
             <a:endParaRPr lang="en-US"/>
           </a:p>
@@ -6297,7 +6297,7 @@
           <a:p>
             <a:fld id="{07C7BFD4-467E-4EDE-93EA-052F5B39A4E5}" type="datetime1">
               <a:rPr lang="en-US" smtClean="0"/>
-              <a:t>8/18/2026</a:t>
+              <a:t>9/11/2026</a:t>
             </a:fld>
             <a:endParaRPr lang="en-US"/>
           </a:p>
@@ -6479,7 +6479,7 @@
           <a:p>
             <a:fld id="{109E55A0-C911-4F03-82FC-7E5926047D46}" type="datetime1">
               <a:rPr lang="en-US" smtClean="0"/>
-              <a:t>8/18/2026</a:t>
+              <a:t>9/11/2026</a:t>
             </a:fld>
             <a:endParaRPr lang="en-US"/>
           </a:p>
@@ -6792,7 +6792,7 @@
           <a:p>
             <a:fld id="{A533CBE2-D5BE-47AC-ADC2-9CDFC1D0CF90}" type="datetime1">
               <a:rPr lang="en-US" smtClean="0"/>
-              <a:t>8/18/2026</a:t>
+              <a:t>9/11/2026</a:t>
             </a:fld>
             <a:endParaRPr lang="en-US"/>
           </a:p>
@@ -7093,7 +7093,7 @@
           <a:p>
             <a:fld id="{39B7EDB1-CE74-4951-85A2-0B01C2128E28}" type="datetime1">
               <a:rPr lang="en-US" smtClean="0"/>
-              <a:t>8/18/2026</a:t>
+              <a:t>9/11/2026</a:t>
             </a:fld>
             <a:endParaRPr lang="en-US"/>
           </a:p>
@@ -7541,7 +7541,7 @@
           <a:p>
             <a:fld id="{2BC7EB92-A5C2-4807-A9DC-9EDE6CBFB241}" type="datetime1">
               <a:rPr lang="en-US" smtClean="0"/>
-              <a:t>8/18/2026</a:t>
+              <a:t>9/11/2026</a:t>
             </a:fld>
             <a:endParaRPr lang="en-US"/>
           </a:p>
@@ -7654,7 +7654,7 @@
           <a:p>
             <a:fld id="{2B7B7EE0-7771-4CD5-9B2B-3550753A54A1}" type="datetime1">
               <a:rPr lang="en-US" smtClean="0"/>
-              <a:t>8/18/2026</a:t>
+              <a:t>9/11/2026</a:t>
             </a:fld>
             <a:endParaRPr lang="en-US"/>
           </a:p>
@@ -7965,7 +7965,7 @@
           <a:p>
             <a:fld id="{F8B318B3-0E87-4416-A9B8-D891968C2727}" type="datetime1">
               <a:rPr lang="en-US" smtClean="0"/>
-              <a:t>8/18/2026</a:t>
+              <a:t>9/11/2026</a:t>
             </a:fld>
             <a:endParaRPr lang="en-US"/>
           </a:p>
@@ -8206,7 +8206,7 @@
           <a:p>
             <a:fld id="{54D997E8-DDEE-43F1-8D9B-F8A1E11DE488}" type="datetime1">
               <a:rPr lang="en-US" smtClean="0"/>
-              <a:t>8/18/2026</a:t>
+              <a:t>9/11/2026</a:t>
             </a:fld>
             <a:endParaRPr lang="en-US"/>
           </a:p>
@@ -16489,13 +16489,13 @@
         </p:nvSpPr>
         <p:spPr>
           <a:xfrm>
-            <a:off x="838200" y="1500188"/>
-            <a:ext cx="7886700" cy="4351337"/>
+            <a:off x="838199" y="1500188"/>
+            <a:ext cx="9209049" cy="4351337"/>
           </a:xfrm>
         </p:spPr>
         <p:txBody>
           <a:bodyPr>
-            <a:normAutofit fontScale="92500"/>
+            <a:normAutofit lnSpcReduction="10000"/>
           </a:bodyPr>
           <a:lstStyle/>
           <a:p>
@@ -16508,40 +16508,24 @@
             </a:r>
           </a:p>
           <a:p>
-            <a:pPr marL="514350" indent="-514350">
-              <a:buFont typeface="+mj-lt"/>
-              <a:buAutoNum type="arabicPeriod"/>
-            </a:pPr>
             <a:r>
               <a:rPr lang="en-US" dirty="0"/>
               <a:t>Explain three general ways of judging whether we've written enough tests</a:t>
             </a:r>
           </a:p>
           <a:p>
-            <a:pPr marL="514350" indent="-514350">
-              <a:buFont typeface="+mj-lt"/>
-              <a:buAutoNum type="arabicPeriod"/>
-            </a:pPr>
             <a:r>
               <a:rPr lang="en-US" dirty="0"/>
               <a:t>Explain how contracts provide better guidance than types in choosing test cases</a:t>
             </a:r>
           </a:p>
           <a:p>
-            <a:pPr marL="514350" indent="-514350">
-              <a:buFont typeface="+mj-lt"/>
-              <a:buAutoNum type="arabicPeriod"/>
-            </a:pPr>
             <a:r>
               <a:rPr lang="en-US" dirty="0"/>
               <a:t>Explain various measures of code coverage (including statements, branches, functions, and lines)</a:t>
             </a:r>
           </a:p>
           <a:p>
-            <a:pPr marL="514350" indent="-514350">
-              <a:buFont typeface="+mj-lt"/>
-              <a:buAutoNum type="arabicPeriod"/>
-            </a:pPr>
             <a:r>
               <a:rPr lang="en-US" dirty="0"/>
               <a:t>Explain how adversarial testing helps gauge whether our tests are sensitive enough to detect likely bugs</a:t>
@@ -23647,7 +23631,7 @@
           </a:ln>
           <a:extLst>
             <a:ext uri="{C572A759-6A51-4108-AA02-DFA0A04FC94B}">
-              <ma14:wrappingTextBoxFlag xmlns="" xmlns:m="http://schemas.openxmlformats.org/officeDocument/2006/math" xmlns:a14="http://schemas.microsoft.com/office/drawing/2010/main" xmlns:ma14="http://schemas.microsoft.com/office/mac/drawingml/2011/main" val="1"/>
+              <ma14:wrappingTextBoxFlag xmlns:ma14="http://schemas.microsoft.com/office/mac/drawingml/2011/main" xmlns:a14="http://schemas.microsoft.com/office/drawing/2010/main" xmlns:m="http://schemas.openxmlformats.org/officeDocument/2006/math" xmlns="" val="1"/>
             </a:ext>
           </a:extLst>
         </p:spPr>
@@ -23985,7 +23969,7 @@
           </a:ln>
           <a:extLst>
             <a:ext uri="{C572A759-6A51-4108-AA02-DFA0A04FC94B}">
-              <ma14:wrappingTextBoxFlag xmlns="" xmlns:m="http://schemas.openxmlformats.org/officeDocument/2006/math" xmlns:a14="http://schemas.microsoft.com/office/drawing/2010/main" xmlns:ma14="http://schemas.microsoft.com/office/mac/drawingml/2011/main" val="1"/>
+              <ma14:wrappingTextBoxFlag xmlns:ma14="http://schemas.microsoft.com/office/mac/drawingml/2011/main" xmlns:a14="http://schemas.microsoft.com/office/drawing/2010/main" xmlns:m="http://schemas.openxmlformats.org/officeDocument/2006/math" xmlns="" val="1"/>
             </a:ext>
           </a:extLst>
         </p:spPr>
@@ -24410,7 +24394,7 @@
           </a:ln>
           <a:extLst>
             <a:ext uri="{C572A759-6A51-4108-AA02-DFA0A04FC94B}">
-              <ma14:wrappingTextBoxFlag xmlns="" xmlns:m="http://schemas.openxmlformats.org/officeDocument/2006/math" xmlns:a14="http://schemas.microsoft.com/office/drawing/2010/main" xmlns:ma14="http://schemas.microsoft.com/office/mac/drawingml/2011/main" val="1"/>
+              <ma14:wrappingTextBoxFlag xmlns:ma14="http://schemas.microsoft.com/office/mac/drawingml/2011/main" xmlns:a14="http://schemas.microsoft.com/office/drawing/2010/main" xmlns:m="http://schemas.openxmlformats.org/officeDocument/2006/math" xmlns="" val="1"/>
             </a:ext>
           </a:extLst>
         </p:spPr>
@@ -24447,7 +24431,7 @@
           </a:ln>
           <a:extLst>
             <a:ext uri="{C572A759-6A51-4108-AA02-DFA0A04FC94B}">
-              <ma14:wrappingTextBoxFlag xmlns="" xmlns:m="http://schemas.openxmlformats.org/officeDocument/2006/math" xmlns:a14="http://schemas.microsoft.com/office/drawing/2010/main" xmlns:ma14="http://schemas.microsoft.com/office/mac/drawingml/2011/main" val="1"/>
+              <ma14:wrappingTextBoxFlag xmlns:ma14="http://schemas.microsoft.com/office/mac/drawingml/2011/main" xmlns:a14="http://schemas.microsoft.com/office/drawing/2010/main" xmlns:m="http://schemas.openxmlformats.org/officeDocument/2006/math" xmlns="" val="1"/>
             </a:ext>
           </a:extLst>
         </p:spPr>
@@ -24510,7 +24494,7 @@
             </a:ln>
             <a:extLst>
               <a:ext uri="{C572A759-6A51-4108-AA02-DFA0A04FC94B}">
-                <ma14:wrappingTextBoxFlag xmlns="" xmlns:m="http://schemas.openxmlformats.org/officeDocument/2006/math" xmlns:a14="http://schemas.microsoft.com/office/drawing/2010/main" xmlns:ma14="http://schemas.microsoft.com/office/mac/drawingml/2011/main" val="1"/>
+                <ma14:wrappingTextBoxFlag xmlns:ma14="http://schemas.microsoft.com/office/mac/drawingml/2011/main" xmlns:a14="http://schemas.microsoft.com/office/drawing/2010/main" xmlns:m="http://schemas.openxmlformats.org/officeDocument/2006/math" xmlns="" val="1"/>
               </a:ext>
             </a:extLst>
           </p:spPr>
@@ -29194,7 +29178,7 @@
           </a:ln>
           <a:extLst>
             <a:ext uri="{C572A759-6A51-4108-AA02-DFA0A04FC94B}">
-              <ma14:wrappingTextBoxFlag xmlns="" xmlns:m="http://schemas.openxmlformats.org/officeDocument/2006/math" xmlns:a14="http://schemas.microsoft.com/office/drawing/2010/main" xmlns:ma14="http://schemas.microsoft.com/office/mac/drawingml/2011/main" val="1"/>
+              <ma14:wrappingTextBoxFlag xmlns:ma14="http://schemas.microsoft.com/office/mac/drawingml/2011/main" xmlns:a14="http://schemas.microsoft.com/office/drawing/2010/main" xmlns:m="http://schemas.openxmlformats.org/officeDocument/2006/math" xmlns="" val="1"/>
             </a:ext>
           </a:extLst>
         </p:spPr>
@@ -29559,7 +29543,7 @@
           </a:ln>
           <a:extLst>
             <a:ext uri="{C572A759-6A51-4108-AA02-DFA0A04FC94B}">
-              <ma14:wrappingTextBoxFlag xmlns="" xmlns:m="http://schemas.openxmlformats.org/officeDocument/2006/math" xmlns:a14="http://schemas.microsoft.com/office/drawing/2010/main" xmlns:ma14="http://schemas.microsoft.com/office/mac/drawingml/2011/main" val="1"/>
+              <ma14:wrappingTextBoxFlag xmlns:ma14="http://schemas.microsoft.com/office/mac/drawingml/2011/main" xmlns:a14="http://schemas.microsoft.com/office/drawing/2010/main" xmlns:m="http://schemas.openxmlformats.org/officeDocument/2006/math" xmlns="" val="1"/>
             </a:ext>
           </a:extLst>
         </p:spPr>
@@ -29728,7 +29712,7 @@
           </a:ln>
           <a:extLst>
             <a:ext uri="{C572A759-6A51-4108-AA02-DFA0A04FC94B}">
-              <ma14:wrappingTextBoxFlag xmlns="" xmlns:m="http://schemas.openxmlformats.org/officeDocument/2006/math" xmlns:a14="http://schemas.microsoft.com/office/drawing/2010/main" xmlns:ma14="http://schemas.microsoft.com/office/mac/drawingml/2011/main" val="1"/>
+              <ma14:wrappingTextBoxFlag xmlns:ma14="http://schemas.microsoft.com/office/mac/drawingml/2011/main" xmlns:a14="http://schemas.microsoft.com/office/drawing/2010/main" xmlns:m="http://schemas.openxmlformats.org/officeDocument/2006/math" xmlns="" val="1"/>
             </a:ext>
           </a:extLst>
         </p:spPr>
@@ -30220,7 +30204,7 @@
           </a:ln>
           <a:extLst>
             <a:ext uri="{C572A759-6A51-4108-AA02-DFA0A04FC94B}">
-              <ma14:wrappingTextBoxFlag xmlns:ma14="http://schemas.microsoft.com/office/mac/drawingml/2011/main" xmlns:a14="http://schemas.microsoft.com/office/drawing/2010/main" xmlns:m="http://schemas.openxmlformats.org/officeDocument/2006/math" xmlns="" val="1"/>
+              <ma14:wrappingTextBoxFlag xmlns="" xmlns:m="http://schemas.openxmlformats.org/officeDocument/2006/math" xmlns:a14="http://schemas.microsoft.com/office/drawing/2010/main" xmlns:ma14="http://schemas.microsoft.com/office/mac/drawingml/2011/main" val="1"/>
             </a:ext>
           </a:extLst>
         </p:spPr>
@@ -31019,7 +31003,7 @@
           </a:ln>
           <a:extLst>
             <a:ext uri="{C572A759-6A51-4108-AA02-DFA0A04FC94B}">
-              <ma14:wrappingTextBoxFlag xmlns="" xmlns:m="http://schemas.openxmlformats.org/officeDocument/2006/math" xmlns:a14="http://schemas.microsoft.com/office/drawing/2010/main" xmlns:ma14="http://schemas.microsoft.com/office/mac/drawingml/2011/main" val="1"/>
+              <ma14:wrappingTextBoxFlag xmlns:ma14="http://schemas.microsoft.com/office/mac/drawingml/2011/main" xmlns:a14="http://schemas.microsoft.com/office/drawing/2010/main" xmlns:m="http://schemas.openxmlformats.org/officeDocument/2006/math" xmlns="" val="1"/>
             </a:ext>
           </a:extLst>
         </p:spPr>
